--- a/output/presentation/MLOP-PJ_Presentation.pptx
+++ b/output/presentation/MLOP-PJ_Presentation.pptx
@@ -1289,7 +1289,7 @@
           </a:p>
           <a:p>
             <a:r>
-              <a:t>The short-demo plan totals 88.89 THB, including a 60 THB reserve. At 10,000 planned predictions, that is 8.89 THB per 1,000. The plan assumes 40 THB per USD, one training VM-hour, two app-active hours, and two ACR days. This is before credits. Actual billing is still unavailable, so we cannot claim the final spend or a real spending cap.</a:t>
+              <a:t>The short-demo plan totals 88.89 THB, including a 60 THB reserve. At 10,000 planned predictions, that is 8.89 THB per 1,000 before credits. The reported Azure cost is 0.00120350 USD for 841 observed valid profiles in the same query window. Billing and logs may lag. This is provisional, not the final invoice or proof of the budget cap.</a:t>
             </a:r>
           </a:p>
           <a:p>
@@ -1510,7 +1510,7 @@
           </a:p>
           <a:p>
             <a:r>
-              <a:t>Our first priorities are the unmet latency target and the missing actual cost evidence. Measure from a closer client and separate network time from application time before changing replicas or spending more. Recheck billing over the same usage window. Add live feature windows only when we have valid current data. Review labels and prepare real Portal screenshots. Retest later source changes in CI and save evidence before cloud cleanup.</a:t>
+              <a:t>Our first priorities are the unmet latency target and complete cost reconciliation. Separate network time from application time before changing replicas or spending more. Recheck billing and usage after cleanup when the data has settled. Add live feature windows only when current data is available. Review segment labels and improve the dashboard. Save evidence and remove resources after the demo.</a:t>
             </a:r>
           </a:p>
           <a:p>
@@ -2906,7 +2906,7 @@
           </a:p>
           <a:p>
             <a:r>
-              <a:t>Live demo: open Notebook 22 and run the small smoke check in PRESENTATION.md. Show one valid prediction, an incomplete profile returning 422, and a batch of 100. A valid uncertain profile returns 200 with a null segment. The example shown here is a real HTTP response saved from the live API, not a live screenshot.</a:t>
+              <a:t>Live demo: open Notebook 22 and run the small smoke check in PRESENTATION.md. Show one valid prediction, an incomplete profile returning 422, and a batch of 100. A valid uncertain profile returns 200 with a null segment. The example shown here is a saved real HTTP response, not a live screenshot.</a:t>
             </a:r>
           </a:p>
           <a:p>
@@ -3127,7 +3127,7 @@
           </a:p>
           <a:p>
             <a:r>
-              <a:t>Both saved runs use commit 1e0bd12. In the normal run, tests and deployment passed. In the deliberate failure run, tests failed and deployment was skipped. Click the run links to show the actual jobs. These runs do not verify later local code changes.</a:t>
+              <a:t>Both saved runs use commit 9fea51a. In the normal run, tests and deployment passed. In the deliberate failure run, tests failed and deployment was skipped. Click the run links to show the actual jobs. These runs do not verify later local code changes.</a:t>
             </a:r>
           </a:p>
           <a:p>
@@ -3348,12 +3348,12 @@
           </a:p>
           <a:p>
             <a:r>
-              <a:t>Each warm test used 200 requests, concurrency 10, batch size 1, and excluded 10 warm-up requests. Both had zero errors. Azure timing includes the WSL network path. Local and cloud warm p95 are different scopes. Cold start is one first readiness request after verified zero replicas, not a percentile.</a:t>
-            </a:r>
-          </a:p>
-          <a:p>
-            <a:r>
-              <a:t>Source: reports/serving-recheck/local-load.json; azure-load.json; finish-cold.json</a:t>
+              <a:t>Warm tests used 200 requests, concurrency 10, batch size 1, and excluded warm-up requests. All had zero errors. The pooled-client test used parallel warm-up and connection reuse, so it is a separate measurement, not proof of a server speedup. Azure timing includes the WSL network path. Cold start is one readiness request after verified zero replicas, not a percentile.</a:t>
+            </a:r>
+          </a:p>
+          <a:p>
+            <a:r>
+              <a:t>Source: reports/serving-recheck/local-load.json; azure-load.json; pooled-load.json; finish-cold.json</a:t>
             </a:r>
           </a:p>
         </p:txBody>
@@ -9371,7 +9371,7 @@
                 </a:solidFill>
                 <a:latin typeface="Poppins"/>
               </a:rPr>
-              <a:t>ACTUAL BILL</a:t>
+              <a:t>REPORTED COST</a:t>
             </a:r>
           </a:p>
         </p:txBody>
@@ -9413,7 +9413,7 @@
                 </a:solidFill>
                 <a:latin typeface="Poppins"/>
               </a:rPr>
-              <a:t>Not available yet</a:t>
+              <a:t>0.00143104 USD / 1,000</a:t>
             </a:r>
           </a:p>
           <a:p>
@@ -9432,7 +9432,7 @@
                 </a:solidFill>
                 <a:latin typeface="Poppins"/>
               </a:rPr>
-              <a:t>Budget is a target</a:t>
+              <a:t>841 observed profiles</a:t>
             </a:r>
           </a:p>
           <a:p>
@@ -9451,7 +9451,7 @@
                 </a:solidFill>
                 <a:latin typeface="Poppins"/>
               </a:rPr>
-              <a:t>Keep billing and usage aligned</a:t>
+              <a:t>Provisional; not a final bill</a:t>
             </a:r>
           </a:p>
         </p:txBody>
@@ -9897,7 +9897,7 @@
                           </a:solidFill>
                           <a:latin typeface="Poppins"/>
                         </a:rPr>
-                        <a:t>Actual cost evidence</a:t>
+                        <a:t>Cost reconciliation</a:t>
                       </a:r>
                     </a:p>
                   </a:txBody>
@@ -9919,7 +9919,7 @@
                           </a:solidFill>
                           <a:latin typeface="Poppins"/>
                         </a:rPr>
-                        <a:t>Match the bill and prediction count over one window</a:t>
+                        <a:t>Recheck full cost and usage when billing updates</a:t>
                       </a:r>
                     </a:p>
                   </a:txBody>
@@ -9989,7 +9989,7 @@
                           </a:solidFill>
                           <a:latin typeface="Poppins"/>
                         </a:rPr>
-                        <a:t>Final delivery</a:t>
+                        <a:t>User quality</a:t>
                       </a:r>
                     </a:p>
                   </a:txBody>
@@ -10011,7 +10011,7 @@
                           </a:solidFill>
                           <a:latin typeface="Poppins"/>
                         </a:rPr>
-                        <a:t>Review labels, capture Portal evidence, retest final code</a:t>
+                        <a:t>Review segment labels and test useful recommendations</a:t>
                       </a:r>
                     </a:p>
                   </a:txBody>
@@ -10762,10 +10762,6 @@
             </a:stretch>
           </a:blipFill>
         </p:spPr>
-        <p:txBody>
-          <a:bodyPr/>
-          <a:p/>
-        </p:txBody>
       </p:sp>
       <p:sp>
         <p:nvSpPr>
@@ -10818,10 +10814,6 @@
             </a:stretch>
           </a:blipFill>
         </p:spPr>
-        <p:txBody>
-          <a:bodyPr/>
-          <a:p/>
-        </p:txBody>
       </p:sp>
       <p:sp>
         <p:nvSpPr>
@@ -10874,10 +10866,6 @@
             </a:stretch>
           </a:blipFill>
         </p:spPr>
-        <p:txBody>
-          <a:bodyPr/>
-          <a:p/>
-        </p:txBody>
       </p:sp>
       <p:sp>
         <p:nvSpPr>
@@ -10930,10 +10918,6 @@
             </a:stretch>
           </a:blipFill>
         </p:spPr>
-        <p:txBody>
-          <a:bodyPr/>
-          <a:p/>
-        </p:txBody>
       </p:sp>
       <p:sp>
         <p:nvSpPr>
@@ -10986,10 +10970,6 @@
             </a:stretch>
           </a:blipFill>
         </p:spPr>
-        <p:txBody>
-          <a:bodyPr/>
-          <a:p/>
-        </p:txBody>
       </p:sp>
     </p:spTree>
   </p:cSld>
@@ -14738,7 +14718,7 @@
                 </a:solidFill>
                 <a:latin typeface="Consolas"/>
               </a:rPr>
-              <a:t>CI image digest: b55cd10aba3f...</a:t>
+              <a:t>CI image digest: f124df59007a...</a:t>
             </a:r>
           </a:p>
         </p:txBody>
@@ -16242,7 +16222,7 @@
                 <a:latin typeface="Poppins"/>
                 <a:hlinkClick r:id="rId5"/>
               </a:rPr>
-              <a:t>Open GitHub Actions run 38166188586</a:t>
+              <a:t>Open GitHub Actions run 38173375457</a:t>
             </a:r>
           </a:p>
         </p:txBody>
@@ -16285,7 +16265,7 @@
                 <a:latin typeface="Poppins"/>
                 <a:hlinkClick r:id="rId6"/>
               </a:rPr>
-              <a:t>Open GitHub Actions run 38166197980</a:t>
+              <a:t>Open GitHub Actions run 38173380800</a:t>
             </a:r>
           </a:p>
         </p:txBody>
@@ -16327,7 +16307,7 @@
                 </a:solidFill>
                 <a:latin typeface="Poppins"/>
               </a:rPr>
-              <a:t>Same tested source commit: 1e0bd12  |  OIDC login + limited roles  |  Immutable image</a:t>
+              <a:t>Same tested source commit: 9fea51a  |  OIDC login + limited roles  |  Immutable image</a:t>
             </a:r>
           </a:p>
         </p:txBody>
@@ -16599,7 +16579,7 @@
                 </a:solidFill>
                 <a:latin typeface="Poppins"/>
               </a:rPr>
-              <a:t>Source: reports/serving-recheck/local-load.json; azure-load.json; finish-cold.json</a:t>
+              <a:t>Source: reports/serving-recheck/local-load.json; azure-load.json; pooled-load.json; finish-cold.json</a:t>
             </a:r>
           </a:p>
         </p:txBody>
@@ -16790,7 +16770,7 @@
                 </a:solidFill>
                 <a:latin typeface="Poppins"/>
               </a:rPr>
-              <a:t>Errors: 0 in both runs</a:t>
+              <a:t>Errors: 0 in all runs</a:t>
             </a:r>
           </a:p>
         </p:txBody>
@@ -17236,14 +17216,14 @@
       </p:sp>
       <p:pic>
         <p:nvPicPr>
-          <p:cNvPr id="19" name="Picture 18" descr="monitor-logs.png"/>
+          <p:cNvPr id="11" name="Picture 10" descr="monitor-logs.png"/>
           <p:cNvPicPr>
             <a:picLocks noChangeAspect="1"/>
           </p:cNvPicPr>
           <p:nvPr/>
         </p:nvPicPr>
         <p:blipFill>
-          <a:blip r:embed="rId4"/>
+          <a:blip r:embed="rId5"/>
           <a:stretch>
             <a:fillRect/>
           </a:stretch>

--- a/output/presentation/MLOP-PJ_Presentation.pptx
+++ b/output/presentation/MLOP-PJ_Presentation.pptx
@@ -1,51 +1,54 @@
 
 <file path=ppt/presentation.xml><?xml version="1.0" encoding="utf-8"?>
-<p:presentation xmlns:a="http://schemas.openxmlformats.org/drawingml/2006/main" xmlns:r="http://schemas.openxmlformats.org/officeDocument/2006/relationships" xmlns:p="http://schemas.openxmlformats.org/presentationml/2006/main" saveSubsetFonts="1" embedTrueTypeFonts="true">
+<p:presentation xmlns:a="http://schemas.openxmlformats.org/drawingml/2006/main" xmlns:r="http://schemas.openxmlformats.org/officeDocument/2006/relationships" xmlns:p="http://schemas.openxmlformats.org/presentationml/2006/main" embedTrueTypeFonts="1" saveSubsetFonts="1">
   <p:sldMasterIdLst>
     <p:sldMasterId id="2147483648" r:id="rId1"/>
   </p:sldMasterIdLst>
   <p:notesMasterIdLst>
-    <p:notesMasterId r:id="rId21"/>
+    <p:notesMasterId r:id="rId17"/>
   </p:notesMasterIdLst>
   <p:sldIdLst>
-    <p:sldId id="256" r:id="rId6"/>
-    <p:sldId id="257" r:id="rId7"/>
-    <p:sldId id="258" r:id="rId8"/>
-    <p:sldId id="259" r:id="rId9"/>
-    <p:sldId id="260" r:id="rId10"/>
-    <p:sldId id="261" r:id="rId11"/>
-    <p:sldId id="262" r:id="rId12"/>
-    <p:sldId id="263" r:id="rId13"/>
-    <p:sldId id="264" r:id="rId14"/>
-    <p:sldId id="265" r:id="rId15"/>
-    <p:sldId id="266" r:id="rId16"/>
-    <p:sldId id="267" r:id="rId17"/>
-    <p:sldId id="268" r:id="rId18"/>
-    <p:sldId id="269" r:id="rId19"/>
-    <p:sldId id="270" r:id="rId20"/>
+    <p:sldId id="256" r:id="rId2"/>
+    <p:sldId id="257" r:id="rId3"/>
+    <p:sldId id="258" r:id="rId4"/>
+    <p:sldId id="259" r:id="rId5"/>
+    <p:sldId id="260" r:id="rId6"/>
+    <p:sldId id="261" r:id="rId7"/>
+    <p:sldId id="262" r:id="rId8"/>
+    <p:sldId id="263" r:id="rId9"/>
+    <p:sldId id="264" r:id="rId10"/>
+    <p:sldId id="265" r:id="rId11"/>
+    <p:sldId id="266" r:id="rId12"/>
+    <p:sldId id="267" r:id="rId13"/>
+    <p:sldId id="268" r:id="rId14"/>
+    <p:sldId id="269" r:id="rId15"/>
+    <p:sldId id="270" r:id="rId16"/>
   </p:sldIdLst>
   <p:sldSz cx="18288000" cy="10287000"/>
   <p:notesSz cx="6858000" cy="9144000"/>
   <p:embeddedFontLst>
     <p:embeddedFont>
-      <p:font typeface="League Spartan" charset="1" panose="00000800000000000000"/>
-      <p:regular r:id="rId24"/>
+      <p:font typeface="Calibri" panose="020F0502020204030204" pitchFamily="34" charset="0"/>
+      <p:regular r:id="rId18"/>
+      <p:bold r:id="rId19"/>
+      <p:italic r:id="rId20"/>
+      <p:boldItalic r:id="rId21"/>
     </p:embeddedFont>
     <p:embeddedFont>
-      <p:font typeface="Garuda" charset="1" panose="020B0604020202020204"/>
+      <p:font typeface="Consolas" panose="020B0609020204030204" pitchFamily="49" charset="0"/>
+      <p:regular r:id="rId22"/>
+      <p:bold r:id="rId23"/>
+      <p:italic r:id="rId24"/>
+      <p:boldItalic r:id="rId25"/>
+    </p:embeddedFont>
+    <p:embeddedFont>
+      <p:font typeface="League Spartan" panose="020B0604020202020204" charset="0"/>
       <p:regular r:id="rId26"/>
     </p:embeddedFont>
     <p:embeddedFont>
-      <p:font typeface="Poppins Bold" charset="1" panose="00000800000000000000"/>
+      <p:font typeface="Poppins" panose="00000500000000000000" pitchFamily="2" charset="0"/>
       <p:regular r:id="rId27"/>
-    </p:embeddedFont>
-    <p:embeddedFont>
-      <p:font typeface="Poppins" charset="1" panose="00000500000000000000"/>
-      <p:regular r:id="rId28"/>
-    </p:embeddedFont>
-    <p:embeddedFont>
-      <p:font typeface="Code Pro" charset="1" panose="00000500000000000000"/>
-      <p:regular r:id="rId40"/>
+      <p:bold r:id="rId28"/>
     </p:embeddedFont>
   </p:embeddedFontLst>
   <p:defaultTextStyle>
@@ -143,6 +146,22 @@
       </a:defRPr>
     </a:lvl9pPr>
   </p:defaultTextStyle>
+  <p:extLst>
+    <p:ext uri="{EFAFB233-063F-42B5-8137-9DF3F51BA10A}">
+      <p15:sldGuideLst xmlns:p15="http://schemas.microsoft.com/office/powerpoint/2012/main">
+        <p15:guide id="1" orient="horz" pos="2160">
+          <p15:clr>
+            <a:srgbClr val="A4A3A4"/>
+          </p15:clr>
+        </p15:guide>
+        <p15:guide id="2" pos="2880">
+          <p15:clr>
+            <a:srgbClr val="A4A3A4"/>
+          </p15:clr>
+        </p15:guide>
+      </p15:sldGuideLst>
+    </p:ext>
+  </p:extLst>
 </p:presentation>
 </file>
 
@@ -228,7 +247,7 @@
           <a:p>
             <a:fld id="{B7268E1E-0E44-426D-905E-8AD9B19D2182}" type="datetimeFigureOut">
               <a:rPr lang="cs-CZ" smtClean="0"/>
-              <a:t>1.7.2013</a:t>
+              <a:t>12.10.2026</a:t>
             </a:fld>
             <a:endParaRPr lang="cs-CZ"/>
           </a:p>
@@ -292,35 +311,35 @@
           <a:p>
             <a:pPr lvl="0"/>
             <a:r>
-              <a:rPr lang="en-US" smtClean="0"/>
+              <a:rPr lang="en-US"/>
               <a:t>Click to edit Master text styles</a:t>
             </a:r>
           </a:p>
           <a:p>
             <a:pPr lvl="1"/>
             <a:r>
-              <a:rPr lang="en-US" smtClean="0"/>
+              <a:rPr lang="en-US"/>
               <a:t>Second level</a:t>
             </a:r>
           </a:p>
           <a:p>
             <a:pPr lvl="2"/>
             <a:r>
-              <a:rPr lang="en-US" smtClean="0"/>
+              <a:rPr lang="en-US"/>
               <a:t>Third level</a:t>
             </a:r>
           </a:p>
           <a:p>
             <a:pPr lvl="3"/>
             <a:r>
-              <a:rPr lang="en-US" smtClean="0"/>
+              <a:rPr lang="en-US"/>
               <a:t>Fourth level</a:t>
             </a:r>
           </a:p>
           <a:p>
             <a:pPr lvl="4"/>
             <a:r>
-              <a:rPr lang="en-US" smtClean="0"/>
+              <a:rPr lang="en-US"/>
               <a:t>Fifth level</a:t>
             </a:r>
             <a:endParaRPr lang="cs-CZ"/>
@@ -497,1323 +516,7 @@
 </file>
 
 <file path=ppt/notesSlides/notesSlide1.xml><?xml version="1.0" encoding="utf-8"?>
-<p:notes xmlns:p="http://schemas.openxmlformats.org/presentationml/2006/main" xmlns:a="http://schemas.openxmlformats.org/drawingml/2006/main">
-  <p:cSld>
-    <p:spTree xmlns:r="http://schemas.openxmlformats.org/officeDocument/2006/relationships">
-      <p:nvGrpSpPr>
-        <p:cNvPr id="1" name=""/>
-        <p:cNvGrpSpPr/>
-        <p:nvPr/>
-      </p:nvGrpSpPr>
-      <p:grpSpPr>
-        <a:xfrm>
-          <a:off x="0" y="0"/>
-          <a:ext cx="0" cy="0"/>
-          <a:chOff x="0" y="0"/>
-          <a:chExt cx="0" cy="0"/>
-        </a:xfrm>
-      </p:grpSpPr>
-      <p:sp>
-        <p:nvSpPr>
-          <p:cNvPr id="2" name="Header Placeholder 1"/>
-          <p:cNvSpPr>
-            <a:spLocks noGrp="1"/>
-          </p:cNvSpPr>
-          <p:nvPr>
-            <p:ph type="hdr" sz="quarter"/>
-          </p:nvPr>
-        </p:nvSpPr>
-        <p:spPr>
-          <a:xfrm>
-            <a:off x="0" y="0"/>
-            <a:ext cx="3962400" cy="342900"/>
-          </a:xfrm>
-          <a:prstGeom prst="rect">
-            <a:avLst/>
-          </a:prstGeom>
-        </p:spPr>
-        <p:txBody>
-          <a:bodyPr vert="horz" lIns="91440" tIns="45720" rIns="91440" bIns="45720" rtlCol="0"/>
-          <a:lstStyle>
-            <a:lvl1pPr algn="l">
-              <a:defRPr sz="1200"/>
-            </a:lvl1pPr>
-          </a:lstStyle>
-          <a:p/>
-        </p:txBody>
-      </p:sp>
-      <p:sp>
-        <p:nvSpPr>
-          <p:cNvPr id="3" name="Date Placeholder 2"/>
-          <p:cNvSpPr>
-            <a:spLocks noGrp="1"/>
-          </p:cNvSpPr>
-          <p:nvPr>
-            <p:ph type="dt" idx="1"/>
-          </p:nvPr>
-        </p:nvSpPr>
-        <p:spPr>
-          <a:xfrm>
-            <a:off x="5180013" y="0"/>
-            <a:ext cx="3962400" cy="342900"/>
-          </a:xfrm>
-          <a:prstGeom prst="rect">
-            <a:avLst/>
-          </a:prstGeom>
-        </p:spPr>
-        <p:txBody>
-          <a:bodyPr vert="horz" lIns="91440" tIns="45720" rIns="91440" bIns="45720" rtlCol="0"/>
-          <a:lstStyle>
-            <a:lvl1pPr algn="r">
-              <a:defRPr sz="1200"/>
-            </a:lvl1pPr>
-          </a:lstStyle>
-          <a:p>
-            <a:r id="{B7268E1E-0E44-426D-905E-8AD9B19D2182}" type="datetimeFigureOut">
-              <a:rPr lang="cs-CZ" smtClean="0"/>
-              <a:t>1.7.2013</a:t>
-            </a:r>
-          </a:p>
-        </p:txBody>
-      </p:sp>
-      <p:sp>
-        <p:nvSpPr>
-          <p:cNvPr id="4" name="Slide Image Placeholder 3"/>
-          <p:cNvSpPr>
-            <a:spLocks noGrp="1" noRot="1" noChangeAspect="1"/>
-          </p:cNvSpPr>
-          <p:nvPr>
-            <p:ph type="sldImg" idx="2"/>
-          </p:nvPr>
-        </p:nvSpPr>
-        <p:spPr>
-          <a:xfrm>
-            <a:off x="2857500" y="512763"/>
-            <a:ext cx="3429000" cy="2566987"/>
-          </a:xfrm>
-          <a:prstGeom prst="rect">
-            <a:avLst/>
-          </a:prstGeom>
-          <a:noFill/>
-          <a:ln w="12700">
-            <a:solidFill>
-              <a:prstClr val="black"/>
-            </a:solidFill>
-          </a:ln>
-        </p:spPr>
-        <p:txBody>
-          <a:bodyPr vert="horz" lIns="91440" tIns="45720" rIns="91440" bIns="45720" rtlCol="0" anchor="ctr"/>
-          <a:lstStyle/>
-          <a:p/>
-        </p:txBody>
-      </p:sp>
-      <p:sp>
-        <p:nvSpPr>
-          <p:cNvPr id="5" name="Notes Placeholder 4"/>
-          <p:cNvSpPr>
-            <a:spLocks noGrp="1"/>
-          </p:cNvSpPr>
-          <p:nvPr>
-            <p:ph type="body" sz="quarter" idx="3"/>
-          </p:nvPr>
-        </p:nvSpPr>
-        <p:spPr>
-          <a:xfrm>
-            <a:off x="914400" y="3251200"/>
-            <a:ext cx="7315200" cy="3081338"/>
-          </a:xfrm>
-          <a:prstGeom prst="rect">
-            <a:avLst/>
-          </a:prstGeom>
-        </p:spPr>
-        <p:txBody>
-          <a:bodyPr vert="horz" lIns="91440" tIns="45720" rIns="91440" bIns="45720" rtlCol="0"/>
-          <a:lstStyle/>
-          <a:p>
-            <a:r>
-              <a:t>15 seconds. Introduce our team and the travel profile service. We focus on the working MLOps system.</a:t>
-            </a:r>
-          </a:p>
-        </p:txBody>
-      </p:sp>
-      <p:sp>
-        <p:nvSpPr>
-          <p:cNvPr id="6" name="Footer Placeholder 5"/>
-          <p:cNvSpPr>
-            <a:spLocks noGrp="1"/>
-          </p:cNvSpPr>
-          <p:nvPr>
-            <p:ph type="ftr" sz="quarter" idx="4"/>
-          </p:nvPr>
-        </p:nvSpPr>
-        <p:spPr>
-          <a:xfrm>
-            <a:off x="0" y="6502400"/>
-            <a:ext cx="3962400" cy="341313"/>
-          </a:xfrm>
-          <a:prstGeom prst="rect">
-            <a:avLst/>
-          </a:prstGeom>
-        </p:spPr>
-        <p:txBody>
-          <a:bodyPr vert="horz" lIns="91440" tIns="45720" rIns="91440" bIns="45720" rtlCol="0" anchor="b"/>
-          <a:lstStyle>
-            <a:lvl1pPr algn="l">
-              <a:defRPr sz="1200"/>
-            </a:lvl1pPr>
-          </a:lstStyle>
-          <a:p/>
-        </p:txBody>
-      </p:sp>
-      <p:sp>
-        <p:nvSpPr>
-          <p:cNvPr id="7" name="Slide Number Placeholder 6"/>
-          <p:cNvSpPr>
-            <a:spLocks noGrp="1"/>
-          </p:cNvSpPr>
-          <p:nvPr>
-            <p:ph type="sldNum" sz="quarter" idx="5"/>
-          </p:nvPr>
-        </p:nvSpPr>
-        <p:spPr>
-          <a:xfrm>
-            <a:off x="5180013" y="6502400"/>
-            <a:ext cx="3962400" cy="341313"/>
-          </a:xfrm>
-          <a:prstGeom prst="rect">
-            <a:avLst/>
-          </a:prstGeom>
-        </p:spPr>
-        <p:txBody>
-          <a:bodyPr vert="horz" lIns="91440" tIns="45720" rIns="91440" bIns="45720" rtlCol="0" anchor="b"/>
-          <a:lstStyle>
-            <a:lvl1pPr algn="r">
-              <a:defRPr sz="1200"/>
-            </a:lvl1pPr>
-          </a:lstStyle>
-          <a:p>
-            <a:r id="{871B2431-D351-4C6E-A3CF-9DFAC0E3E050}" type="slidenum">
-              <a:rPr lang="cs-CZ" smtClean="0"/>
-              <a:t>‹#›</a:t>
-            </a:r>
-          </a:p>
-        </p:txBody>
-      </p:sp>
-    </p:spTree>
-  </p:cSld>
-  <p:clrMapOvr>
-    <a:masterClrMapping/>
-  </p:clrMapOvr>
-</p:notes>
-</file>
-
-<file path=ppt/notesSlides/notesSlide10.xml><?xml version="1.0" encoding="utf-8"?>
-<p:notes xmlns:p="http://schemas.openxmlformats.org/presentationml/2006/main" xmlns:a="http://schemas.openxmlformats.org/drawingml/2006/main">
-  <p:cSld>
-    <p:spTree xmlns:r="http://schemas.openxmlformats.org/officeDocument/2006/relationships">
-      <p:nvGrpSpPr>
-        <p:cNvPr id="1" name=""/>
-        <p:cNvGrpSpPr/>
-        <p:nvPr/>
-      </p:nvGrpSpPr>
-      <p:grpSpPr>
-        <a:xfrm>
-          <a:off x="0" y="0"/>
-          <a:ext cx="0" cy="0"/>
-          <a:chOff x="0" y="0"/>
-          <a:chExt cx="0" cy="0"/>
-        </a:xfrm>
-      </p:grpSpPr>
-      <p:sp>
-        <p:nvSpPr>
-          <p:cNvPr id="2" name="Header Placeholder 1"/>
-          <p:cNvSpPr>
-            <a:spLocks noGrp="1"/>
-          </p:cNvSpPr>
-          <p:nvPr>
-            <p:ph type="hdr" sz="quarter"/>
-          </p:nvPr>
-        </p:nvSpPr>
-        <p:spPr>
-          <a:xfrm>
-            <a:off x="0" y="0"/>
-            <a:ext cx="3962400" cy="342900"/>
-          </a:xfrm>
-          <a:prstGeom prst="rect">
-            <a:avLst/>
-          </a:prstGeom>
-        </p:spPr>
-        <p:txBody>
-          <a:bodyPr vert="horz" lIns="91440" tIns="45720" rIns="91440" bIns="45720" rtlCol="0"/>
-          <a:lstStyle>
-            <a:lvl1pPr algn="l">
-              <a:defRPr sz="1200"/>
-            </a:lvl1pPr>
-          </a:lstStyle>
-          <a:p/>
-        </p:txBody>
-      </p:sp>
-      <p:sp>
-        <p:nvSpPr>
-          <p:cNvPr id="3" name="Date Placeholder 2"/>
-          <p:cNvSpPr>
-            <a:spLocks noGrp="1"/>
-          </p:cNvSpPr>
-          <p:nvPr>
-            <p:ph type="dt" idx="1"/>
-          </p:nvPr>
-        </p:nvSpPr>
-        <p:spPr>
-          <a:xfrm>
-            <a:off x="5180013" y="0"/>
-            <a:ext cx="3962400" cy="342900"/>
-          </a:xfrm>
-          <a:prstGeom prst="rect">
-            <a:avLst/>
-          </a:prstGeom>
-        </p:spPr>
-        <p:txBody>
-          <a:bodyPr vert="horz" lIns="91440" tIns="45720" rIns="91440" bIns="45720" rtlCol="0"/>
-          <a:lstStyle>
-            <a:lvl1pPr algn="r">
-              <a:defRPr sz="1200"/>
-            </a:lvl1pPr>
-          </a:lstStyle>
-          <a:p>
-            <a:r id="{B7268E1E-0E44-426D-905E-8AD9B19D2182}" type="datetimeFigureOut">
-              <a:rPr lang="cs-CZ" smtClean="0"/>
-              <a:t>1.7.2013</a:t>
-            </a:r>
-          </a:p>
-        </p:txBody>
-      </p:sp>
-      <p:sp>
-        <p:nvSpPr>
-          <p:cNvPr id="4" name="Slide Image Placeholder 3"/>
-          <p:cNvSpPr>
-            <a:spLocks noGrp="1" noRot="1" noChangeAspect="1"/>
-          </p:cNvSpPr>
-          <p:nvPr>
-            <p:ph type="sldImg" idx="2"/>
-          </p:nvPr>
-        </p:nvSpPr>
-        <p:spPr>
-          <a:xfrm>
-            <a:off x="2857500" y="512763"/>
-            <a:ext cx="3429000" cy="2566987"/>
-          </a:xfrm>
-          <a:prstGeom prst="rect">
-            <a:avLst/>
-          </a:prstGeom>
-          <a:noFill/>
-          <a:ln w="12700">
-            <a:solidFill>
-              <a:prstClr val="black"/>
-            </a:solidFill>
-          </a:ln>
-        </p:spPr>
-        <p:txBody>
-          <a:bodyPr vert="horz" lIns="91440" tIns="45720" rIns="91440" bIns="45720" rtlCol="0" anchor="ctr"/>
-          <a:lstStyle/>
-          <a:p/>
-        </p:txBody>
-      </p:sp>
-      <p:sp>
-        <p:nvSpPr>
-          <p:cNvPr id="5" name="Notes Placeholder 4"/>
-          <p:cNvSpPr>
-            <a:spLocks noGrp="1"/>
-          </p:cNvSpPr>
-          <p:nvPr>
-            <p:ph type="body" sz="quarter" idx="3"/>
-          </p:nvPr>
-        </p:nvSpPr>
-        <p:spPr>
-          <a:xfrm>
-            <a:off x="914400" y="3251200"/>
-            <a:ext cx="7315200" cy="3081338"/>
-          </a:xfrm>
-          <a:prstGeom prst="rect">
-            <a:avLst/>
-          </a:prstGeom>
-        </p:spPr>
-        <p:txBody>
-          <a:bodyPr vert="horz" lIns="91440" tIns="45720" rIns="91440" bIns="45720" rtlCol="0"/>
-          <a:lstStyle/>
-          <a:p>
-            <a:r>
-              <a:t>45 seconds.</a:t>
-            </a:r>
-          </a:p>
-          <a:p>
-            <a:r>
-              <a:t>This is saved failure evidence from a separate staging app. We changed the segment mapping; the canary returned 503. The first recovery attempt failed, so the total detection-to-confirmed-recovery time was about seven minutes sixteen seconds. We restored configuration, stopped and started staging, and checked the semantic canary twice. The actual alert is separate evidence. The failure was added to regression checks.</a:t>
-            </a:r>
-          </a:p>
-          <a:p>
-            <a:r>
-              <a:t>Source: reports/finish-failure.json; finish-alert.json; tests/test_api.py</a:t>
-            </a:r>
-          </a:p>
-        </p:txBody>
-      </p:sp>
-      <p:sp>
-        <p:nvSpPr>
-          <p:cNvPr id="6" name="Footer Placeholder 5"/>
-          <p:cNvSpPr>
-            <a:spLocks noGrp="1"/>
-          </p:cNvSpPr>
-          <p:nvPr>
-            <p:ph type="ftr" sz="quarter" idx="4"/>
-          </p:nvPr>
-        </p:nvSpPr>
-        <p:spPr>
-          <a:xfrm>
-            <a:off x="0" y="6502400"/>
-            <a:ext cx="3962400" cy="341313"/>
-          </a:xfrm>
-          <a:prstGeom prst="rect">
-            <a:avLst/>
-          </a:prstGeom>
-        </p:spPr>
-        <p:txBody>
-          <a:bodyPr vert="horz" lIns="91440" tIns="45720" rIns="91440" bIns="45720" rtlCol="0" anchor="b"/>
-          <a:lstStyle>
-            <a:lvl1pPr algn="l">
-              <a:defRPr sz="1200"/>
-            </a:lvl1pPr>
-          </a:lstStyle>
-          <a:p/>
-        </p:txBody>
-      </p:sp>
-      <p:sp>
-        <p:nvSpPr>
-          <p:cNvPr id="7" name="Slide Number Placeholder 6"/>
-          <p:cNvSpPr>
-            <a:spLocks noGrp="1"/>
-          </p:cNvSpPr>
-          <p:nvPr>
-            <p:ph type="sldNum" sz="quarter" idx="5"/>
-          </p:nvPr>
-        </p:nvSpPr>
-        <p:spPr>
-          <a:xfrm>
-            <a:off x="5180013" y="6502400"/>
-            <a:ext cx="3962400" cy="341313"/>
-          </a:xfrm>
-          <a:prstGeom prst="rect">
-            <a:avLst/>
-          </a:prstGeom>
-        </p:spPr>
-        <p:txBody>
-          <a:bodyPr vert="horz" lIns="91440" tIns="45720" rIns="91440" bIns="45720" rtlCol="0" anchor="b"/>
-          <a:lstStyle>
-            <a:lvl1pPr algn="r">
-              <a:defRPr sz="1200"/>
-            </a:lvl1pPr>
-          </a:lstStyle>
-          <a:p>
-            <a:r id="{871B2431-D351-4C6E-A3CF-9DFAC0E3E050}" type="slidenum">
-              <a:rPr lang="cs-CZ" smtClean="0"/>
-              <a:t>‹#›</a:t>
-            </a:r>
-          </a:p>
-        </p:txBody>
-      </p:sp>
-    </p:spTree>
-  </p:cSld>
-  <p:clrMapOvr>
-    <a:masterClrMapping/>
-  </p:clrMapOvr>
-</p:notes>
-</file>
-
-<file path=ppt/notesSlides/notesSlide11.xml><?xml version="1.0" encoding="utf-8"?>
-<p:notes xmlns:p="http://schemas.openxmlformats.org/presentationml/2006/main" xmlns:a="http://schemas.openxmlformats.org/drawingml/2006/main">
-  <p:cSld>
-    <p:spTree xmlns:r="http://schemas.openxmlformats.org/officeDocument/2006/relationships">
-      <p:nvGrpSpPr>
-        <p:cNvPr id="1" name=""/>
-        <p:cNvGrpSpPr/>
-        <p:nvPr/>
-      </p:nvGrpSpPr>
-      <p:grpSpPr>
-        <a:xfrm>
-          <a:off x="0" y="0"/>
-          <a:ext cx="0" cy="0"/>
-          <a:chOff x="0" y="0"/>
-          <a:chExt cx="0" cy="0"/>
-        </a:xfrm>
-      </p:grpSpPr>
-      <p:sp>
-        <p:nvSpPr>
-          <p:cNvPr id="2" name="Header Placeholder 1"/>
-          <p:cNvSpPr>
-            <a:spLocks noGrp="1"/>
-          </p:cNvSpPr>
-          <p:nvPr>
-            <p:ph type="hdr" sz="quarter"/>
-          </p:nvPr>
-        </p:nvSpPr>
-        <p:spPr>
-          <a:xfrm>
-            <a:off x="0" y="0"/>
-            <a:ext cx="3962400" cy="342900"/>
-          </a:xfrm>
-          <a:prstGeom prst="rect">
-            <a:avLst/>
-          </a:prstGeom>
-        </p:spPr>
-        <p:txBody>
-          <a:bodyPr vert="horz" lIns="91440" tIns="45720" rIns="91440" bIns="45720" rtlCol="0"/>
-          <a:lstStyle>
-            <a:lvl1pPr algn="l">
-              <a:defRPr sz="1200"/>
-            </a:lvl1pPr>
-          </a:lstStyle>
-          <a:p/>
-        </p:txBody>
-      </p:sp>
-      <p:sp>
-        <p:nvSpPr>
-          <p:cNvPr id="3" name="Date Placeholder 2"/>
-          <p:cNvSpPr>
-            <a:spLocks noGrp="1"/>
-          </p:cNvSpPr>
-          <p:nvPr>
-            <p:ph type="dt" idx="1"/>
-          </p:nvPr>
-        </p:nvSpPr>
-        <p:spPr>
-          <a:xfrm>
-            <a:off x="5180013" y="0"/>
-            <a:ext cx="3962400" cy="342900"/>
-          </a:xfrm>
-          <a:prstGeom prst="rect">
-            <a:avLst/>
-          </a:prstGeom>
-        </p:spPr>
-        <p:txBody>
-          <a:bodyPr vert="horz" lIns="91440" tIns="45720" rIns="91440" bIns="45720" rtlCol="0"/>
-          <a:lstStyle>
-            <a:lvl1pPr algn="r">
-              <a:defRPr sz="1200"/>
-            </a:lvl1pPr>
-          </a:lstStyle>
-          <a:p>
-            <a:r id="{B7268E1E-0E44-426D-905E-8AD9B19D2182}" type="datetimeFigureOut">
-              <a:rPr lang="cs-CZ" smtClean="0"/>
-              <a:t>1.7.2013</a:t>
-            </a:r>
-          </a:p>
-        </p:txBody>
-      </p:sp>
-      <p:sp>
-        <p:nvSpPr>
-          <p:cNvPr id="4" name="Slide Image Placeholder 3"/>
-          <p:cNvSpPr>
-            <a:spLocks noGrp="1" noRot="1" noChangeAspect="1"/>
-          </p:cNvSpPr>
-          <p:nvPr>
-            <p:ph type="sldImg" idx="2"/>
-          </p:nvPr>
-        </p:nvSpPr>
-        <p:spPr>
-          <a:xfrm>
-            <a:off x="2857500" y="512763"/>
-            <a:ext cx="3429000" cy="2566987"/>
-          </a:xfrm>
-          <a:prstGeom prst="rect">
-            <a:avLst/>
-          </a:prstGeom>
-          <a:noFill/>
-          <a:ln w="12700">
-            <a:solidFill>
-              <a:prstClr val="black"/>
-            </a:solidFill>
-          </a:ln>
-        </p:spPr>
-        <p:txBody>
-          <a:bodyPr vert="horz" lIns="91440" tIns="45720" rIns="91440" bIns="45720" rtlCol="0" anchor="ctr"/>
-          <a:lstStyle/>
-          <a:p/>
-        </p:txBody>
-      </p:sp>
-      <p:sp>
-        <p:nvSpPr>
-          <p:cNvPr id="5" name="Notes Placeholder 4"/>
-          <p:cNvSpPr>
-            <a:spLocks noGrp="1"/>
-          </p:cNvSpPr>
-          <p:nvPr>
-            <p:ph type="body" sz="quarter" idx="3"/>
-          </p:nvPr>
-        </p:nvSpPr>
-        <p:spPr>
-          <a:xfrm>
-            <a:off x="914400" y="3251200"/>
-            <a:ext cx="7315200" cy="3081338"/>
-          </a:xfrm>
-          <a:prstGeom prst="rect">
-            <a:avLst/>
-          </a:prstGeom>
-        </p:spPr>
-        <p:txBody>
-          <a:bodyPr vert="horz" lIns="91440" tIns="45720" rIns="91440" bIns="45720" rtlCol="0"/>
-          <a:lstStyle/>
-          <a:p>
-            <a:r>
-              <a:t>20 seconds.</a:t>
-            </a:r>
-          </a:p>
-          <a:p>
-            <a:r>
-              <a:t>We used a maximum feature-wise KS statistic. The reference has 1,908 rows and the recent sample has 200. One hundred calibration rounds set the threshold. Adding 1.5 to the first four features, clipped to 0-5, caused the alert condition. This is an offline controlled test, not observed temporal drift or evidence of concept drift.</a:t>
-            </a:r>
-          </a:p>
-          <a:p>
-            <a:r>
-              <a:t>Source: reports/input-drift.json; monitoring/drift.py</a:t>
-            </a:r>
-          </a:p>
-        </p:txBody>
-      </p:sp>
-      <p:sp>
-        <p:nvSpPr>
-          <p:cNvPr id="6" name="Footer Placeholder 5"/>
-          <p:cNvSpPr>
-            <a:spLocks noGrp="1"/>
-          </p:cNvSpPr>
-          <p:nvPr>
-            <p:ph type="ftr" sz="quarter" idx="4"/>
-          </p:nvPr>
-        </p:nvSpPr>
-        <p:spPr>
-          <a:xfrm>
-            <a:off x="0" y="6502400"/>
-            <a:ext cx="3962400" cy="341313"/>
-          </a:xfrm>
-          <a:prstGeom prst="rect">
-            <a:avLst/>
-          </a:prstGeom>
-        </p:spPr>
-        <p:txBody>
-          <a:bodyPr vert="horz" lIns="91440" tIns="45720" rIns="91440" bIns="45720" rtlCol="0" anchor="b"/>
-          <a:lstStyle>
-            <a:lvl1pPr algn="l">
-              <a:defRPr sz="1200"/>
-            </a:lvl1pPr>
-          </a:lstStyle>
-          <a:p/>
-        </p:txBody>
-      </p:sp>
-      <p:sp>
-        <p:nvSpPr>
-          <p:cNvPr id="7" name="Slide Number Placeholder 6"/>
-          <p:cNvSpPr>
-            <a:spLocks noGrp="1"/>
-          </p:cNvSpPr>
-          <p:nvPr>
-            <p:ph type="sldNum" sz="quarter" idx="5"/>
-          </p:nvPr>
-        </p:nvSpPr>
-        <p:spPr>
-          <a:xfrm>
-            <a:off x="5180013" y="6502400"/>
-            <a:ext cx="3962400" cy="341313"/>
-          </a:xfrm>
-          <a:prstGeom prst="rect">
-            <a:avLst/>
-          </a:prstGeom>
-        </p:spPr>
-        <p:txBody>
-          <a:bodyPr vert="horz" lIns="91440" tIns="45720" rIns="91440" bIns="45720" rtlCol="0" anchor="b"/>
-          <a:lstStyle>
-            <a:lvl1pPr algn="r">
-              <a:defRPr sz="1200"/>
-            </a:lvl1pPr>
-          </a:lstStyle>
-          <a:p>
-            <a:r id="{871B2431-D351-4C6E-A3CF-9DFAC0E3E050}" type="slidenum">
-              <a:rPr lang="cs-CZ" smtClean="0"/>
-              <a:t>‹#›</a:t>
-            </a:r>
-          </a:p>
-        </p:txBody>
-      </p:sp>
-    </p:spTree>
-  </p:cSld>
-  <p:clrMapOvr>
-    <a:masterClrMapping/>
-  </p:clrMapOvr>
-</p:notes>
-</file>
-
-<file path=ppt/notesSlides/notesSlide12.xml><?xml version="1.0" encoding="utf-8"?>
-<p:notes xmlns:p="http://schemas.openxmlformats.org/presentationml/2006/main" xmlns:a="http://schemas.openxmlformats.org/drawingml/2006/main">
-  <p:cSld>
-    <p:spTree xmlns:r="http://schemas.openxmlformats.org/officeDocument/2006/relationships">
-      <p:nvGrpSpPr>
-        <p:cNvPr id="1" name=""/>
-        <p:cNvGrpSpPr/>
-        <p:nvPr/>
-      </p:nvGrpSpPr>
-      <p:grpSpPr>
-        <a:xfrm>
-          <a:off x="0" y="0"/>
-          <a:ext cx="0" cy="0"/>
-          <a:chOff x="0" y="0"/>
-          <a:chExt cx="0" cy="0"/>
-        </a:xfrm>
-      </p:grpSpPr>
-      <p:sp>
-        <p:nvSpPr>
-          <p:cNvPr id="2" name="Header Placeholder 1"/>
-          <p:cNvSpPr>
-            <a:spLocks noGrp="1"/>
-          </p:cNvSpPr>
-          <p:nvPr>
-            <p:ph type="hdr" sz="quarter"/>
-          </p:nvPr>
-        </p:nvSpPr>
-        <p:spPr>
-          <a:xfrm>
-            <a:off x="0" y="0"/>
-            <a:ext cx="3962400" cy="342900"/>
-          </a:xfrm>
-          <a:prstGeom prst="rect">
-            <a:avLst/>
-          </a:prstGeom>
-        </p:spPr>
-        <p:txBody>
-          <a:bodyPr vert="horz" lIns="91440" tIns="45720" rIns="91440" bIns="45720" rtlCol="0"/>
-          <a:lstStyle>
-            <a:lvl1pPr algn="l">
-              <a:defRPr sz="1200"/>
-            </a:lvl1pPr>
-          </a:lstStyle>
-          <a:p/>
-        </p:txBody>
-      </p:sp>
-      <p:sp>
-        <p:nvSpPr>
-          <p:cNvPr id="3" name="Date Placeholder 2"/>
-          <p:cNvSpPr>
-            <a:spLocks noGrp="1"/>
-          </p:cNvSpPr>
-          <p:nvPr>
-            <p:ph type="dt" idx="1"/>
-          </p:nvPr>
-        </p:nvSpPr>
-        <p:spPr>
-          <a:xfrm>
-            <a:off x="5180013" y="0"/>
-            <a:ext cx="3962400" cy="342900"/>
-          </a:xfrm>
-          <a:prstGeom prst="rect">
-            <a:avLst/>
-          </a:prstGeom>
-        </p:spPr>
-        <p:txBody>
-          <a:bodyPr vert="horz" lIns="91440" tIns="45720" rIns="91440" bIns="45720" rtlCol="0"/>
-          <a:lstStyle>
-            <a:lvl1pPr algn="r">
-              <a:defRPr sz="1200"/>
-            </a:lvl1pPr>
-          </a:lstStyle>
-          <a:p>
-            <a:r id="{B7268E1E-0E44-426D-905E-8AD9B19D2182}" type="datetimeFigureOut">
-              <a:rPr lang="cs-CZ" smtClean="0"/>
-              <a:t>1.7.2013</a:t>
-            </a:r>
-          </a:p>
-        </p:txBody>
-      </p:sp>
-      <p:sp>
-        <p:nvSpPr>
-          <p:cNvPr id="4" name="Slide Image Placeholder 3"/>
-          <p:cNvSpPr>
-            <a:spLocks noGrp="1" noRot="1" noChangeAspect="1"/>
-          </p:cNvSpPr>
-          <p:nvPr>
-            <p:ph type="sldImg" idx="2"/>
-          </p:nvPr>
-        </p:nvSpPr>
-        <p:spPr>
-          <a:xfrm>
-            <a:off x="2857500" y="512763"/>
-            <a:ext cx="3429000" cy="2566987"/>
-          </a:xfrm>
-          <a:prstGeom prst="rect">
-            <a:avLst/>
-          </a:prstGeom>
-          <a:noFill/>
-          <a:ln w="12700">
-            <a:solidFill>
-              <a:prstClr val="black"/>
-            </a:solidFill>
-          </a:ln>
-        </p:spPr>
-        <p:txBody>
-          <a:bodyPr vert="horz" lIns="91440" tIns="45720" rIns="91440" bIns="45720" rtlCol="0" anchor="ctr"/>
-          <a:lstStyle/>
-          <a:p/>
-        </p:txBody>
-      </p:sp>
-      <p:sp>
-        <p:nvSpPr>
-          <p:cNvPr id="5" name="Notes Placeholder 4"/>
-          <p:cNvSpPr>
-            <a:spLocks noGrp="1"/>
-          </p:cNvSpPr>
-          <p:nvPr>
-            <p:ph type="body" sz="quarter" idx="3"/>
-          </p:nvPr>
-        </p:nvSpPr>
-        <p:spPr>
-          <a:xfrm>
-            <a:off x="914400" y="3251200"/>
-            <a:ext cx="7315200" cy="3081338"/>
-          </a:xfrm>
-          <a:prstGeom prst="rect">
-            <a:avLst/>
-          </a:prstGeom>
-        </p:spPr>
-        <p:txBody>
-          <a:bodyPr vert="horz" lIns="91440" tIns="45720" rIns="91440" bIns="45720" rtlCol="0"/>
-          <a:lstStyle/>
-          <a:p>
-            <a:r>
-              <a:t>30 seconds.</a:t>
-            </a:r>
-          </a:p>
-          <a:p>
-            <a:r>
-              <a:t>The short-demo plan totals 88.89 THB, including a 60 THB reserve. At 10,000 planned predictions, that is 8.89 THB per 1,000 before credits. The reported Azure cost is 0.00120350 USD for 841 observed valid profiles in the same query window. Billing and logs may lag. This is provisional, not the final invoice or proof of the budget cap.</a:t>
-            </a:r>
-          </a:p>
-          <a:p>
-            <a:r>
-              <a:t>Source: reports/azure-cost-plan.json; cost-per-1000.json; docs/COST_REPORT.md</a:t>
-            </a:r>
-          </a:p>
-        </p:txBody>
-      </p:sp>
-      <p:sp>
-        <p:nvSpPr>
-          <p:cNvPr id="6" name="Footer Placeholder 5"/>
-          <p:cNvSpPr>
-            <a:spLocks noGrp="1"/>
-          </p:cNvSpPr>
-          <p:nvPr>
-            <p:ph type="ftr" sz="quarter" idx="4"/>
-          </p:nvPr>
-        </p:nvSpPr>
-        <p:spPr>
-          <a:xfrm>
-            <a:off x="0" y="6502400"/>
-            <a:ext cx="3962400" cy="341313"/>
-          </a:xfrm>
-          <a:prstGeom prst="rect">
-            <a:avLst/>
-          </a:prstGeom>
-        </p:spPr>
-        <p:txBody>
-          <a:bodyPr vert="horz" lIns="91440" tIns="45720" rIns="91440" bIns="45720" rtlCol="0" anchor="b"/>
-          <a:lstStyle>
-            <a:lvl1pPr algn="l">
-              <a:defRPr sz="1200"/>
-            </a:lvl1pPr>
-          </a:lstStyle>
-          <a:p/>
-        </p:txBody>
-      </p:sp>
-      <p:sp>
-        <p:nvSpPr>
-          <p:cNvPr id="7" name="Slide Number Placeholder 6"/>
-          <p:cNvSpPr>
-            <a:spLocks noGrp="1"/>
-          </p:cNvSpPr>
-          <p:nvPr>
-            <p:ph type="sldNum" sz="quarter" idx="5"/>
-          </p:nvPr>
-        </p:nvSpPr>
-        <p:spPr>
-          <a:xfrm>
-            <a:off x="5180013" y="6502400"/>
-            <a:ext cx="3962400" cy="341313"/>
-          </a:xfrm>
-          <a:prstGeom prst="rect">
-            <a:avLst/>
-          </a:prstGeom>
-        </p:spPr>
-        <p:txBody>
-          <a:bodyPr vert="horz" lIns="91440" tIns="45720" rIns="91440" bIns="45720" rtlCol="0" anchor="b"/>
-          <a:lstStyle>
-            <a:lvl1pPr algn="r">
-              <a:defRPr sz="1200"/>
-            </a:lvl1pPr>
-          </a:lstStyle>
-          <a:p>
-            <a:r id="{871B2431-D351-4C6E-A3CF-9DFAC0E3E050}" type="slidenum">
-              <a:rPr lang="cs-CZ" smtClean="0"/>
-              <a:t>‹#›</a:t>
-            </a:r>
-          </a:p>
-        </p:txBody>
-      </p:sp>
-    </p:spTree>
-  </p:cSld>
-  <p:clrMapOvr>
-    <a:masterClrMapping/>
-  </p:clrMapOvr>
-</p:notes>
-</file>
-
-<file path=ppt/notesSlides/notesSlide13.xml><?xml version="1.0" encoding="utf-8"?>
-<p:notes xmlns:p="http://schemas.openxmlformats.org/presentationml/2006/main" xmlns:a="http://schemas.openxmlformats.org/drawingml/2006/main">
-  <p:cSld>
-    <p:spTree xmlns:r="http://schemas.openxmlformats.org/officeDocument/2006/relationships">
-      <p:nvGrpSpPr>
-        <p:cNvPr id="1" name=""/>
-        <p:cNvGrpSpPr/>
-        <p:nvPr/>
-      </p:nvGrpSpPr>
-      <p:grpSpPr>
-        <a:xfrm>
-          <a:off x="0" y="0"/>
-          <a:ext cx="0" cy="0"/>
-          <a:chOff x="0" y="0"/>
-          <a:chExt cx="0" cy="0"/>
-        </a:xfrm>
-      </p:grpSpPr>
-      <p:sp>
-        <p:nvSpPr>
-          <p:cNvPr id="2" name="Header Placeholder 1"/>
-          <p:cNvSpPr>
-            <a:spLocks noGrp="1"/>
-          </p:cNvSpPr>
-          <p:nvPr>
-            <p:ph type="hdr" sz="quarter"/>
-          </p:nvPr>
-        </p:nvSpPr>
-        <p:spPr>
-          <a:xfrm>
-            <a:off x="0" y="0"/>
-            <a:ext cx="3962400" cy="342900"/>
-          </a:xfrm>
-          <a:prstGeom prst="rect">
-            <a:avLst/>
-          </a:prstGeom>
-        </p:spPr>
-        <p:txBody>
-          <a:bodyPr vert="horz" lIns="91440" tIns="45720" rIns="91440" bIns="45720" rtlCol="0"/>
-          <a:lstStyle>
-            <a:lvl1pPr algn="l">
-              <a:defRPr sz="1200"/>
-            </a:lvl1pPr>
-          </a:lstStyle>
-          <a:p/>
-        </p:txBody>
-      </p:sp>
-      <p:sp>
-        <p:nvSpPr>
-          <p:cNvPr id="3" name="Date Placeholder 2"/>
-          <p:cNvSpPr>
-            <a:spLocks noGrp="1"/>
-          </p:cNvSpPr>
-          <p:nvPr>
-            <p:ph type="dt" idx="1"/>
-          </p:nvPr>
-        </p:nvSpPr>
-        <p:spPr>
-          <a:xfrm>
-            <a:off x="5180013" y="0"/>
-            <a:ext cx="3962400" cy="342900"/>
-          </a:xfrm>
-          <a:prstGeom prst="rect">
-            <a:avLst/>
-          </a:prstGeom>
-        </p:spPr>
-        <p:txBody>
-          <a:bodyPr vert="horz" lIns="91440" tIns="45720" rIns="91440" bIns="45720" rtlCol="0"/>
-          <a:lstStyle>
-            <a:lvl1pPr algn="r">
-              <a:defRPr sz="1200"/>
-            </a:lvl1pPr>
-          </a:lstStyle>
-          <a:p>
-            <a:r id="{B7268E1E-0E44-426D-905E-8AD9B19D2182}" type="datetimeFigureOut">
-              <a:rPr lang="cs-CZ" smtClean="0"/>
-              <a:t>1.7.2013</a:t>
-            </a:r>
-          </a:p>
-        </p:txBody>
-      </p:sp>
-      <p:sp>
-        <p:nvSpPr>
-          <p:cNvPr id="4" name="Slide Image Placeholder 3"/>
-          <p:cNvSpPr>
-            <a:spLocks noGrp="1" noRot="1" noChangeAspect="1"/>
-          </p:cNvSpPr>
-          <p:nvPr>
-            <p:ph type="sldImg" idx="2"/>
-          </p:nvPr>
-        </p:nvSpPr>
-        <p:spPr>
-          <a:xfrm>
-            <a:off x="2857500" y="512763"/>
-            <a:ext cx="3429000" cy="2566987"/>
-          </a:xfrm>
-          <a:prstGeom prst="rect">
-            <a:avLst/>
-          </a:prstGeom>
-          <a:noFill/>
-          <a:ln w="12700">
-            <a:solidFill>
-              <a:prstClr val="black"/>
-            </a:solidFill>
-          </a:ln>
-        </p:spPr>
-        <p:txBody>
-          <a:bodyPr vert="horz" lIns="91440" tIns="45720" rIns="91440" bIns="45720" rtlCol="0" anchor="ctr"/>
-          <a:lstStyle/>
-          <a:p/>
-        </p:txBody>
-      </p:sp>
-      <p:sp>
-        <p:nvSpPr>
-          <p:cNvPr id="5" name="Notes Placeholder 4"/>
-          <p:cNvSpPr>
-            <a:spLocks noGrp="1"/>
-          </p:cNvSpPr>
-          <p:nvPr>
-            <p:ph type="body" sz="quarter" idx="3"/>
-          </p:nvPr>
-        </p:nvSpPr>
-        <p:spPr>
-          <a:xfrm>
-            <a:off x="914400" y="3251200"/>
-            <a:ext cx="7315200" cy="3081338"/>
-          </a:xfrm>
-          <a:prstGeom prst="rect">
-            <a:avLst/>
-          </a:prstGeom>
-        </p:spPr>
-        <p:txBody>
-          <a:bodyPr vert="horz" lIns="91440" tIns="45720" rIns="91440" bIns="45720" rtlCol="0"/>
-          <a:lstStyle/>
-          <a:p>
-            <a:r>
-              <a:t>45 seconds.</a:t>
-            </a:r>
-          </a:p>
-          <a:p>
-            <a:r>
-              <a:t>Our first priorities are the unmet latency target and complete cost reconciliation. Separate network time from application time before changing replicas or spending more. Recheck billing and usage after cleanup when the data has settled. Add live feature windows only when current data is available. Review segment labels and improve the dashboard. Save evidence and remove resources after the demo.</a:t>
-            </a:r>
-          </a:p>
-          <a:p>
-            <a:r>
-              <a:t>Source: reports/finish-delivery.json; docs/DELIVERY_STATUS.md; docs/FINAL_STEPS.md</a:t>
-            </a:r>
-          </a:p>
-        </p:txBody>
-      </p:sp>
-      <p:sp>
-        <p:nvSpPr>
-          <p:cNvPr id="6" name="Footer Placeholder 5"/>
-          <p:cNvSpPr>
-            <a:spLocks noGrp="1"/>
-          </p:cNvSpPr>
-          <p:nvPr>
-            <p:ph type="ftr" sz="quarter" idx="4"/>
-          </p:nvPr>
-        </p:nvSpPr>
-        <p:spPr>
-          <a:xfrm>
-            <a:off x="0" y="6502400"/>
-            <a:ext cx="3962400" cy="341313"/>
-          </a:xfrm>
-          <a:prstGeom prst="rect">
-            <a:avLst/>
-          </a:prstGeom>
-        </p:spPr>
-        <p:txBody>
-          <a:bodyPr vert="horz" lIns="91440" tIns="45720" rIns="91440" bIns="45720" rtlCol="0" anchor="b"/>
-          <a:lstStyle>
-            <a:lvl1pPr algn="l">
-              <a:defRPr sz="1200"/>
-            </a:lvl1pPr>
-          </a:lstStyle>
-          <a:p/>
-        </p:txBody>
-      </p:sp>
-      <p:sp>
-        <p:nvSpPr>
-          <p:cNvPr id="7" name="Slide Number Placeholder 6"/>
-          <p:cNvSpPr>
-            <a:spLocks noGrp="1"/>
-          </p:cNvSpPr>
-          <p:nvPr>
-            <p:ph type="sldNum" sz="quarter" idx="5"/>
-          </p:nvPr>
-        </p:nvSpPr>
-        <p:spPr>
-          <a:xfrm>
-            <a:off x="5180013" y="6502400"/>
-            <a:ext cx="3962400" cy="341313"/>
-          </a:xfrm>
-          <a:prstGeom prst="rect">
-            <a:avLst/>
-          </a:prstGeom>
-        </p:spPr>
-        <p:txBody>
-          <a:bodyPr vert="horz" lIns="91440" tIns="45720" rIns="91440" bIns="45720" rtlCol="0" anchor="b"/>
-          <a:lstStyle>
-            <a:lvl1pPr algn="r">
-              <a:defRPr sz="1200"/>
-            </a:lvl1pPr>
-          </a:lstStyle>
-          <a:p>
-            <a:r id="{871B2431-D351-4C6E-A3CF-9DFAC0E3E050}" type="slidenum">
-              <a:rPr lang="cs-CZ" smtClean="0"/>
-              <a:t>‹#›</a:t>
-            </a:r>
-          </a:p>
-        </p:txBody>
-      </p:sp>
-    </p:spTree>
-  </p:cSld>
-  <p:clrMapOvr>
-    <a:masterClrMapping/>
-  </p:clrMapOvr>
-</p:notes>
-</file>
-
-<file path=ppt/notesSlides/notesSlide14.xml><?xml version="1.0" encoding="utf-8"?>
-<p:notes xmlns:p="http://schemas.openxmlformats.org/presentationml/2006/main" xmlns:a="http://schemas.openxmlformats.org/drawingml/2006/main">
-  <p:cSld>
-    <p:spTree xmlns:r="http://schemas.openxmlformats.org/officeDocument/2006/relationships">
-      <p:nvGrpSpPr>
-        <p:cNvPr id="1" name=""/>
-        <p:cNvGrpSpPr/>
-        <p:nvPr/>
-      </p:nvGrpSpPr>
-      <p:grpSpPr>
-        <a:xfrm>
-          <a:off x="0" y="0"/>
-          <a:ext cx="0" cy="0"/>
-          <a:chOff x="0" y="0"/>
-          <a:chExt cx="0" cy="0"/>
-        </a:xfrm>
-      </p:grpSpPr>
-      <p:sp>
-        <p:nvSpPr>
-          <p:cNvPr id="2" name="Header Placeholder 1"/>
-          <p:cNvSpPr>
-            <a:spLocks noGrp="1"/>
-          </p:cNvSpPr>
-          <p:nvPr>
-            <p:ph type="hdr" sz="quarter"/>
-          </p:nvPr>
-        </p:nvSpPr>
-        <p:spPr>
-          <a:xfrm>
-            <a:off x="0" y="0"/>
-            <a:ext cx="3962400" cy="342900"/>
-          </a:xfrm>
-          <a:prstGeom prst="rect">
-            <a:avLst/>
-          </a:prstGeom>
-        </p:spPr>
-        <p:txBody>
-          <a:bodyPr vert="horz" lIns="91440" tIns="45720" rIns="91440" bIns="45720" rtlCol="0"/>
-          <a:lstStyle>
-            <a:lvl1pPr algn="l">
-              <a:defRPr sz="1200"/>
-            </a:lvl1pPr>
-          </a:lstStyle>
-          <a:p/>
-        </p:txBody>
-      </p:sp>
-      <p:sp>
-        <p:nvSpPr>
-          <p:cNvPr id="3" name="Date Placeholder 2"/>
-          <p:cNvSpPr>
-            <a:spLocks noGrp="1"/>
-          </p:cNvSpPr>
-          <p:nvPr>
-            <p:ph type="dt" idx="1"/>
-          </p:nvPr>
-        </p:nvSpPr>
-        <p:spPr>
-          <a:xfrm>
-            <a:off x="5180013" y="0"/>
-            <a:ext cx="3962400" cy="342900"/>
-          </a:xfrm>
-          <a:prstGeom prst="rect">
-            <a:avLst/>
-          </a:prstGeom>
-        </p:spPr>
-        <p:txBody>
-          <a:bodyPr vert="horz" lIns="91440" tIns="45720" rIns="91440" bIns="45720" rtlCol="0"/>
-          <a:lstStyle>
-            <a:lvl1pPr algn="r">
-              <a:defRPr sz="1200"/>
-            </a:lvl1pPr>
-          </a:lstStyle>
-          <a:p>
-            <a:r id="{B7268E1E-0E44-426D-905E-8AD9B19D2182}" type="datetimeFigureOut">
-              <a:rPr lang="cs-CZ" smtClean="0"/>
-              <a:t>1.7.2013</a:t>
-            </a:r>
-          </a:p>
-        </p:txBody>
-      </p:sp>
-      <p:sp>
-        <p:nvSpPr>
-          <p:cNvPr id="4" name="Slide Image Placeholder 3"/>
-          <p:cNvSpPr>
-            <a:spLocks noGrp="1" noRot="1" noChangeAspect="1"/>
-          </p:cNvSpPr>
-          <p:nvPr>
-            <p:ph type="sldImg" idx="2"/>
-          </p:nvPr>
-        </p:nvSpPr>
-        <p:spPr>
-          <a:xfrm>
-            <a:off x="2857500" y="512763"/>
-            <a:ext cx="3429000" cy="2566987"/>
-          </a:xfrm>
-          <a:prstGeom prst="rect">
-            <a:avLst/>
-          </a:prstGeom>
-          <a:noFill/>
-          <a:ln w="12700">
-            <a:solidFill>
-              <a:prstClr val="black"/>
-            </a:solidFill>
-          </a:ln>
-        </p:spPr>
-        <p:txBody>
-          <a:bodyPr vert="horz" lIns="91440" tIns="45720" rIns="91440" bIns="45720" rtlCol="0" anchor="ctr"/>
-          <a:lstStyle/>
-          <a:p/>
-        </p:txBody>
-      </p:sp>
-      <p:sp>
-        <p:nvSpPr>
-          <p:cNvPr id="5" name="Notes Placeholder 4"/>
-          <p:cNvSpPr>
-            <a:spLocks noGrp="1"/>
-          </p:cNvSpPr>
-          <p:nvPr>
-            <p:ph type="body" sz="quarter" idx="3"/>
-          </p:nvPr>
-        </p:nvSpPr>
-        <p:spPr>
-          <a:xfrm>
-            <a:off x="914400" y="3251200"/>
-            <a:ext cx="7315200" cy="3081338"/>
-          </a:xfrm>
-          <a:prstGeom prst="rect">
-            <a:avLst/>
-          </a:prstGeom>
-        </p:spPr>
-        <p:txBody>
-          <a:bodyPr vert="horz" lIns="91440" tIns="45720" rIns="91440" bIns="45720" rtlCol="0"/>
-          <a:lstStyle/>
-          <a:p>
-            <a:r>
-              <a:t>5 seconds.</a:t>
-            </a:r>
-          </a:p>
-          <a:p>
-            <a:r>
-              <a:t>The dataset citation and course brief support the scope. Our measurements and operational claims come from the listed project reports. GitHub evidence requires repository access.</a:t>
-            </a:r>
-          </a:p>
-          <a:p>
-            <a:r>
-              <a:t>Source: UCI dataset page; course brief; project reports and CI runs</a:t>
-            </a:r>
-          </a:p>
-        </p:txBody>
-      </p:sp>
-      <p:sp>
-        <p:nvSpPr>
-          <p:cNvPr id="6" name="Footer Placeholder 5"/>
-          <p:cNvSpPr>
-            <a:spLocks noGrp="1"/>
-          </p:cNvSpPr>
-          <p:nvPr>
-            <p:ph type="ftr" sz="quarter" idx="4"/>
-          </p:nvPr>
-        </p:nvSpPr>
-        <p:spPr>
-          <a:xfrm>
-            <a:off x="0" y="6502400"/>
-            <a:ext cx="3962400" cy="341313"/>
-          </a:xfrm>
-          <a:prstGeom prst="rect">
-            <a:avLst/>
-          </a:prstGeom>
-        </p:spPr>
-        <p:txBody>
-          <a:bodyPr vert="horz" lIns="91440" tIns="45720" rIns="91440" bIns="45720" rtlCol="0" anchor="b"/>
-          <a:lstStyle>
-            <a:lvl1pPr algn="l">
-              <a:defRPr sz="1200"/>
-            </a:lvl1pPr>
-          </a:lstStyle>
-          <a:p/>
-        </p:txBody>
-      </p:sp>
-      <p:sp>
-        <p:nvSpPr>
-          <p:cNvPr id="7" name="Slide Number Placeholder 6"/>
-          <p:cNvSpPr>
-            <a:spLocks noGrp="1"/>
-          </p:cNvSpPr>
-          <p:nvPr>
-            <p:ph type="sldNum" sz="quarter" idx="5"/>
-          </p:nvPr>
-        </p:nvSpPr>
-        <p:spPr>
-          <a:xfrm>
-            <a:off x="5180013" y="6502400"/>
-            <a:ext cx="3962400" cy="341313"/>
-          </a:xfrm>
-          <a:prstGeom prst="rect">
-            <a:avLst/>
-          </a:prstGeom>
-        </p:spPr>
-        <p:txBody>
-          <a:bodyPr vert="horz" lIns="91440" tIns="45720" rIns="91440" bIns="45720" rtlCol="0" anchor="b"/>
-          <a:lstStyle>
-            <a:lvl1pPr algn="r">
-              <a:defRPr sz="1200"/>
-            </a:lvl1pPr>
-          </a:lstStyle>
-          <a:p>
-            <a:r id="{871B2431-D351-4C6E-A3CF-9DFAC0E3E050}" type="slidenum">
-              <a:rPr lang="cs-CZ" smtClean="0"/>
-              <a:t>‹#›</a:t>
-            </a:r>
-          </a:p>
-        </p:txBody>
-      </p:sp>
-    </p:spTree>
-  </p:cSld>
-  <p:clrMapOvr>
-    <a:masterClrMapping/>
-  </p:clrMapOvr>
-</p:notes>
-</file>
-
-<file path=ppt/notesSlides/notesSlide15.xml><?xml version="1.0" encoding="utf-8"?>
-<p:notes xmlns:a="http://schemas.openxmlformats.org/drawingml/2006/main" xmlns:p="http://schemas.openxmlformats.org/presentationml/2006/main" xmlns:r="http://schemas.openxmlformats.org/officeDocument/2006/relationships">
+<p:notes xmlns:a="http://schemas.openxmlformats.org/drawingml/2006/main" xmlns:r="http://schemas.openxmlformats.org/officeDocument/2006/relationships" xmlns:p="http://schemas.openxmlformats.org/presentationml/2006/main">
   <p:cSld>
     <p:spTree>
       <p:nvGrpSpPr>
@@ -1831,48 +534,195 @@
       </p:grpSpPr>
       <p:sp>
         <p:nvSpPr>
-          <p:cNvPr id="2" name="Slide Image Placeholder 1"/>
+          <p:cNvPr id="2" name="Header Placeholder 1"/>
           <p:cNvSpPr>
             <a:spLocks noGrp="1"/>
           </p:cNvSpPr>
           <p:nvPr>
-            <p:ph type="sldImg" idx="2"/>
+            <p:ph type="hdr" sz="quarter"/>
           </p:nvPr>
         </p:nvSpPr>
-        <p:spPr/>
-      </p:sp>
-      <p:sp>
-        <p:nvSpPr>
-          <p:cNvPr id="3" name="Notes Placeholder 2"/>
+        <p:spPr>
+          <a:xfrm>
+            <a:off x="0" y="0"/>
+            <a:ext cx="3962400" cy="342900"/>
+          </a:xfrm>
+          <a:prstGeom prst="rect">
+            <a:avLst/>
+          </a:prstGeom>
+        </p:spPr>
+        <p:txBody>
+          <a:bodyPr vert="horz" lIns="91440" tIns="45720" rIns="91440" bIns="45720" rtlCol="0"/>
+          <a:lstStyle>
+            <a:lvl1pPr algn="l">
+              <a:defRPr sz="1200"/>
+            </a:lvl1pPr>
+          </a:lstStyle>
+          <a:p>
+            <a:endParaRPr/>
+          </a:p>
+        </p:txBody>
+      </p:sp>
+      <p:sp>
+        <p:nvSpPr>
+          <p:cNvPr id="3" name="Date Placeholder 2"/>
           <p:cNvSpPr>
             <a:spLocks noGrp="1"/>
           </p:cNvSpPr>
           <p:nvPr>
-            <p:ph type="body" idx="3" sz="quarter"/>
+            <p:ph type="dt" idx="1"/>
           </p:nvPr>
         </p:nvSpPr>
-        <p:spPr/>
-        <p:txBody>
-          <a:bodyPr/>
-          <a:lstStyle/>
-          <a:p>
-            <a:r>
-              <a:t>10 seconds. Thank the audience. Open the API and evidence reports for the five-minute Q&amp;A.</a:t>
-            </a:r>
-          </a:p>
-        </p:txBody>
-      </p:sp>
-      <p:sp>
-        <p:nvSpPr>
-          <p:cNvPr id="4" name="Slide Number Placeholder 3"/>
+        <p:spPr>
+          <a:xfrm>
+            <a:off x="5180013" y="0"/>
+            <a:ext cx="3962400" cy="342900"/>
+          </a:xfrm>
+          <a:prstGeom prst="rect">
+            <a:avLst/>
+          </a:prstGeom>
+        </p:spPr>
+        <p:txBody>
+          <a:bodyPr vert="horz" lIns="91440" tIns="45720" rIns="91440" bIns="45720" rtlCol="0"/>
+          <a:lstStyle>
+            <a:lvl1pPr algn="r">
+              <a:defRPr sz="1200"/>
+            </a:lvl1pPr>
+          </a:lstStyle>
+          <a:p>
+            <a:r>
+              <a:rPr lang="cs-CZ"/>
+              <a:t>1.7.2013</a:t>
+            </a:r>
+          </a:p>
+        </p:txBody>
+      </p:sp>
+      <p:sp>
+        <p:nvSpPr>
+          <p:cNvPr id="4" name="Slide Image Placeholder 3"/>
+          <p:cNvSpPr>
+            <a:spLocks noGrp="1" noRot="1" noChangeAspect="1"/>
+          </p:cNvSpPr>
+          <p:nvPr>
+            <p:ph type="sldImg" idx="2"/>
+          </p:nvPr>
+        </p:nvSpPr>
+        <p:spPr>
+          <a:xfrm>
+            <a:off x="2290763" y="512763"/>
+            <a:ext cx="4562475" cy="2566987"/>
+          </a:xfrm>
+          <a:prstGeom prst="rect">
+            <a:avLst/>
+          </a:prstGeom>
+          <a:noFill/>
+          <a:ln w="12700">
+            <a:solidFill>
+              <a:prstClr val="black"/>
+            </a:solidFill>
+          </a:ln>
+        </p:spPr>
+        <p:txBody>
+          <a:bodyPr vert="horz" lIns="91440" tIns="45720" rIns="91440" bIns="45720" rtlCol="0" anchor="ctr"/>
+          <a:lstStyle/>
+          <a:p>
+            <a:endParaRPr/>
+          </a:p>
+        </p:txBody>
+      </p:sp>
+      <p:sp>
+        <p:nvSpPr>
+          <p:cNvPr id="5" name="Notes Placeholder 4"/>
           <p:cNvSpPr>
             <a:spLocks noGrp="1"/>
           </p:cNvSpPr>
           <p:nvPr>
-            <p:ph type="sldNum" idx="5" sz="quarter"/>
+            <p:ph type="body" sz="quarter" idx="3"/>
           </p:nvPr>
         </p:nvSpPr>
-        <p:spPr/>
+        <p:spPr>
+          <a:xfrm>
+            <a:off x="914400" y="3251200"/>
+            <a:ext cx="7315200" cy="3081338"/>
+          </a:xfrm>
+          <a:prstGeom prst="rect">
+            <a:avLst/>
+          </a:prstGeom>
+        </p:spPr>
+        <p:txBody>
+          <a:bodyPr vert="horz" lIns="91440" tIns="45720" rIns="91440" bIns="45720" rtlCol="0"/>
+          <a:lstStyle/>
+          <a:p>
+            <a:r>
+              <a:t>15 seconds. Introduce our team and the travel profile service. We focus on the working MLOps system.</a:t>
+            </a:r>
+          </a:p>
+        </p:txBody>
+      </p:sp>
+      <p:sp>
+        <p:nvSpPr>
+          <p:cNvPr id="6" name="Footer Placeholder 5"/>
+          <p:cNvSpPr>
+            <a:spLocks noGrp="1"/>
+          </p:cNvSpPr>
+          <p:nvPr>
+            <p:ph type="ftr" sz="quarter" idx="4"/>
+          </p:nvPr>
+        </p:nvSpPr>
+        <p:spPr>
+          <a:xfrm>
+            <a:off x="0" y="6502400"/>
+            <a:ext cx="3962400" cy="341313"/>
+          </a:xfrm>
+          <a:prstGeom prst="rect">
+            <a:avLst/>
+          </a:prstGeom>
+        </p:spPr>
+        <p:txBody>
+          <a:bodyPr vert="horz" lIns="91440" tIns="45720" rIns="91440" bIns="45720" rtlCol="0" anchor="b"/>
+          <a:lstStyle>
+            <a:lvl1pPr algn="l">
+              <a:defRPr sz="1200"/>
+            </a:lvl1pPr>
+          </a:lstStyle>
+          <a:p>
+            <a:endParaRPr/>
+          </a:p>
+        </p:txBody>
+      </p:sp>
+      <p:sp>
+        <p:nvSpPr>
+          <p:cNvPr id="7" name="Slide Number Placeholder 6"/>
+          <p:cNvSpPr>
+            <a:spLocks noGrp="1"/>
+          </p:cNvSpPr>
+          <p:nvPr>
+            <p:ph type="sldNum" sz="quarter" idx="5"/>
+          </p:nvPr>
+        </p:nvSpPr>
+        <p:spPr>
+          <a:xfrm>
+            <a:off x="5180013" y="6502400"/>
+            <a:ext cx="3962400" cy="341313"/>
+          </a:xfrm>
+          <a:prstGeom prst="rect">
+            <a:avLst/>
+          </a:prstGeom>
+        </p:spPr>
+        <p:txBody>
+          <a:bodyPr vert="horz" lIns="91440" tIns="45720" rIns="91440" bIns="45720" rtlCol="0" anchor="b"/>
+          <a:lstStyle>
+            <a:lvl1pPr algn="r">
+              <a:defRPr sz="1200"/>
+            </a:lvl1pPr>
+          </a:lstStyle>
+          <a:p>
+            <a:r>
+              <a:rPr lang="cs-CZ"/>
+              <a:t>‹#›</a:t>
+            </a:r>
+          </a:p>
+        </p:txBody>
       </p:sp>
     </p:spTree>
   </p:cSld>
@@ -1882,10 +732,10 @@
 </p:notes>
 </file>
 
-<file path=ppt/notesSlides/notesSlide2.xml><?xml version="1.0" encoding="utf-8"?>
-<p:notes xmlns:p="http://schemas.openxmlformats.org/presentationml/2006/main" xmlns:a="http://schemas.openxmlformats.org/drawingml/2006/main">
+<file path=ppt/notesSlides/notesSlide10.xml><?xml version="1.0" encoding="utf-8"?>
+<p:notes xmlns:a="http://schemas.openxmlformats.org/drawingml/2006/main" xmlns:r="http://schemas.openxmlformats.org/officeDocument/2006/relationships" xmlns:p="http://schemas.openxmlformats.org/presentationml/2006/main">
   <p:cSld>
-    <p:spTree xmlns:r="http://schemas.openxmlformats.org/officeDocument/2006/relationships">
+    <p:spTree>
       <p:nvGrpSpPr>
         <p:cNvPr id="1" name=""/>
         <p:cNvGrpSpPr/>
@@ -1925,7 +775,9 @@
               <a:defRPr sz="1200"/>
             </a:lvl1pPr>
           </a:lstStyle>
-          <a:p/>
+          <a:p>
+            <a:endParaRPr/>
+          </a:p>
         </p:txBody>
       </p:sp>
       <p:sp>
@@ -1955,8 +807,8 @@
             </a:lvl1pPr>
           </a:lstStyle>
           <a:p>
-            <a:r id="{B7268E1E-0E44-426D-905E-8AD9B19D2182}" type="datetimeFigureOut">
-              <a:rPr lang="cs-CZ" smtClean="0"/>
+            <a:r>
+              <a:rPr lang="cs-CZ"/>
               <a:t>1.7.2013</a:t>
             </a:r>
           </a:p>
@@ -1990,7 +842,9 @@
         <p:txBody>
           <a:bodyPr vert="horz" lIns="91440" tIns="45720" rIns="91440" bIns="45720" rtlCol="0" anchor="ctr"/>
           <a:lstStyle/>
-          <a:p/>
+          <a:p>
+            <a:endParaRPr/>
+          </a:p>
         </p:txBody>
       </p:sp>
       <p:sp>
@@ -2022,12 +876,12 @@
           </a:p>
           <a:p>
             <a:r>
-              <a:t>A travel platform can group users by their rating profiles. We take 24 category ratings and return a segment, distance, uncertainty flag, and model version. Names are provisional; we have not tested recommendation quality with users.</a:t>
-            </a:r>
-          </a:p>
-          <a:p>
-            <a:r>
-              <a:t>Source: docs/MODEL_CARD.md; reports/bundle-manifest.json; UCI [1]</a:t>
+              <a:t>This is saved failure evidence from a separate staging app. We changed the segment mapping; the canary returned 503. The first recovery attempt failed, so the total detection-to-confirmed-recovery time was about seven minutes sixteen seconds. We restored configuration, stopped and started staging, and checked the semantic canary twice. The actual alert is separate evidence. The failure was added to regression checks.</a:t>
+            </a:r>
+          </a:p>
+          <a:p>
+            <a:r>
+              <a:t>Source: reports/finish-failure.json; finish-alert.json; tests/test_api.py</a:t>
             </a:r>
           </a:p>
         </p:txBody>
@@ -2058,7 +912,9 @@
               <a:defRPr sz="1200"/>
             </a:lvl1pPr>
           </a:lstStyle>
-          <a:p/>
+          <a:p>
+            <a:endParaRPr/>
+          </a:p>
         </p:txBody>
       </p:sp>
       <p:sp>
@@ -2088,8 +944,8 @@
             </a:lvl1pPr>
           </a:lstStyle>
           <a:p>
-            <a:r id="{871B2431-D351-4C6E-A3CF-9DFAC0E3E050}" type="slidenum">
-              <a:rPr lang="cs-CZ" smtClean="0"/>
+            <a:r>
+              <a:rPr lang="cs-CZ"/>
               <a:t>‹#›</a:t>
             </a:r>
           </a:p>
@@ -2103,10 +959,10 @@
 </p:notes>
 </file>
 
-<file path=ppt/notesSlides/notesSlide3.xml><?xml version="1.0" encoding="utf-8"?>
-<p:notes xmlns:p="http://schemas.openxmlformats.org/presentationml/2006/main" xmlns:a="http://schemas.openxmlformats.org/drawingml/2006/main">
+<file path=ppt/notesSlides/notesSlide11.xml><?xml version="1.0" encoding="utf-8"?>
+<p:notes xmlns:a="http://schemas.openxmlformats.org/drawingml/2006/main" xmlns:r="http://schemas.openxmlformats.org/officeDocument/2006/relationships" xmlns:p="http://schemas.openxmlformats.org/presentationml/2006/main">
   <p:cSld>
-    <p:spTree xmlns:r="http://schemas.openxmlformats.org/officeDocument/2006/relationships">
+    <p:spTree>
       <p:nvGrpSpPr>
         <p:cNvPr id="1" name=""/>
         <p:cNvGrpSpPr/>
@@ -2146,7 +1002,9 @@
               <a:defRPr sz="1200"/>
             </a:lvl1pPr>
           </a:lstStyle>
-          <a:p/>
+          <a:p>
+            <a:endParaRPr/>
+          </a:p>
         </p:txBody>
       </p:sp>
       <p:sp>
@@ -2176,8 +1034,8 @@
             </a:lvl1pPr>
           </a:lstStyle>
           <a:p>
-            <a:r id="{B7268E1E-0E44-426D-905E-8AD9B19D2182}" type="datetimeFigureOut">
-              <a:rPr lang="cs-CZ" smtClean="0"/>
+            <a:r>
+              <a:rPr lang="cs-CZ"/>
               <a:t>1.7.2013</a:t>
             </a:r>
           </a:p>
@@ -2211,7 +1069,9 @@
         <p:txBody>
           <a:bodyPr vert="horz" lIns="91440" tIns="45720" rIns="91440" bIns="45720" rtlCol="0" anchor="ctr"/>
           <a:lstStyle/>
-          <a:p/>
+          <a:p>
+            <a:endParaRPr/>
+          </a:p>
         </p:txBody>
       </p:sp>
       <p:sp>
@@ -2238,17 +1098,17 @@
           <a:lstStyle/>
           <a:p>
             <a:r>
-              <a:t>40 seconds.</a:t>
-            </a:r>
-          </a:p>
-          <a:p>
-            <a:r>
-              <a:t>Follow the arrows from versioned data to the live endpoint. Azure ML trains and registers the model. Actions checks the code and deploys an immutable ACR image. Monitor records requests and checks the semantic canary. Cloud-specific code stays in cloudlayer.</a:t>
-            </a:r>
-          </a:p>
-          <a:p>
-            <a:r>
-              <a:t>Source: README.md; docs/reference/course/project/project-brief.md [2]</a:t>
+              <a:t>20 seconds.</a:t>
+            </a:r>
+          </a:p>
+          <a:p>
+            <a:r>
+              <a:t>We used a maximum feature-wise KS statistic. The reference has 1,908 rows and the recent sample has 200. One hundred calibration rounds set the threshold. Adding 1.5 to the first four features, clipped to 0-5, caused the alert condition. This is an offline controlled test, not observed temporal drift or evidence of concept drift.</a:t>
+            </a:r>
+          </a:p>
+          <a:p>
+            <a:r>
+              <a:t>Source: reports/input-drift.json; monitoring/drift.py</a:t>
             </a:r>
           </a:p>
         </p:txBody>
@@ -2279,7 +1139,9 @@
               <a:defRPr sz="1200"/>
             </a:lvl1pPr>
           </a:lstStyle>
-          <a:p/>
+          <a:p>
+            <a:endParaRPr/>
+          </a:p>
         </p:txBody>
       </p:sp>
       <p:sp>
@@ -2309,8 +1171,8 @@
             </a:lvl1pPr>
           </a:lstStyle>
           <a:p>
-            <a:r id="{871B2431-D351-4C6E-A3CF-9DFAC0E3E050}" type="slidenum">
-              <a:rPr lang="cs-CZ" smtClean="0"/>
+            <a:r>
+              <a:rPr lang="cs-CZ"/>
               <a:t>‹#›</a:t>
             </a:r>
           </a:p>
@@ -2324,10 +1186,10 @@
 </p:notes>
 </file>
 
-<file path=ppt/notesSlides/notesSlide4.xml><?xml version="1.0" encoding="utf-8"?>
-<p:notes xmlns:p="http://schemas.openxmlformats.org/presentationml/2006/main" xmlns:a="http://schemas.openxmlformats.org/drawingml/2006/main">
+<file path=ppt/notesSlides/notesSlide12.xml><?xml version="1.0" encoding="utf-8"?>
+<p:notes xmlns:a="http://schemas.openxmlformats.org/drawingml/2006/main" xmlns:r="http://schemas.openxmlformats.org/officeDocument/2006/relationships" xmlns:p="http://schemas.openxmlformats.org/presentationml/2006/main">
   <p:cSld>
-    <p:spTree xmlns:r="http://schemas.openxmlformats.org/officeDocument/2006/relationships">
+    <p:spTree>
       <p:nvGrpSpPr>
         <p:cNvPr id="1" name=""/>
         <p:cNvGrpSpPr/>
@@ -2367,7 +1229,9 @@
               <a:defRPr sz="1200"/>
             </a:lvl1pPr>
           </a:lstStyle>
-          <a:p/>
+          <a:p>
+            <a:endParaRPr/>
+          </a:p>
         </p:txBody>
       </p:sp>
       <p:sp>
@@ -2397,8 +1261,8 @@
             </a:lvl1pPr>
           </a:lstStyle>
           <a:p>
-            <a:r id="{B7268E1E-0E44-426D-905E-8AD9B19D2182}" type="datetimeFigureOut">
-              <a:rPr lang="cs-CZ" smtClean="0"/>
+            <a:r>
+              <a:rPr lang="cs-CZ"/>
               <a:t>1.7.2013</a:t>
             </a:r>
           </a:p>
@@ -2432,7 +1296,9 @@
         <p:txBody>
           <a:bodyPr vert="horz" lIns="91440" tIns="45720" rIns="91440" bIns="45720" rtlCol="0" anchor="ctr"/>
           <a:lstStyle/>
-          <a:p/>
+          <a:p>
+            <a:endParaRPr/>
+          </a:p>
         </p:txBody>
       </p:sp>
       <p:sp>
@@ -2459,17 +1325,17 @@
           <a:lstStyle/>
           <a:p>
             <a:r>
-              <a:t>25 seconds.</a:t>
-            </a:r>
-          </a:p>
-          <a:p>
-            <a:r>
-              <a:t>UCI Travel Review Ratings is licensed CC BY 4.0. We quarantined two malformed rows, removed user IDs from features, and kept duplicates in one split. We kept zeros as supplied and fit preprocessing only on training data. The fresh DVC pull passed.</a:t>
-            </a:r>
-          </a:p>
-          <a:p>
-            <a:r>
-              <a:t>Source: reports/data-audit.json; prepared-data.json; selection.json; UCI [1]</a:t>
+              <a:t>30 seconds.</a:t>
+            </a:r>
+          </a:p>
+          <a:p>
+            <a:r>
+              <a:t>The short-demo plan totals 88.89 THB, including a 60 THB reserve. At 10,000 planned predictions, that is 8.89 THB per 1,000 before credits. The reported Azure cost is 0.00120350 USD for 841 observed valid profiles in the same query window. Billing and logs may lag. This is provisional, not the final invoice or proof of the budget cap.</a:t>
+            </a:r>
+          </a:p>
+          <a:p>
+            <a:r>
+              <a:t>Source: reports/azure-cost-plan.json; cost-per-1000.json; docs/COST_REPORT.md</a:t>
             </a:r>
           </a:p>
         </p:txBody>
@@ -2500,7 +1366,9 @@
               <a:defRPr sz="1200"/>
             </a:lvl1pPr>
           </a:lstStyle>
-          <a:p/>
+          <a:p>
+            <a:endParaRPr/>
+          </a:p>
         </p:txBody>
       </p:sp>
       <p:sp>
@@ -2530,8 +1398,8 @@
             </a:lvl1pPr>
           </a:lstStyle>
           <a:p>
-            <a:r id="{871B2431-D351-4C6E-A3CF-9DFAC0E3E050}" type="slidenum">
-              <a:rPr lang="cs-CZ" smtClean="0"/>
+            <a:r>
+              <a:rPr lang="cs-CZ"/>
               <a:t>‹#›</a:t>
             </a:r>
           </a:p>
@@ -2545,10 +1413,10 @@
 </p:notes>
 </file>
 
-<file path=ppt/notesSlides/notesSlide5.xml><?xml version="1.0" encoding="utf-8"?>
-<p:notes xmlns:p="http://schemas.openxmlformats.org/presentationml/2006/main" xmlns:a="http://schemas.openxmlformats.org/drawingml/2006/main">
+<file path=ppt/notesSlides/notesSlide13.xml><?xml version="1.0" encoding="utf-8"?>
+<p:notes xmlns:a="http://schemas.openxmlformats.org/drawingml/2006/main" xmlns:r="http://schemas.openxmlformats.org/officeDocument/2006/relationships" xmlns:p="http://schemas.openxmlformats.org/presentationml/2006/main">
   <p:cSld>
-    <p:spTree xmlns:r="http://schemas.openxmlformats.org/officeDocument/2006/relationships">
+    <p:spTree>
       <p:nvGrpSpPr>
         <p:cNvPr id="1" name=""/>
         <p:cNvGrpSpPr/>
@@ -2588,7 +1456,9 @@
               <a:defRPr sz="1200"/>
             </a:lvl1pPr>
           </a:lstStyle>
-          <a:p/>
+          <a:p>
+            <a:endParaRPr/>
+          </a:p>
         </p:txBody>
       </p:sp>
       <p:sp>
@@ -2618,8 +1488,8 @@
             </a:lvl1pPr>
           </a:lstStyle>
           <a:p>
-            <a:r id="{B7268E1E-0E44-426D-905E-8AD9B19D2182}" type="datetimeFigureOut">
-              <a:rPr lang="cs-CZ" smtClean="0"/>
+            <a:r>
+              <a:rPr lang="cs-CZ"/>
               <a:t>1.7.2013</a:t>
             </a:r>
           </a:p>
@@ -2653,7 +1523,9 @@
         <p:txBody>
           <a:bodyPr vert="horz" lIns="91440" tIns="45720" rIns="91440" bIns="45720" rtlCol="0" anchor="ctr"/>
           <a:lstStyle/>
-          <a:p/>
+          <a:p>
+            <a:endParaRPr/>
+          </a:p>
         </p:txBody>
       </p:sp>
       <p:sp>
@@ -2680,17 +1552,17 @@
           <a:lstStyle/>
           <a:p>
             <a:r>
-              <a:t>25 seconds.</a:t>
-            </a:r>
-          </a:p>
-          <a:p>
-            <a:r>
-              <a:t>The managed training job completed and the registered model is travel-style version 1. Azure checks a fresh fit against the selected model before exporting the canonical bundle. Startup checks the bundle hash and golden predictions. K-Means test silhouette is 0.1445; model quality is not the main capstone focus.</a:t>
-            </a:r>
-          </a:p>
-          <a:p>
-            <a:r>
-              <a:t>Source: reports/finish-training-registry.json; bundle-manifest.json; ci-deploy-result.json</a:t>
+              <a:t>45 seconds.</a:t>
+            </a:r>
+          </a:p>
+          <a:p>
+            <a:r>
+              <a:t>Our first priorities are the unmet latency target and complete cost reconciliation. Separate network time from application time before changing replicas or spending more. Recheck billing and usage after cleanup when the data has settled. Add live feature windows only when current data is available. Review segment labels and improve the dashboard. Save evidence and remove resources after the demo.</a:t>
+            </a:r>
+          </a:p>
+          <a:p>
+            <a:r>
+              <a:t>Source: reports/finish-delivery.json; docs/DELIVERY_STATUS.md; docs/FINAL_STEPS.md</a:t>
             </a:r>
           </a:p>
         </p:txBody>
@@ -2721,7 +1593,9 @@
               <a:defRPr sz="1200"/>
             </a:lvl1pPr>
           </a:lstStyle>
-          <a:p/>
+          <a:p>
+            <a:endParaRPr/>
+          </a:p>
         </p:txBody>
       </p:sp>
       <p:sp>
@@ -2751,8 +1625,8 @@
             </a:lvl1pPr>
           </a:lstStyle>
           <a:p>
-            <a:r id="{871B2431-D351-4C6E-A3CF-9DFAC0E3E050}" type="slidenum">
-              <a:rPr lang="cs-CZ" smtClean="0"/>
+            <a:r>
+              <a:rPr lang="cs-CZ"/>
               <a:t>‹#›</a:t>
             </a:r>
           </a:p>
@@ -2766,10 +1640,10 @@
 </p:notes>
 </file>
 
-<file path=ppt/notesSlides/notesSlide6.xml><?xml version="1.0" encoding="utf-8"?>
-<p:notes xmlns:p="http://schemas.openxmlformats.org/presentationml/2006/main" xmlns:a="http://schemas.openxmlformats.org/drawingml/2006/main">
+<file path=ppt/notesSlides/notesSlide14.xml><?xml version="1.0" encoding="utf-8"?>
+<p:notes xmlns:a="http://schemas.openxmlformats.org/drawingml/2006/main" xmlns:r="http://schemas.openxmlformats.org/officeDocument/2006/relationships" xmlns:p="http://schemas.openxmlformats.org/presentationml/2006/main">
   <p:cSld>
-    <p:spTree xmlns:r="http://schemas.openxmlformats.org/officeDocument/2006/relationships">
+    <p:spTree>
       <p:nvGrpSpPr>
         <p:cNvPr id="1" name=""/>
         <p:cNvGrpSpPr/>
@@ -2809,7 +1683,9 @@
               <a:defRPr sz="1200"/>
             </a:lvl1pPr>
           </a:lstStyle>
-          <a:p/>
+          <a:p>
+            <a:endParaRPr/>
+          </a:p>
         </p:txBody>
       </p:sp>
       <p:sp>
@@ -2839,8 +1715,8 @@
             </a:lvl1pPr>
           </a:lstStyle>
           <a:p>
-            <a:r id="{B7268E1E-0E44-426D-905E-8AD9B19D2182}" type="datetimeFigureOut">
-              <a:rPr lang="cs-CZ" smtClean="0"/>
+            <a:r>
+              <a:rPr lang="cs-CZ"/>
               <a:t>1.7.2013</a:t>
             </a:r>
           </a:p>
@@ -2874,7 +1750,9 @@
         <p:txBody>
           <a:bodyPr vert="horz" lIns="91440" tIns="45720" rIns="91440" bIns="45720" rtlCol="0" anchor="ctr"/>
           <a:lstStyle/>
-          <a:p/>
+          <a:p>
+            <a:endParaRPr/>
+          </a:p>
         </p:txBody>
       </p:sp>
       <p:sp>
@@ -2901,17 +1779,17 @@
           <a:lstStyle/>
           <a:p>
             <a:r>
-              <a:t>90 seconds.</a:t>
-            </a:r>
-          </a:p>
-          <a:p>
-            <a:r>
-              <a:t>Live demo: open Notebook 22 and run the small smoke check in PRESENTATION.md. Show one valid prediction, an incomplete profile returning 422, and a batch of 100. A valid uncertain profile returns 200 with a null segment. The example shown here is a saved real HTTP response, not a live screenshot.</a:t>
-            </a:r>
-          </a:p>
-          <a:p>
-            <a:r>
-              <a:t>Source: output/presentation/evidence/api-demo.json; service/schemas.py</a:t>
+              <a:t>5 seconds.</a:t>
+            </a:r>
+          </a:p>
+          <a:p>
+            <a:r>
+              <a:t>The dataset citation and course brief support the scope. Our measurements and operational claims come from the listed project reports. GitHub evidence requires repository access.</a:t>
+            </a:r>
+          </a:p>
+          <a:p>
+            <a:r>
+              <a:t>Source: UCI dataset page; course brief; project reports and CI runs</a:t>
             </a:r>
           </a:p>
         </p:txBody>
@@ -2942,7 +1820,9 @@
               <a:defRPr sz="1200"/>
             </a:lvl1pPr>
           </a:lstStyle>
-          <a:p/>
+          <a:p>
+            <a:endParaRPr/>
+          </a:p>
         </p:txBody>
       </p:sp>
       <p:sp>
@@ -2972,8 +1852,8 @@
             </a:lvl1pPr>
           </a:lstStyle>
           <a:p>
-            <a:r id="{871B2431-D351-4C6E-A3CF-9DFAC0E3E050}" type="slidenum">
-              <a:rPr lang="cs-CZ" smtClean="0"/>
+            <a:r>
+              <a:rPr lang="cs-CZ"/>
               <a:t>‹#›</a:t>
             </a:r>
           </a:p>
@@ -2987,10 +1867,10 @@
 </p:notes>
 </file>
 
-<file path=ppt/notesSlides/notesSlide7.xml><?xml version="1.0" encoding="utf-8"?>
-<p:notes xmlns:p="http://schemas.openxmlformats.org/presentationml/2006/main" xmlns:a="http://schemas.openxmlformats.org/drawingml/2006/main">
+<file path=ppt/notesSlides/notesSlide15.xml><?xml version="1.0" encoding="utf-8"?>
+<p:notes xmlns:a="http://schemas.openxmlformats.org/drawingml/2006/main" xmlns:r="http://schemas.openxmlformats.org/officeDocument/2006/relationships" xmlns:p="http://schemas.openxmlformats.org/presentationml/2006/main">
   <p:cSld>
-    <p:spTree xmlns:r="http://schemas.openxmlformats.org/officeDocument/2006/relationships">
+    <p:spTree>
       <p:nvGrpSpPr>
         <p:cNvPr id="1" name=""/>
         <p:cNvGrpSpPr/>
@@ -3006,70 +1886,7 @@
       </p:grpSpPr>
       <p:sp>
         <p:nvSpPr>
-          <p:cNvPr id="2" name="Header Placeholder 1"/>
-          <p:cNvSpPr>
-            <a:spLocks noGrp="1"/>
-          </p:cNvSpPr>
-          <p:nvPr>
-            <p:ph type="hdr" sz="quarter"/>
-          </p:nvPr>
-        </p:nvSpPr>
-        <p:spPr>
-          <a:xfrm>
-            <a:off x="0" y="0"/>
-            <a:ext cx="3962400" cy="342900"/>
-          </a:xfrm>
-          <a:prstGeom prst="rect">
-            <a:avLst/>
-          </a:prstGeom>
-        </p:spPr>
-        <p:txBody>
-          <a:bodyPr vert="horz" lIns="91440" tIns="45720" rIns="91440" bIns="45720" rtlCol="0"/>
-          <a:lstStyle>
-            <a:lvl1pPr algn="l">
-              <a:defRPr sz="1200"/>
-            </a:lvl1pPr>
-          </a:lstStyle>
-          <a:p/>
-        </p:txBody>
-      </p:sp>
-      <p:sp>
-        <p:nvSpPr>
-          <p:cNvPr id="3" name="Date Placeholder 2"/>
-          <p:cNvSpPr>
-            <a:spLocks noGrp="1"/>
-          </p:cNvSpPr>
-          <p:nvPr>
-            <p:ph type="dt" idx="1"/>
-          </p:nvPr>
-        </p:nvSpPr>
-        <p:spPr>
-          <a:xfrm>
-            <a:off x="5180013" y="0"/>
-            <a:ext cx="3962400" cy="342900"/>
-          </a:xfrm>
-          <a:prstGeom prst="rect">
-            <a:avLst/>
-          </a:prstGeom>
-        </p:spPr>
-        <p:txBody>
-          <a:bodyPr vert="horz" lIns="91440" tIns="45720" rIns="91440" bIns="45720" rtlCol="0"/>
-          <a:lstStyle>
-            <a:lvl1pPr algn="r">
-              <a:defRPr sz="1200"/>
-            </a:lvl1pPr>
-          </a:lstStyle>
-          <a:p>
-            <a:r id="{B7268E1E-0E44-426D-905E-8AD9B19D2182}" type="datetimeFigureOut">
-              <a:rPr lang="cs-CZ" smtClean="0"/>
-              <a:t>1.7.2013</a:t>
-            </a:r>
-          </a:p>
-        </p:txBody>
-      </p:sp>
-      <p:sp>
-        <p:nvSpPr>
-          <p:cNvPr id="4" name="Slide Image Placeholder 3"/>
+          <p:cNvPr id="2" name="Slide Image Placeholder 1"/>
           <p:cNvSpPr>
             <a:spLocks noGrp="1" noRot="1" noChangeAspect="1"/>
           </p:cNvSpPr>
@@ -3077,30 +1894,11 @@
             <p:ph type="sldImg" idx="2"/>
           </p:nvPr>
         </p:nvSpPr>
-        <p:spPr>
-          <a:xfrm>
-            <a:off x="2857500" y="512763"/>
-            <a:ext cx="3429000" cy="2566987"/>
-          </a:xfrm>
-          <a:prstGeom prst="rect">
-            <a:avLst/>
-          </a:prstGeom>
-          <a:noFill/>
-          <a:ln w="12700">
-            <a:solidFill>
-              <a:prstClr val="black"/>
-            </a:solidFill>
-          </a:ln>
-        </p:spPr>
-        <p:txBody>
-          <a:bodyPr vert="horz" lIns="91440" tIns="45720" rIns="91440" bIns="45720" rtlCol="0" anchor="ctr"/>
-          <a:lstStyle/>
-          <a:p/>
-        </p:txBody>
-      </p:sp>
-      <p:sp>
-        <p:nvSpPr>
-          <p:cNvPr id="5" name="Notes Placeholder 4"/>
+        <p:spPr/>
+      </p:sp>
+      <p:sp>
+        <p:nvSpPr>
+          <p:cNvPr id="3" name="Notes Placeholder 2"/>
           <p:cNvSpPr>
             <a:spLocks noGrp="1"/>
           </p:cNvSpPr>
@@ -3108,67 +1906,20 @@
             <p:ph type="body" sz="quarter" idx="3"/>
           </p:nvPr>
         </p:nvSpPr>
-        <p:spPr>
-          <a:xfrm>
-            <a:off x="914400" y="3251200"/>
-            <a:ext cx="7315200" cy="3081338"/>
-          </a:xfrm>
-          <a:prstGeom prst="rect">
-            <a:avLst/>
-          </a:prstGeom>
-        </p:spPr>
-        <p:txBody>
-          <a:bodyPr vert="horz" lIns="91440" tIns="45720" rIns="91440" bIns="45720" rtlCol="0"/>
-          <a:lstStyle/>
-          <a:p>
-            <a:r>
-              <a:t>35 seconds.</a:t>
-            </a:r>
-          </a:p>
-          <a:p>
-            <a:r>
-              <a:t>Both saved runs use commit 9fea51a. In the normal run, tests and deployment passed. In the deliberate failure run, tests failed and deployment was skipped. Click the run links to show the actual jobs. These runs do not verify later local code changes.</a:t>
-            </a:r>
-          </a:p>
-          <a:p>
-            <a:r>
-              <a:t>Source: reports/ci-runs.json; reports/ci-deploy-result.json; .github/workflows/ci.yml</a:t>
-            </a:r>
-          </a:p>
-        </p:txBody>
-      </p:sp>
-      <p:sp>
-        <p:nvSpPr>
-          <p:cNvPr id="6" name="Footer Placeholder 5"/>
-          <p:cNvSpPr>
-            <a:spLocks noGrp="1"/>
-          </p:cNvSpPr>
-          <p:nvPr>
-            <p:ph type="ftr" sz="quarter" idx="4"/>
-          </p:nvPr>
-        </p:nvSpPr>
-        <p:spPr>
-          <a:xfrm>
-            <a:off x="0" y="6502400"/>
-            <a:ext cx="3962400" cy="341313"/>
-          </a:xfrm>
-          <a:prstGeom prst="rect">
-            <a:avLst/>
-          </a:prstGeom>
-        </p:spPr>
-        <p:txBody>
-          <a:bodyPr vert="horz" lIns="91440" tIns="45720" rIns="91440" bIns="45720" rtlCol="0" anchor="b"/>
-          <a:lstStyle>
-            <a:lvl1pPr algn="l">
-              <a:defRPr sz="1200"/>
-            </a:lvl1pPr>
-          </a:lstStyle>
-          <a:p/>
-        </p:txBody>
-      </p:sp>
-      <p:sp>
-        <p:nvSpPr>
-          <p:cNvPr id="7" name="Slide Number Placeholder 6"/>
+        <p:spPr/>
+        <p:txBody>
+          <a:bodyPr/>
+          <a:lstStyle/>
+          <a:p>
+            <a:r>
+              <a:t>10 seconds. Thank the audience. Open the API and evidence reports for the five-minute Q&amp;A.</a:t>
+            </a:r>
+          </a:p>
+        </p:txBody>
+      </p:sp>
+      <p:sp>
+        <p:nvSpPr>
+          <p:cNvPr id="4" name="Slide Number Placeholder 3"/>
           <p:cNvSpPr>
             <a:spLocks noGrp="1"/>
           </p:cNvSpPr>
@@ -3176,29 +1927,7 @@
             <p:ph type="sldNum" sz="quarter" idx="5"/>
           </p:nvPr>
         </p:nvSpPr>
-        <p:spPr>
-          <a:xfrm>
-            <a:off x="5180013" y="6502400"/>
-            <a:ext cx="3962400" cy="341313"/>
-          </a:xfrm>
-          <a:prstGeom prst="rect">
-            <a:avLst/>
-          </a:prstGeom>
-        </p:spPr>
-        <p:txBody>
-          <a:bodyPr vert="horz" lIns="91440" tIns="45720" rIns="91440" bIns="45720" rtlCol="0" anchor="b"/>
-          <a:lstStyle>
-            <a:lvl1pPr algn="r">
-              <a:defRPr sz="1200"/>
-            </a:lvl1pPr>
-          </a:lstStyle>
-          <a:p>
-            <a:r id="{871B2431-D351-4C6E-A3CF-9DFAC0E3E050}" type="slidenum">
-              <a:rPr lang="cs-CZ" smtClean="0"/>
-              <a:t>‹#›</a:t>
-            </a:r>
-          </a:p>
-        </p:txBody>
+        <p:spPr/>
       </p:sp>
     </p:spTree>
   </p:cSld>
@@ -3208,10 +1937,10 @@
 </p:notes>
 </file>
 
-<file path=ppt/notesSlides/notesSlide8.xml><?xml version="1.0" encoding="utf-8"?>
-<p:notes xmlns:p="http://schemas.openxmlformats.org/presentationml/2006/main" xmlns:a="http://schemas.openxmlformats.org/drawingml/2006/main">
+<file path=ppt/notesSlides/notesSlide2.xml><?xml version="1.0" encoding="utf-8"?>
+<p:notes xmlns:a="http://schemas.openxmlformats.org/drawingml/2006/main" xmlns:r="http://schemas.openxmlformats.org/officeDocument/2006/relationships" xmlns:p="http://schemas.openxmlformats.org/presentationml/2006/main">
   <p:cSld>
-    <p:spTree xmlns:r="http://schemas.openxmlformats.org/officeDocument/2006/relationships">
+    <p:spTree>
       <p:nvGrpSpPr>
         <p:cNvPr id="1" name=""/>
         <p:cNvGrpSpPr/>
@@ -3251,7 +1980,9 @@
               <a:defRPr sz="1200"/>
             </a:lvl1pPr>
           </a:lstStyle>
-          <a:p/>
+          <a:p>
+            <a:endParaRPr/>
+          </a:p>
         </p:txBody>
       </p:sp>
       <p:sp>
@@ -3281,8 +2012,8 @@
             </a:lvl1pPr>
           </a:lstStyle>
           <a:p>
-            <a:r id="{B7268E1E-0E44-426D-905E-8AD9B19D2182}" type="datetimeFigureOut">
-              <a:rPr lang="cs-CZ" smtClean="0"/>
+            <a:r>
+              <a:rPr lang="cs-CZ"/>
               <a:t>1.7.2013</a:t>
             </a:r>
           </a:p>
@@ -3316,7 +2047,9 @@
         <p:txBody>
           <a:bodyPr vert="horz" lIns="91440" tIns="45720" rIns="91440" bIns="45720" rtlCol="0" anchor="ctr"/>
           <a:lstStyle/>
-          <a:p/>
+          <a:p>
+            <a:endParaRPr/>
+          </a:p>
         </p:txBody>
       </p:sp>
       <p:sp>
@@ -3343,17 +2076,17 @@
           <a:lstStyle/>
           <a:p>
             <a:r>
-              <a:t>25 seconds.</a:t>
-            </a:r>
-          </a:p>
-          <a:p>
-            <a:r>
-              <a:t>Warm tests used 200 requests, concurrency 10, batch size 1, and excluded warm-up requests. All had zero errors. The pooled-client test used parallel warm-up and connection reuse, so it is a separate measurement, not proof of a server speedup. Azure timing includes the WSL network path. Cold start is one readiness request after verified zero replicas, not a percentile.</a:t>
-            </a:r>
-          </a:p>
-          <a:p>
-            <a:r>
-              <a:t>Source: reports/serving-recheck/local-load.json; azure-load.json; pooled-load.json; finish-cold.json</a:t>
+              <a:t>45 seconds.</a:t>
+            </a:r>
+          </a:p>
+          <a:p>
+            <a:r>
+              <a:t>A travel platform can group users by their rating profiles. We take 24 category ratings and return a segment, distance, uncertainty flag, and model version. Names are provisional; we have not tested recommendation quality with users.</a:t>
+            </a:r>
+          </a:p>
+          <a:p>
+            <a:r>
+              <a:t>Source: docs/MODEL_CARD.md; reports/bundle-manifest.json; UCI [1]</a:t>
             </a:r>
           </a:p>
         </p:txBody>
@@ -3384,7 +2117,9 @@
               <a:defRPr sz="1200"/>
             </a:lvl1pPr>
           </a:lstStyle>
-          <a:p/>
+          <a:p>
+            <a:endParaRPr/>
+          </a:p>
         </p:txBody>
       </p:sp>
       <p:sp>
@@ -3414,8 +2149,8 @@
             </a:lvl1pPr>
           </a:lstStyle>
           <a:p>
-            <a:r id="{871B2431-D351-4C6E-A3CF-9DFAC0E3E050}" type="slidenum">
-              <a:rPr lang="cs-CZ" smtClean="0"/>
+            <a:r>
+              <a:rPr lang="cs-CZ"/>
               <a:t>‹#›</a:t>
             </a:r>
           </a:p>
@@ -3429,10 +2164,10 @@
 </p:notes>
 </file>
 
-<file path=ppt/notesSlides/notesSlide9.xml><?xml version="1.0" encoding="utf-8"?>
-<p:notes xmlns:p="http://schemas.openxmlformats.org/presentationml/2006/main" xmlns:a="http://schemas.openxmlformats.org/drawingml/2006/main">
+<file path=ppt/notesSlides/notesSlide3.xml><?xml version="1.0" encoding="utf-8"?>
+<p:notes xmlns:a="http://schemas.openxmlformats.org/drawingml/2006/main" xmlns:r="http://schemas.openxmlformats.org/officeDocument/2006/relationships" xmlns:p="http://schemas.openxmlformats.org/presentationml/2006/main">
   <p:cSld>
-    <p:spTree xmlns:r="http://schemas.openxmlformats.org/officeDocument/2006/relationships">
+    <p:spTree>
       <p:nvGrpSpPr>
         <p:cNvPr id="1" name=""/>
         <p:cNvGrpSpPr/>
@@ -3472,7 +2207,9 @@
               <a:defRPr sz="1200"/>
             </a:lvl1pPr>
           </a:lstStyle>
-          <a:p/>
+          <a:p>
+            <a:endParaRPr/>
+          </a:p>
         </p:txBody>
       </p:sp>
       <p:sp>
@@ -3502,8 +2239,8 @@
             </a:lvl1pPr>
           </a:lstStyle>
           <a:p>
-            <a:r id="{B7268E1E-0E44-426D-905E-8AD9B19D2182}" type="datetimeFigureOut">
-              <a:rPr lang="cs-CZ" smtClean="0"/>
+            <a:r>
+              <a:rPr lang="cs-CZ"/>
               <a:t>1.7.2013</a:t>
             </a:r>
           </a:p>
@@ -3537,7 +2274,9 @@
         <p:txBody>
           <a:bodyPr vert="horz" lIns="91440" tIns="45720" rIns="91440" bIns="45720" rtlCol="0" anchor="ctr"/>
           <a:lstStyle/>
-          <a:p/>
+          <a:p>
+            <a:endParaRPr/>
+          </a:p>
         </p:txBody>
       </p:sp>
       <p:sp>
@@ -3564,17 +2303,17 @@
           <a:lstStyle/>
           <a:p>
             <a:r>
-              <a:t>25 seconds.</a:t>
-            </a:r>
-          </a:p>
-          <a:p>
-            <a:r>
-              <a:t>This chart uses actual saved Log Analytics bins, not an Azure Portal screenshot. The dashboard is MLOP Travel Style. Logs contain derived counts, status, latency, and model version rather than full profiles. Logged p95 is application timing and must not be compared directly with client HTTPS p95. An actual semantic alert fired and later resolved; email notification is not configured.</a:t>
-            </a:r>
-          </a:p>
-          <a:p>
-            <a:r>
-              <a:t>Source: reports/azure-telemetry.json; finish-monitor.json; finish-alert.json</a:t>
+              <a:t>40 seconds.</a:t>
+            </a:r>
+          </a:p>
+          <a:p>
+            <a:r>
+              <a:t>Follow the arrows from versioned data to the live endpoint. Azure ML trains and registers the model. Actions checks the code and deploys an immutable ACR image. Monitor records requests and checks the semantic canary. Cloud-specific code stays in cloudlayer.</a:t>
+            </a:r>
+          </a:p>
+          <a:p>
+            <a:r>
+              <a:t>Source: README.md; docs/reference/course/project/project-brief.md [2]</a:t>
             </a:r>
           </a:p>
         </p:txBody>
@@ -3605,7 +2344,9 @@
               <a:defRPr sz="1200"/>
             </a:lvl1pPr>
           </a:lstStyle>
-          <a:p/>
+          <a:p>
+            <a:endParaRPr/>
+          </a:p>
         </p:txBody>
       </p:sp>
       <p:sp>
@@ -3635,8 +2376,1370 @@
             </a:lvl1pPr>
           </a:lstStyle>
           <a:p>
-            <a:r id="{871B2431-D351-4C6E-A3CF-9DFAC0E3E050}" type="slidenum">
-              <a:rPr lang="cs-CZ" smtClean="0"/>
+            <a:r>
+              <a:rPr lang="cs-CZ"/>
+              <a:t>‹#›</a:t>
+            </a:r>
+          </a:p>
+        </p:txBody>
+      </p:sp>
+    </p:spTree>
+  </p:cSld>
+  <p:clrMapOvr>
+    <a:masterClrMapping/>
+  </p:clrMapOvr>
+</p:notes>
+</file>
+
+<file path=ppt/notesSlides/notesSlide4.xml><?xml version="1.0" encoding="utf-8"?>
+<p:notes xmlns:a="http://schemas.openxmlformats.org/drawingml/2006/main" xmlns:r="http://schemas.openxmlformats.org/officeDocument/2006/relationships" xmlns:p="http://schemas.openxmlformats.org/presentationml/2006/main">
+  <p:cSld>
+    <p:spTree>
+      <p:nvGrpSpPr>
+        <p:cNvPr id="1" name=""/>
+        <p:cNvGrpSpPr/>
+        <p:nvPr/>
+      </p:nvGrpSpPr>
+      <p:grpSpPr>
+        <a:xfrm>
+          <a:off x="0" y="0"/>
+          <a:ext cx="0" cy="0"/>
+          <a:chOff x="0" y="0"/>
+          <a:chExt cx="0" cy="0"/>
+        </a:xfrm>
+      </p:grpSpPr>
+      <p:sp>
+        <p:nvSpPr>
+          <p:cNvPr id="2" name="Header Placeholder 1"/>
+          <p:cNvSpPr>
+            <a:spLocks noGrp="1"/>
+          </p:cNvSpPr>
+          <p:nvPr>
+            <p:ph type="hdr" sz="quarter"/>
+          </p:nvPr>
+        </p:nvSpPr>
+        <p:spPr>
+          <a:xfrm>
+            <a:off x="0" y="0"/>
+            <a:ext cx="3962400" cy="342900"/>
+          </a:xfrm>
+          <a:prstGeom prst="rect">
+            <a:avLst/>
+          </a:prstGeom>
+        </p:spPr>
+        <p:txBody>
+          <a:bodyPr vert="horz" lIns="91440" tIns="45720" rIns="91440" bIns="45720" rtlCol="0"/>
+          <a:lstStyle>
+            <a:lvl1pPr algn="l">
+              <a:defRPr sz="1200"/>
+            </a:lvl1pPr>
+          </a:lstStyle>
+          <a:p>
+            <a:endParaRPr/>
+          </a:p>
+        </p:txBody>
+      </p:sp>
+      <p:sp>
+        <p:nvSpPr>
+          <p:cNvPr id="3" name="Date Placeholder 2"/>
+          <p:cNvSpPr>
+            <a:spLocks noGrp="1"/>
+          </p:cNvSpPr>
+          <p:nvPr>
+            <p:ph type="dt" idx="1"/>
+          </p:nvPr>
+        </p:nvSpPr>
+        <p:spPr>
+          <a:xfrm>
+            <a:off x="5180013" y="0"/>
+            <a:ext cx="3962400" cy="342900"/>
+          </a:xfrm>
+          <a:prstGeom prst="rect">
+            <a:avLst/>
+          </a:prstGeom>
+        </p:spPr>
+        <p:txBody>
+          <a:bodyPr vert="horz" lIns="91440" tIns="45720" rIns="91440" bIns="45720" rtlCol="0"/>
+          <a:lstStyle>
+            <a:lvl1pPr algn="r">
+              <a:defRPr sz="1200"/>
+            </a:lvl1pPr>
+          </a:lstStyle>
+          <a:p>
+            <a:r>
+              <a:rPr lang="cs-CZ"/>
+              <a:t>1.7.2013</a:t>
+            </a:r>
+          </a:p>
+        </p:txBody>
+      </p:sp>
+      <p:sp>
+        <p:nvSpPr>
+          <p:cNvPr id="4" name="Slide Image Placeholder 3"/>
+          <p:cNvSpPr>
+            <a:spLocks noGrp="1" noRot="1" noChangeAspect="1"/>
+          </p:cNvSpPr>
+          <p:nvPr>
+            <p:ph type="sldImg" idx="2"/>
+          </p:nvPr>
+        </p:nvSpPr>
+        <p:spPr>
+          <a:xfrm>
+            <a:off x="2857500" y="512763"/>
+            <a:ext cx="3429000" cy="2566987"/>
+          </a:xfrm>
+          <a:prstGeom prst="rect">
+            <a:avLst/>
+          </a:prstGeom>
+          <a:noFill/>
+          <a:ln w="12700">
+            <a:solidFill>
+              <a:prstClr val="black"/>
+            </a:solidFill>
+          </a:ln>
+        </p:spPr>
+        <p:txBody>
+          <a:bodyPr vert="horz" lIns="91440" tIns="45720" rIns="91440" bIns="45720" rtlCol="0" anchor="ctr"/>
+          <a:lstStyle/>
+          <a:p>
+            <a:endParaRPr/>
+          </a:p>
+        </p:txBody>
+      </p:sp>
+      <p:sp>
+        <p:nvSpPr>
+          <p:cNvPr id="5" name="Notes Placeholder 4"/>
+          <p:cNvSpPr>
+            <a:spLocks noGrp="1"/>
+          </p:cNvSpPr>
+          <p:nvPr>
+            <p:ph type="body" sz="quarter" idx="3"/>
+          </p:nvPr>
+        </p:nvSpPr>
+        <p:spPr>
+          <a:xfrm>
+            <a:off x="914400" y="3251200"/>
+            <a:ext cx="7315200" cy="3081338"/>
+          </a:xfrm>
+          <a:prstGeom prst="rect">
+            <a:avLst/>
+          </a:prstGeom>
+        </p:spPr>
+        <p:txBody>
+          <a:bodyPr vert="horz" lIns="91440" tIns="45720" rIns="91440" bIns="45720" rtlCol="0"/>
+          <a:lstStyle/>
+          <a:p>
+            <a:r>
+              <a:t>25 seconds.</a:t>
+            </a:r>
+          </a:p>
+          <a:p>
+            <a:r>
+              <a:t>UCI Travel Review Ratings is licensed CC BY 4.0. We quarantined two malformed rows, removed user IDs from features, and kept duplicates in one split. We kept zeros as supplied and fit preprocessing only on training data. The fresh DVC pull passed.</a:t>
+            </a:r>
+          </a:p>
+          <a:p>
+            <a:r>
+              <a:t>Source: reports/data-audit.json; prepared-data.json; selection.json; UCI [1]</a:t>
+            </a:r>
+          </a:p>
+        </p:txBody>
+      </p:sp>
+      <p:sp>
+        <p:nvSpPr>
+          <p:cNvPr id="6" name="Footer Placeholder 5"/>
+          <p:cNvSpPr>
+            <a:spLocks noGrp="1"/>
+          </p:cNvSpPr>
+          <p:nvPr>
+            <p:ph type="ftr" sz="quarter" idx="4"/>
+          </p:nvPr>
+        </p:nvSpPr>
+        <p:spPr>
+          <a:xfrm>
+            <a:off x="0" y="6502400"/>
+            <a:ext cx="3962400" cy="341313"/>
+          </a:xfrm>
+          <a:prstGeom prst="rect">
+            <a:avLst/>
+          </a:prstGeom>
+        </p:spPr>
+        <p:txBody>
+          <a:bodyPr vert="horz" lIns="91440" tIns="45720" rIns="91440" bIns="45720" rtlCol="0" anchor="b"/>
+          <a:lstStyle>
+            <a:lvl1pPr algn="l">
+              <a:defRPr sz="1200"/>
+            </a:lvl1pPr>
+          </a:lstStyle>
+          <a:p>
+            <a:endParaRPr/>
+          </a:p>
+        </p:txBody>
+      </p:sp>
+      <p:sp>
+        <p:nvSpPr>
+          <p:cNvPr id="7" name="Slide Number Placeholder 6"/>
+          <p:cNvSpPr>
+            <a:spLocks noGrp="1"/>
+          </p:cNvSpPr>
+          <p:nvPr>
+            <p:ph type="sldNum" sz="quarter" idx="5"/>
+          </p:nvPr>
+        </p:nvSpPr>
+        <p:spPr>
+          <a:xfrm>
+            <a:off x="5180013" y="6502400"/>
+            <a:ext cx="3962400" cy="341313"/>
+          </a:xfrm>
+          <a:prstGeom prst="rect">
+            <a:avLst/>
+          </a:prstGeom>
+        </p:spPr>
+        <p:txBody>
+          <a:bodyPr vert="horz" lIns="91440" tIns="45720" rIns="91440" bIns="45720" rtlCol="0" anchor="b"/>
+          <a:lstStyle>
+            <a:lvl1pPr algn="r">
+              <a:defRPr sz="1200"/>
+            </a:lvl1pPr>
+          </a:lstStyle>
+          <a:p>
+            <a:r>
+              <a:rPr lang="cs-CZ"/>
+              <a:t>‹#›</a:t>
+            </a:r>
+          </a:p>
+        </p:txBody>
+      </p:sp>
+    </p:spTree>
+  </p:cSld>
+  <p:clrMapOvr>
+    <a:masterClrMapping/>
+  </p:clrMapOvr>
+</p:notes>
+</file>
+
+<file path=ppt/notesSlides/notesSlide5.xml><?xml version="1.0" encoding="utf-8"?>
+<p:notes xmlns:a="http://schemas.openxmlformats.org/drawingml/2006/main" xmlns:r="http://schemas.openxmlformats.org/officeDocument/2006/relationships" xmlns:p="http://schemas.openxmlformats.org/presentationml/2006/main">
+  <p:cSld>
+    <p:spTree>
+      <p:nvGrpSpPr>
+        <p:cNvPr id="1" name=""/>
+        <p:cNvGrpSpPr/>
+        <p:nvPr/>
+      </p:nvGrpSpPr>
+      <p:grpSpPr>
+        <a:xfrm>
+          <a:off x="0" y="0"/>
+          <a:ext cx="0" cy="0"/>
+          <a:chOff x="0" y="0"/>
+          <a:chExt cx="0" cy="0"/>
+        </a:xfrm>
+      </p:grpSpPr>
+      <p:sp>
+        <p:nvSpPr>
+          <p:cNvPr id="2" name="Header Placeholder 1"/>
+          <p:cNvSpPr>
+            <a:spLocks noGrp="1"/>
+          </p:cNvSpPr>
+          <p:nvPr>
+            <p:ph type="hdr" sz="quarter"/>
+          </p:nvPr>
+        </p:nvSpPr>
+        <p:spPr>
+          <a:xfrm>
+            <a:off x="0" y="0"/>
+            <a:ext cx="3962400" cy="342900"/>
+          </a:xfrm>
+          <a:prstGeom prst="rect">
+            <a:avLst/>
+          </a:prstGeom>
+        </p:spPr>
+        <p:txBody>
+          <a:bodyPr vert="horz" lIns="91440" tIns="45720" rIns="91440" bIns="45720" rtlCol="0"/>
+          <a:lstStyle>
+            <a:lvl1pPr algn="l">
+              <a:defRPr sz="1200"/>
+            </a:lvl1pPr>
+          </a:lstStyle>
+          <a:p>
+            <a:endParaRPr/>
+          </a:p>
+        </p:txBody>
+      </p:sp>
+      <p:sp>
+        <p:nvSpPr>
+          <p:cNvPr id="3" name="Date Placeholder 2"/>
+          <p:cNvSpPr>
+            <a:spLocks noGrp="1"/>
+          </p:cNvSpPr>
+          <p:nvPr>
+            <p:ph type="dt" idx="1"/>
+          </p:nvPr>
+        </p:nvSpPr>
+        <p:spPr>
+          <a:xfrm>
+            <a:off x="5180013" y="0"/>
+            <a:ext cx="3962400" cy="342900"/>
+          </a:xfrm>
+          <a:prstGeom prst="rect">
+            <a:avLst/>
+          </a:prstGeom>
+        </p:spPr>
+        <p:txBody>
+          <a:bodyPr vert="horz" lIns="91440" tIns="45720" rIns="91440" bIns="45720" rtlCol="0"/>
+          <a:lstStyle>
+            <a:lvl1pPr algn="r">
+              <a:defRPr sz="1200"/>
+            </a:lvl1pPr>
+          </a:lstStyle>
+          <a:p>
+            <a:r>
+              <a:rPr lang="cs-CZ"/>
+              <a:t>1.7.2013</a:t>
+            </a:r>
+          </a:p>
+        </p:txBody>
+      </p:sp>
+      <p:sp>
+        <p:nvSpPr>
+          <p:cNvPr id="4" name="Slide Image Placeholder 3"/>
+          <p:cNvSpPr>
+            <a:spLocks noGrp="1" noRot="1" noChangeAspect="1"/>
+          </p:cNvSpPr>
+          <p:nvPr>
+            <p:ph type="sldImg" idx="2"/>
+          </p:nvPr>
+        </p:nvSpPr>
+        <p:spPr>
+          <a:xfrm>
+            <a:off x="2857500" y="512763"/>
+            <a:ext cx="3429000" cy="2566987"/>
+          </a:xfrm>
+          <a:prstGeom prst="rect">
+            <a:avLst/>
+          </a:prstGeom>
+          <a:noFill/>
+          <a:ln w="12700">
+            <a:solidFill>
+              <a:prstClr val="black"/>
+            </a:solidFill>
+          </a:ln>
+        </p:spPr>
+        <p:txBody>
+          <a:bodyPr vert="horz" lIns="91440" tIns="45720" rIns="91440" bIns="45720" rtlCol="0" anchor="ctr"/>
+          <a:lstStyle/>
+          <a:p>
+            <a:endParaRPr/>
+          </a:p>
+        </p:txBody>
+      </p:sp>
+      <p:sp>
+        <p:nvSpPr>
+          <p:cNvPr id="5" name="Notes Placeholder 4"/>
+          <p:cNvSpPr>
+            <a:spLocks noGrp="1"/>
+          </p:cNvSpPr>
+          <p:nvPr>
+            <p:ph type="body" sz="quarter" idx="3"/>
+          </p:nvPr>
+        </p:nvSpPr>
+        <p:spPr>
+          <a:xfrm>
+            <a:off x="914400" y="3251200"/>
+            <a:ext cx="7315200" cy="3081338"/>
+          </a:xfrm>
+          <a:prstGeom prst="rect">
+            <a:avLst/>
+          </a:prstGeom>
+        </p:spPr>
+        <p:txBody>
+          <a:bodyPr vert="horz" lIns="91440" tIns="45720" rIns="91440" bIns="45720" rtlCol="0"/>
+          <a:lstStyle/>
+          <a:p>
+            <a:r>
+              <a:t>25 seconds.</a:t>
+            </a:r>
+          </a:p>
+          <a:p>
+            <a:r>
+              <a:t>The managed training job completed and the registered model is travel-style version 1. Azure checks a fresh fit against the selected model before exporting the canonical bundle. Startup checks the bundle hash and golden predictions. K-Means test silhouette is 0.1445; model quality is not the main capstone focus.</a:t>
+            </a:r>
+          </a:p>
+          <a:p>
+            <a:r>
+              <a:t>Source: reports/finish-training-registry.json; bundle-manifest.json; ci-deploy-result.json</a:t>
+            </a:r>
+          </a:p>
+        </p:txBody>
+      </p:sp>
+      <p:sp>
+        <p:nvSpPr>
+          <p:cNvPr id="6" name="Footer Placeholder 5"/>
+          <p:cNvSpPr>
+            <a:spLocks noGrp="1"/>
+          </p:cNvSpPr>
+          <p:nvPr>
+            <p:ph type="ftr" sz="quarter" idx="4"/>
+          </p:nvPr>
+        </p:nvSpPr>
+        <p:spPr>
+          <a:xfrm>
+            <a:off x="0" y="6502400"/>
+            <a:ext cx="3962400" cy="341313"/>
+          </a:xfrm>
+          <a:prstGeom prst="rect">
+            <a:avLst/>
+          </a:prstGeom>
+        </p:spPr>
+        <p:txBody>
+          <a:bodyPr vert="horz" lIns="91440" tIns="45720" rIns="91440" bIns="45720" rtlCol="0" anchor="b"/>
+          <a:lstStyle>
+            <a:lvl1pPr algn="l">
+              <a:defRPr sz="1200"/>
+            </a:lvl1pPr>
+          </a:lstStyle>
+          <a:p>
+            <a:endParaRPr/>
+          </a:p>
+        </p:txBody>
+      </p:sp>
+      <p:sp>
+        <p:nvSpPr>
+          <p:cNvPr id="7" name="Slide Number Placeholder 6"/>
+          <p:cNvSpPr>
+            <a:spLocks noGrp="1"/>
+          </p:cNvSpPr>
+          <p:nvPr>
+            <p:ph type="sldNum" sz="quarter" idx="5"/>
+          </p:nvPr>
+        </p:nvSpPr>
+        <p:spPr>
+          <a:xfrm>
+            <a:off x="5180013" y="6502400"/>
+            <a:ext cx="3962400" cy="341313"/>
+          </a:xfrm>
+          <a:prstGeom prst="rect">
+            <a:avLst/>
+          </a:prstGeom>
+        </p:spPr>
+        <p:txBody>
+          <a:bodyPr vert="horz" lIns="91440" tIns="45720" rIns="91440" bIns="45720" rtlCol="0" anchor="b"/>
+          <a:lstStyle>
+            <a:lvl1pPr algn="r">
+              <a:defRPr sz="1200"/>
+            </a:lvl1pPr>
+          </a:lstStyle>
+          <a:p>
+            <a:r>
+              <a:rPr lang="cs-CZ"/>
+              <a:t>‹#›</a:t>
+            </a:r>
+          </a:p>
+        </p:txBody>
+      </p:sp>
+    </p:spTree>
+  </p:cSld>
+  <p:clrMapOvr>
+    <a:masterClrMapping/>
+  </p:clrMapOvr>
+</p:notes>
+</file>
+
+<file path=ppt/notesSlides/notesSlide6.xml><?xml version="1.0" encoding="utf-8"?>
+<p:notes xmlns:a="http://schemas.openxmlformats.org/drawingml/2006/main" xmlns:r="http://schemas.openxmlformats.org/officeDocument/2006/relationships" xmlns:p="http://schemas.openxmlformats.org/presentationml/2006/main">
+  <p:cSld>
+    <p:spTree>
+      <p:nvGrpSpPr>
+        <p:cNvPr id="1" name=""/>
+        <p:cNvGrpSpPr/>
+        <p:nvPr/>
+      </p:nvGrpSpPr>
+      <p:grpSpPr>
+        <a:xfrm>
+          <a:off x="0" y="0"/>
+          <a:ext cx="0" cy="0"/>
+          <a:chOff x="0" y="0"/>
+          <a:chExt cx="0" cy="0"/>
+        </a:xfrm>
+      </p:grpSpPr>
+      <p:sp>
+        <p:nvSpPr>
+          <p:cNvPr id="2" name="Header Placeholder 1"/>
+          <p:cNvSpPr>
+            <a:spLocks noGrp="1"/>
+          </p:cNvSpPr>
+          <p:nvPr>
+            <p:ph type="hdr" sz="quarter"/>
+          </p:nvPr>
+        </p:nvSpPr>
+        <p:spPr>
+          <a:xfrm>
+            <a:off x="0" y="0"/>
+            <a:ext cx="3962400" cy="342900"/>
+          </a:xfrm>
+          <a:prstGeom prst="rect">
+            <a:avLst/>
+          </a:prstGeom>
+        </p:spPr>
+        <p:txBody>
+          <a:bodyPr vert="horz" lIns="91440" tIns="45720" rIns="91440" bIns="45720" rtlCol="0"/>
+          <a:lstStyle>
+            <a:lvl1pPr algn="l">
+              <a:defRPr sz="1200"/>
+            </a:lvl1pPr>
+          </a:lstStyle>
+          <a:p>
+            <a:endParaRPr/>
+          </a:p>
+        </p:txBody>
+      </p:sp>
+      <p:sp>
+        <p:nvSpPr>
+          <p:cNvPr id="3" name="Date Placeholder 2"/>
+          <p:cNvSpPr>
+            <a:spLocks noGrp="1"/>
+          </p:cNvSpPr>
+          <p:nvPr>
+            <p:ph type="dt" idx="1"/>
+          </p:nvPr>
+        </p:nvSpPr>
+        <p:spPr>
+          <a:xfrm>
+            <a:off x="5180013" y="0"/>
+            <a:ext cx="3962400" cy="342900"/>
+          </a:xfrm>
+          <a:prstGeom prst="rect">
+            <a:avLst/>
+          </a:prstGeom>
+        </p:spPr>
+        <p:txBody>
+          <a:bodyPr vert="horz" lIns="91440" tIns="45720" rIns="91440" bIns="45720" rtlCol="0"/>
+          <a:lstStyle>
+            <a:lvl1pPr algn="r">
+              <a:defRPr sz="1200"/>
+            </a:lvl1pPr>
+          </a:lstStyle>
+          <a:p>
+            <a:r>
+              <a:rPr lang="cs-CZ"/>
+              <a:t>1.7.2013</a:t>
+            </a:r>
+          </a:p>
+        </p:txBody>
+      </p:sp>
+      <p:sp>
+        <p:nvSpPr>
+          <p:cNvPr id="4" name="Slide Image Placeholder 3"/>
+          <p:cNvSpPr>
+            <a:spLocks noGrp="1" noRot="1" noChangeAspect="1"/>
+          </p:cNvSpPr>
+          <p:nvPr>
+            <p:ph type="sldImg" idx="2"/>
+          </p:nvPr>
+        </p:nvSpPr>
+        <p:spPr>
+          <a:xfrm>
+            <a:off x="2857500" y="512763"/>
+            <a:ext cx="3429000" cy="2566987"/>
+          </a:xfrm>
+          <a:prstGeom prst="rect">
+            <a:avLst/>
+          </a:prstGeom>
+          <a:noFill/>
+          <a:ln w="12700">
+            <a:solidFill>
+              <a:prstClr val="black"/>
+            </a:solidFill>
+          </a:ln>
+        </p:spPr>
+        <p:txBody>
+          <a:bodyPr vert="horz" lIns="91440" tIns="45720" rIns="91440" bIns="45720" rtlCol="0" anchor="ctr"/>
+          <a:lstStyle/>
+          <a:p>
+            <a:endParaRPr/>
+          </a:p>
+        </p:txBody>
+      </p:sp>
+      <p:sp>
+        <p:nvSpPr>
+          <p:cNvPr id="5" name="Notes Placeholder 4"/>
+          <p:cNvSpPr>
+            <a:spLocks noGrp="1"/>
+          </p:cNvSpPr>
+          <p:nvPr>
+            <p:ph type="body" sz="quarter" idx="3"/>
+          </p:nvPr>
+        </p:nvSpPr>
+        <p:spPr>
+          <a:xfrm>
+            <a:off x="914400" y="3251200"/>
+            <a:ext cx="7315200" cy="3081338"/>
+          </a:xfrm>
+          <a:prstGeom prst="rect">
+            <a:avLst/>
+          </a:prstGeom>
+        </p:spPr>
+        <p:txBody>
+          <a:bodyPr vert="horz" lIns="91440" tIns="45720" rIns="91440" bIns="45720" rtlCol="0"/>
+          <a:lstStyle/>
+          <a:p>
+            <a:r>
+              <a:t>90 seconds.</a:t>
+            </a:r>
+          </a:p>
+          <a:p>
+            <a:r>
+              <a:t>Live demo: open Notebook 22 and run the small smoke check in PRESENTATION.md. Show one valid prediction, an incomplete profile returning 422, and a batch of 100. A valid uncertain profile returns 200 with a null segment. The example shown here is a saved real HTTP response, not a live screenshot.</a:t>
+            </a:r>
+          </a:p>
+          <a:p>
+            <a:r>
+              <a:t>Source: output/presentation/evidence/api-demo.json; service/schemas.py</a:t>
+            </a:r>
+          </a:p>
+        </p:txBody>
+      </p:sp>
+      <p:sp>
+        <p:nvSpPr>
+          <p:cNvPr id="6" name="Footer Placeholder 5"/>
+          <p:cNvSpPr>
+            <a:spLocks noGrp="1"/>
+          </p:cNvSpPr>
+          <p:nvPr>
+            <p:ph type="ftr" sz="quarter" idx="4"/>
+          </p:nvPr>
+        </p:nvSpPr>
+        <p:spPr>
+          <a:xfrm>
+            <a:off x="0" y="6502400"/>
+            <a:ext cx="3962400" cy="341313"/>
+          </a:xfrm>
+          <a:prstGeom prst="rect">
+            <a:avLst/>
+          </a:prstGeom>
+        </p:spPr>
+        <p:txBody>
+          <a:bodyPr vert="horz" lIns="91440" tIns="45720" rIns="91440" bIns="45720" rtlCol="0" anchor="b"/>
+          <a:lstStyle>
+            <a:lvl1pPr algn="l">
+              <a:defRPr sz="1200"/>
+            </a:lvl1pPr>
+          </a:lstStyle>
+          <a:p>
+            <a:endParaRPr/>
+          </a:p>
+        </p:txBody>
+      </p:sp>
+      <p:sp>
+        <p:nvSpPr>
+          <p:cNvPr id="7" name="Slide Number Placeholder 6"/>
+          <p:cNvSpPr>
+            <a:spLocks noGrp="1"/>
+          </p:cNvSpPr>
+          <p:nvPr>
+            <p:ph type="sldNum" sz="quarter" idx="5"/>
+          </p:nvPr>
+        </p:nvSpPr>
+        <p:spPr>
+          <a:xfrm>
+            <a:off x="5180013" y="6502400"/>
+            <a:ext cx="3962400" cy="341313"/>
+          </a:xfrm>
+          <a:prstGeom prst="rect">
+            <a:avLst/>
+          </a:prstGeom>
+        </p:spPr>
+        <p:txBody>
+          <a:bodyPr vert="horz" lIns="91440" tIns="45720" rIns="91440" bIns="45720" rtlCol="0" anchor="b"/>
+          <a:lstStyle>
+            <a:lvl1pPr algn="r">
+              <a:defRPr sz="1200"/>
+            </a:lvl1pPr>
+          </a:lstStyle>
+          <a:p>
+            <a:r>
+              <a:rPr lang="cs-CZ"/>
+              <a:t>‹#›</a:t>
+            </a:r>
+          </a:p>
+        </p:txBody>
+      </p:sp>
+    </p:spTree>
+  </p:cSld>
+  <p:clrMapOvr>
+    <a:masterClrMapping/>
+  </p:clrMapOvr>
+</p:notes>
+</file>
+
+<file path=ppt/notesSlides/notesSlide7.xml><?xml version="1.0" encoding="utf-8"?>
+<p:notes xmlns:a="http://schemas.openxmlformats.org/drawingml/2006/main" xmlns:r="http://schemas.openxmlformats.org/officeDocument/2006/relationships" xmlns:p="http://schemas.openxmlformats.org/presentationml/2006/main">
+  <p:cSld>
+    <p:spTree>
+      <p:nvGrpSpPr>
+        <p:cNvPr id="1" name=""/>
+        <p:cNvGrpSpPr/>
+        <p:nvPr/>
+      </p:nvGrpSpPr>
+      <p:grpSpPr>
+        <a:xfrm>
+          <a:off x="0" y="0"/>
+          <a:ext cx="0" cy="0"/>
+          <a:chOff x="0" y="0"/>
+          <a:chExt cx="0" cy="0"/>
+        </a:xfrm>
+      </p:grpSpPr>
+      <p:sp>
+        <p:nvSpPr>
+          <p:cNvPr id="2" name="Header Placeholder 1"/>
+          <p:cNvSpPr>
+            <a:spLocks noGrp="1"/>
+          </p:cNvSpPr>
+          <p:nvPr>
+            <p:ph type="hdr" sz="quarter"/>
+          </p:nvPr>
+        </p:nvSpPr>
+        <p:spPr>
+          <a:xfrm>
+            <a:off x="0" y="0"/>
+            <a:ext cx="3962400" cy="342900"/>
+          </a:xfrm>
+          <a:prstGeom prst="rect">
+            <a:avLst/>
+          </a:prstGeom>
+        </p:spPr>
+        <p:txBody>
+          <a:bodyPr vert="horz" lIns="91440" tIns="45720" rIns="91440" bIns="45720" rtlCol="0"/>
+          <a:lstStyle>
+            <a:lvl1pPr algn="l">
+              <a:defRPr sz="1200"/>
+            </a:lvl1pPr>
+          </a:lstStyle>
+          <a:p>
+            <a:endParaRPr/>
+          </a:p>
+        </p:txBody>
+      </p:sp>
+      <p:sp>
+        <p:nvSpPr>
+          <p:cNvPr id="3" name="Date Placeholder 2"/>
+          <p:cNvSpPr>
+            <a:spLocks noGrp="1"/>
+          </p:cNvSpPr>
+          <p:nvPr>
+            <p:ph type="dt" idx="1"/>
+          </p:nvPr>
+        </p:nvSpPr>
+        <p:spPr>
+          <a:xfrm>
+            <a:off x="5180013" y="0"/>
+            <a:ext cx="3962400" cy="342900"/>
+          </a:xfrm>
+          <a:prstGeom prst="rect">
+            <a:avLst/>
+          </a:prstGeom>
+        </p:spPr>
+        <p:txBody>
+          <a:bodyPr vert="horz" lIns="91440" tIns="45720" rIns="91440" bIns="45720" rtlCol="0"/>
+          <a:lstStyle>
+            <a:lvl1pPr algn="r">
+              <a:defRPr sz="1200"/>
+            </a:lvl1pPr>
+          </a:lstStyle>
+          <a:p>
+            <a:r>
+              <a:rPr lang="cs-CZ"/>
+              <a:t>1.7.2013</a:t>
+            </a:r>
+          </a:p>
+        </p:txBody>
+      </p:sp>
+      <p:sp>
+        <p:nvSpPr>
+          <p:cNvPr id="4" name="Slide Image Placeholder 3"/>
+          <p:cNvSpPr>
+            <a:spLocks noGrp="1" noRot="1" noChangeAspect="1"/>
+          </p:cNvSpPr>
+          <p:nvPr>
+            <p:ph type="sldImg" idx="2"/>
+          </p:nvPr>
+        </p:nvSpPr>
+        <p:spPr>
+          <a:xfrm>
+            <a:off x="2857500" y="512763"/>
+            <a:ext cx="3429000" cy="2566987"/>
+          </a:xfrm>
+          <a:prstGeom prst="rect">
+            <a:avLst/>
+          </a:prstGeom>
+          <a:noFill/>
+          <a:ln w="12700">
+            <a:solidFill>
+              <a:prstClr val="black"/>
+            </a:solidFill>
+          </a:ln>
+        </p:spPr>
+        <p:txBody>
+          <a:bodyPr vert="horz" lIns="91440" tIns="45720" rIns="91440" bIns="45720" rtlCol="0" anchor="ctr"/>
+          <a:lstStyle/>
+          <a:p>
+            <a:endParaRPr/>
+          </a:p>
+        </p:txBody>
+      </p:sp>
+      <p:sp>
+        <p:nvSpPr>
+          <p:cNvPr id="5" name="Notes Placeholder 4"/>
+          <p:cNvSpPr>
+            <a:spLocks noGrp="1"/>
+          </p:cNvSpPr>
+          <p:nvPr>
+            <p:ph type="body" sz="quarter" idx="3"/>
+          </p:nvPr>
+        </p:nvSpPr>
+        <p:spPr>
+          <a:xfrm>
+            <a:off x="914400" y="3251200"/>
+            <a:ext cx="7315200" cy="3081338"/>
+          </a:xfrm>
+          <a:prstGeom prst="rect">
+            <a:avLst/>
+          </a:prstGeom>
+        </p:spPr>
+        <p:txBody>
+          <a:bodyPr vert="horz" lIns="91440" tIns="45720" rIns="91440" bIns="45720" rtlCol="0"/>
+          <a:lstStyle/>
+          <a:p>
+            <a:r>
+              <a:t>35 seconds.</a:t>
+            </a:r>
+          </a:p>
+          <a:p>
+            <a:r>
+              <a:t>Both saved runs use commit 9fea51a. In the normal run, tests and deployment passed. In the deliberate failure run, tests failed and deployment was skipped. Click the run links to show the actual jobs. These runs do not verify later local code changes.</a:t>
+            </a:r>
+          </a:p>
+          <a:p>
+            <a:r>
+              <a:t>Source: reports/ci-runs.json; reports/ci-deploy-result.json; .github/workflows/ci.yml</a:t>
+            </a:r>
+          </a:p>
+        </p:txBody>
+      </p:sp>
+      <p:sp>
+        <p:nvSpPr>
+          <p:cNvPr id="6" name="Footer Placeholder 5"/>
+          <p:cNvSpPr>
+            <a:spLocks noGrp="1"/>
+          </p:cNvSpPr>
+          <p:nvPr>
+            <p:ph type="ftr" sz="quarter" idx="4"/>
+          </p:nvPr>
+        </p:nvSpPr>
+        <p:spPr>
+          <a:xfrm>
+            <a:off x="0" y="6502400"/>
+            <a:ext cx="3962400" cy="341313"/>
+          </a:xfrm>
+          <a:prstGeom prst="rect">
+            <a:avLst/>
+          </a:prstGeom>
+        </p:spPr>
+        <p:txBody>
+          <a:bodyPr vert="horz" lIns="91440" tIns="45720" rIns="91440" bIns="45720" rtlCol="0" anchor="b"/>
+          <a:lstStyle>
+            <a:lvl1pPr algn="l">
+              <a:defRPr sz="1200"/>
+            </a:lvl1pPr>
+          </a:lstStyle>
+          <a:p>
+            <a:endParaRPr/>
+          </a:p>
+        </p:txBody>
+      </p:sp>
+      <p:sp>
+        <p:nvSpPr>
+          <p:cNvPr id="7" name="Slide Number Placeholder 6"/>
+          <p:cNvSpPr>
+            <a:spLocks noGrp="1"/>
+          </p:cNvSpPr>
+          <p:nvPr>
+            <p:ph type="sldNum" sz="quarter" idx="5"/>
+          </p:nvPr>
+        </p:nvSpPr>
+        <p:spPr>
+          <a:xfrm>
+            <a:off x="5180013" y="6502400"/>
+            <a:ext cx="3962400" cy="341313"/>
+          </a:xfrm>
+          <a:prstGeom prst="rect">
+            <a:avLst/>
+          </a:prstGeom>
+        </p:spPr>
+        <p:txBody>
+          <a:bodyPr vert="horz" lIns="91440" tIns="45720" rIns="91440" bIns="45720" rtlCol="0" anchor="b"/>
+          <a:lstStyle>
+            <a:lvl1pPr algn="r">
+              <a:defRPr sz="1200"/>
+            </a:lvl1pPr>
+          </a:lstStyle>
+          <a:p>
+            <a:r>
+              <a:rPr lang="cs-CZ"/>
+              <a:t>‹#›</a:t>
+            </a:r>
+          </a:p>
+        </p:txBody>
+      </p:sp>
+    </p:spTree>
+  </p:cSld>
+  <p:clrMapOvr>
+    <a:masterClrMapping/>
+  </p:clrMapOvr>
+</p:notes>
+</file>
+
+<file path=ppt/notesSlides/notesSlide8.xml><?xml version="1.0" encoding="utf-8"?>
+<p:notes xmlns:a="http://schemas.openxmlformats.org/drawingml/2006/main" xmlns:r="http://schemas.openxmlformats.org/officeDocument/2006/relationships" xmlns:p="http://schemas.openxmlformats.org/presentationml/2006/main">
+  <p:cSld>
+    <p:spTree>
+      <p:nvGrpSpPr>
+        <p:cNvPr id="1" name=""/>
+        <p:cNvGrpSpPr/>
+        <p:nvPr/>
+      </p:nvGrpSpPr>
+      <p:grpSpPr>
+        <a:xfrm>
+          <a:off x="0" y="0"/>
+          <a:ext cx="0" cy="0"/>
+          <a:chOff x="0" y="0"/>
+          <a:chExt cx="0" cy="0"/>
+        </a:xfrm>
+      </p:grpSpPr>
+      <p:sp>
+        <p:nvSpPr>
+          <p:cNvPr id="2" name="Header Placeholder 1"/>
+          <p:cNvSpPr>
+            <a:spLocks noGrp="1"/>
+          </p:cNvSpPr>
+          <p:nvPr>
+            <p:ph type="hdr" sz="quarter"/>
+          </p:nvPr>
+        </p:nvSpPr>
+        <p:spPr>
+          <a:xfrm>
+            <a:off x="0" y="0"/>
+            <a:ext cx="3962400" cy="342900"/>
+          </a:xfrm>
+          <a:prstGeom prst="rect">
+            <a:avLst/>
+          </a:prstGeom>
+        </p:spPr>
+        <p:txBody>
+          <a:bodyPr vert="horz" lIns="91440" tIns="45720" rIns="91440" bIns="45720" rtlCol="0"/>
+          <a:lstStyle>
+            <a:lvl1pPr algn="l">
+              <a:defRPr sz="1200"/>
+            </a:lvl1pPr>
+          </a:lstStyle>
+          <a:p>
+            <a:endParaRPr/>
+          </a:p>
+        </p:txBody>
+      </p:sp>
+      <p:sp>
+        <p:nvSpPr>
+          <p:cNvPr id="3" name="Date Placeholder 2"/>
+          <p:cNvSpPr>
+            <a:spLocks noGrp="1"/>
+          </p:cNvSpPr>
+          <p:nvPr>
+            <p:ph type="dt" idx="1"/>
+          </p:nvPr>
+        </p:nvSpPr>
+        <p:spPr>
+          <a:xfrm>
+            <a:off x="5180013" y="0"/>
+            <a:ext cx="3962400" cy="342900"/>
+          </a:xfrm>
+          <a:prstGeom prst="rect">
+            <a:avLst/>
+          </a:prstGeom>
+        </p:spPr>
+        <p:txBody>
+          <a:bodyPr vert="horz" lIns="91440" tIns="45720" rIns="91440" bIns="45720" rtlCol="0"/>
+          <a:lstStyle>
+            <a:lvl1pPr algn="r">
+              <a:defRPr sz="1200"/>
+            </a:lvl1pPr>
+          </a:lstStyle>
+          <a:p>
+            <a:r>
+              <a:rPr lang="cs-CZ"/>
+              <a:t>1.7.2013</a:t>
+            </a:r>
+          </a:p>
+        </p:txBody>
+      </p:sp>
+      <p:sp>
+        <p:nvSpPr>
+          <p:cNvPr id="4" name="Slide Image Placeholder 3"/>
+          <p:cNvSpPr>
+            <a:spLocks noGrp="1" noRot="1" noChangeAspect="1"/>
+          </p:cNvSpPr>
+          <p:nvPr>
+            <p:ph type="sldImg" idx="2"/>
+          </p:nvPr>
+        </p:nvSpPr>
+        <p:spPr>
+          <a:xfrm>
+            <a:off x="2857500" y="512763"/>
+            <a:ext cx="3429000" cy="2566987"/>
+          </a:xfrm>
+          <a:prstGeom prst="rect">
+            <a:avLst/>
+          </a:prstGeom>
+          <a:noFill/>
+          <a:ln w="12700">
+            <a:solidFill>
+              <a:prstClr val="black"/>
+            </a:solidFill>
+          </a:ln>
+        </p:spPr>
+        <p:txBody>
+          <a:bodyPr vert="horz" lIns="91440" tIns="45720" rIns="91440" bIns="45720" rtlCol="0" anchor="ctr"/>
+          <a:lstStyle/>
+          <a:p>
+            <a:endParaRPr/>
+          </a:p>
+        </p:txBody>
+      </p:sp>
+      <p:sp>
+        <p:nvSpPr>
+          <p:cNvPr id="5" name="Notes Placeholder 4"/>
+          <p:cNvSpPr>
+            <a:spLocks noGrp="1"/>
+          </p:cNvSpPr>
+          <p:nvPr>
+            <p:ph type="body" sz="quarter" idx="3"/>
+          </p:nvPr>
+        </p:nvSpPr>
+        <p:spPr>
+          <a:xfrm>
+            <a:off x="914400" y="3251200"/>
+            <a:ext cx="7315200" cy="3081338"/>
+          </a:xfrm>
+          <a:prstGeom prst="rect">
+            <a:avLst/>
+          </a:prstGeom>
+        </p:spPr>
+        <p:txBody>
+          <a:bodyPr vert="horz" lIns="91440" tIns="45720" rIns="91440" bIns="45720" rtlCol="0"/>
+          <a:lstStyle/>
+          <a:p>
+            <a:r>
+              <a:t>25 seconds.</a:t>
+            </a:r>
+          </a:p>
+          <a:p>
+            <a:r>
+              <a:t>Warm tests used 200 requests, concurrency 10, batch size 1, and excluded warm-up requests. All had zero errors. The pooled-client test used parallel warm-up and connection reuse, so it is a separate measurement, not proof of a server speedup. Azure timing includes the WSL network path. Cold start is one readiness request after verified zero replicas, not a percentile.</a:t>
+            </a:r>
+          </a:p>
+          <a:p>
+            <a:r>
+              <a:t>Source: reports/serving-recheck/local-load.json; azure-load.json; pooled-load.json; finish-cold.json</a:t>
+            </a:r>
+          </a:p>
+        </p:txBody>
+      </p:sp>
+      <p:sp>
+        <p:nvSpPr>
+          <p:cNvPr id="6" name="Footer Placeholder 5"/>
+          <p:cNvSpPr>
+            <a:spLocks noGrp="1"/>
+          </p:cNvSpPr>
+          <p:nvPr>
+            <p:ph type="ftr" sz="quarter" idx="4"/>
+          </p:nvPr>
+        </p:nvSpPr>
+        <p:spPr>
+          <a:xfrm>
+            <a:off x="0" y="6502400"/>
+            <a:ext cx="3962400" cy="341313"/>
+          </a:xfrm>
+          <a:prstGeom prst="rect">
+            <a:avLst/>
+          </a:prstGeom>
+        </p:spPr>
+        <p:txBody>
+          <a:bodyPr vert="horz" lIns="91440" tIns="45720" rIns="91440" bIns="45720" rtlCol="0" anchor="b"/>
+          <a:lstStyle>
+            <a:lvl1pPr algn="l">
+              <a:defRPr sz="1200"/>
+            </a:lvl1pPr>
+          </a:lstStyle>
+          <a:p>
+            <a:endParaRPr/>
+          </a:p>
+        </p:txBody>
+      </p:sp>
+      <p:sp>
+        <p:nvSpPr>
+          <p:cNvPr id="7" name="Slide Number Placeholder 6"/>
+          <p:cNvSpPr>
+            <a:spLocks noGrp="1"/>
+          </p:cNvSpPr>
+          <p:nvPr>
+            <p:ph type="sldNum" sz="quarter" idx="5"/>
+          </p:nvPr>
+        </p:nvSpPr>
+        <p:spPr>
+          <a:xfrm>
+            <a:off x="5180013" y="6502400"/>
+            <a:ext cx="3962400" cy="341313"/>
+          </a:xfrm>
+          <a:prstGeom prst="rect">
+            <a:avLst/>
+          </a:prstGeom>
+        </p:spPr>
+        <p:txBody>
+          <a:bodyPr vert="horz" lIns="91440" tIns="45720" rIns="91440" bIns="45720" rtlCol="0" anchor="b"/>
+          <a:lstStyle>
+            <a:lvl1pPr algn="r">
+              <a:defRPr sz="1200"/>
+            </a:lvl1pPr>
+          </a:lstStyle>
+          <a:p>
+            <a:r>
+              <a:rPr lang="cs-CZ"/>
+              <a:t>‹#›</a:t>
+            </a:r>
+          </a:p>
+        </p:txBody>
+      </p:sp>
+    </p:spTree>
+  </p:cSld>
+  <p:clrMapOvr>
+    <a:masterClrMapping/>
+  </p:clrMapOvr>
+</p:notes>
+</file>
+
+<file path=ppt/notesSlides/notesSlide9.xml><?xml version="1.0" encoding="utf-8"?>
+<p:notes xmlns:a="http://schemas.openxmlformats.org/drawingml/2006/main" xmlns:r="http://schemas.openxmlformats.org/officeDocument/2006/relationships" xmlns:p="http://schemas.openxmlformats.org/presentationml/2006/main">
+  <p:cSld>
+    <p:spTree>
+      <p:nvGrpSpPr>
+        <p:cNvPr id="1" name=""/>
+        <p:cNvGrpSpPr/>
+        <p:nvPr/>
+      </p:nvGrpSpPr>
+      <p:grpSpPr>
+        <a:xfrm>
+          <a:off x="0" y="0"/>
+          <a:ext cx="0" cy="0"/>
+          <a:chOff x="0" y="0"/>
+          <a:chExt cx="0" cy="0"/>
+        </a:xfrm>
+      </p:grpSpPr>
+      <p:sp>
+        <p:nvSpPr>
+          <p:cNvPr id="2" name="Header Placeholder 1"/>
+          <p:cNvSpPr>
+            <a:spLocks noGrp="1"/>
+          </p:cNvSpPr>
+          <p:nvPr>
+            <p:ph type="hdr" sz="quarter"/>
+          </p:nvPr>
+        </p:nvSpPr>
+        <p:spPr>
+          <a:xfrm>
+            <a:off x="0" y="0"/>
+            <a:ext cx="3962400" cy="342900"/>
+          </a:xfrm>
+          <a:prstGeom prst="rect">
+            <a:avLst/>
+          </a:prstGeom>
+        </p:spPr>
+        <p:txBody>
+          <a:bodyPr vert="horz" lIns="91440" tIns="45720" rIns="91440" bIns="45720" rtlCol="0"/>
+          <a:lstStyle>
+            <a:lvl1pPr algn="l">
+              <a:defRPr sz="1200"/>
+            </a:lvl1pPr>
+          </a:lstStyle>
+          <a:p>
+            <a:endParaRPr/>
+          </a:p>
+        </p:txBody>
+      </p:sp>
+      <p:sp>
+        <p:nvSpPr>
+          <p:cNvPr id="3" name="Date Placeholder 2"/>
+          <p:cNvSpPr>
+            <a:spLocks noGrp="1"/>
+          </p:cNvSpPr>
+          <p:nvPr>
+            <p:ph type="dt" idx="1"/>
+          </p:nvPr>
+        </p:nvSpPr>
+        <p:spPr>
+          <a:xfrm>
+            <a:off x="5180013" y="0"/>
+            <a:ext cx="3962400" cy="342900"/>
+          </a:xfrm>
+          <a:prstGeom prst="rect">
+            <a:avLst/>
+          </a:prstGeom>
+        </p:spPr>
+        <p:txBody>
+          <a:bodyPr vert="horz" lIns="91440" tIns="45720" rIns="91440" bIns="45720" rtlCol="0"/>
+          <a:lstStyle>
+            <a:lvl1pPr algn="r">
+              <a:defRPr sz="1200"/>
+            </a:lvl1pPr>
+          </a:lstStyle>
+          <a:p>
+            <a:r>
+              <a:rPr lang="cs-CZ"/>
+              <a:t>1.7.2013</a:t>
+            </a:r>
+          </a:p>
+        </p:txBody>
+      </p:sp>
+      <p:sp>
+        <p:nvSpPr>
+          <p:cNvPr id="4" name="Slide Image Placeholder 3"/>
+          <p:cNvSpPr>
+            <a:spLocks noGrp="1" noRot="1" noChangeAspect="1"/>
+          </p:cNvSpPr>
+          <p:nvPr>
+            <p:ph type="sldImg" idx="2"/>
+          </p:nvPr>
+        </p:nvSpPr>
+        <p:spPr>
+          <a:xfrm>
+            <a:off x="2857500" y="512763"/>
+            <a:ext cx="3429000" cy="2566987"/>
+          </a:xfrm>
+          <a:prstGeom prst="rect">
+            <a:avLst/>
+          </a:prstGeom>
+          <a:noFill/>
+          <a:ln w="12700">
+            <a:solidFill>
+              <a:prstClr val="black"/>
+            </a:solidFill>
+          </a:ln>
+        </p:spPr>
+        <p:txBody>
+          <a:bodyPr vert="horz" lIns="91440" tIns="45720" rIns="91440" bIns="45720" rtlCol="0" anchor="ctr"/>
+          <a:lstStyle/>
+          <a:p>
+            <a:endParaRPr/>
+          </a:p>
+        </p:txBody>
+      </p:sp>
+      <p:sp>
+        <p:nvSpPr>
+          <p:cNvPr id="5" name="Notes Placeholder 4"/>
+          <p:cNvSpPr>
+            <a:spLocks noGrp="1"/>
+          </p:cNvSpPr>
+          <p:nvPr>
+            <p:ph type="body" sz="quarter" idx="3"/>
+          </p:nvPr>
+        </p:nvSpPr>
+        <p:spPr>
+          <a:xfrm>
+            <a:off x="914400" y="3251200"/>
+            <a:ext cx="7315200" cy="3081338"/>
+          </a:xfrm>
+          <a:prstGeom prst="rect">
+            <a:avLst/>
+          </a:prstGeom>
+        </p:spPr>
+        <p:txBody>
+          <a:bodyPr vert="horz" lIns="91440" tIns="45720" rIns="91440" bIns="45720" rtlCol="0"/>
+          <a:lstStyle/>
+          <a:p>
+            <a:r>
+              <a:t>25 seconds.</a:t>
+            </a:r>
+          </a:p>
+          <a:p>
+            <a:r>
+              <a:t>This chart uses actual saved Log Analytics bins, not an Azure Portal screenshot. The dashboard is MLOP Travel Style. Logs contain derived counts, status, latency, and model version rather than full profiles. Logged p95 is application timing and must not be compared directly with client HTTPS p95. An actual semantic alert fired and later resolved; email notification is not configured.</a:t>
+            </a:r>
+          </a:p>
+          <a:p>
+            <a:r>
+              <a:t>Source: reports/azure-telemetry.json; finish-monitor.json; finish-alert.json</a:t>
+            </a:r>
+          </a:p>
+        </p:txBody>
+      </p:sp>
+      <p:sp>
+        <p:nvSpPr>
+          <p:cNvPr id="6" name="Footer Placeholder 5"/>
+          <p:cNvSpPr>
+            <a:spLocks noGrp="1"/>
+          </p:cNvSpPr>
+          <p:nvPr>
+            <p:ph type="ftr" sz="quarter" idx="4"/>
+          </p:nvPr>
+        </p:nvSpPr>
+        <p:spPr>
+          <a:xfrm>
+            <a:off x="0" y="6502400"/>
+            <a:ext cx="3962400" cy="341313"/>
+          </a:xfrm>
+          <a:prstGeom prst="rect">
+            <a:avLst/>
+          </a:prstGeom>
+        </p:spPr>
+        <p:txBody>
+          <a:bodyPr vert="horz" lIns="91440" tIns="45720" rIns="91440" bIns="45720" rtlCol="0" anchor="b"/>
+          <a:lstStyle>
+            <a:lvl1pPr algn="l">
+              <a:defRPr sz="1200"/>
+            </a:lvl1pPr>
+          </a:lstStyle>
+          <a:p>
+            <a:endParaRPr/>
+          </a:p>
+        </p:txBody>
+      </p:sp>
+      <p:sp>
+        <p:nvSpPr>
+          <p:cNvPr id="7" name="Slide Number Placeholder 6"/>
+          <p:cNvSpPr>
+            <a:spLocks noGrp="1"/>
+          </p:cNvSpPr>
+          <p:nvPr>
+            <p:ph type="sldNum" sz="quarter" idx="5"/>
+          </p:nvPr>
+        </p:nvSpPr>
+        <p:spPr>
+          <a:xfrm>
+            <a:off x="5180013" y="6502400"/>
+            <a:ext cx="3962400" cy="341313"/>
+          </a:xfrm>
+          <a:prstGeom prst="rect">
+            <a:avLst/>
+          </a:prstGeom>
+        </p:spPr>
+        <p:txBody>
+          <a:bodyPr vert="horz" lIns="91440" tIns="45720" rIns="91440" bIns="45720" rtlCol="0" anchor="b"/>
+          <a:lstStyle>
+            <a:lvl1pPr algn="r">
+              <a:defRPr sz="1200"/>
+            </a:lvl1pPr>
+          </a:lstStyle>
+          <a:p>
+            <a:r>
+              <a:rPr lang="cs-CZ"/>
               <a:t>‹#›</a:t>
             </a:r>
           </a:p>
@@ -3688,10 +3791,9 @@
           <a:lstStyle/>
           <a:p>
             <a:r>
-              <a:rPr lang="en-US" smtClean="0"/>
+              <a:rPr lang="en-US"/>
               <a:t>Click to edit Master title style</a:t>
             </a:r>
-            <a:endParaRPr lang="en-US"/>
           </a:p>
         </p:txBody>
       </p:sp>
@@ -3807,10 +3909,9 @@
           </a:lstStyle>
           <a:p>
             <a:r>
-              <a:rPr lang="en-US" smtClean="0"/>
+              <a:rPr lang="en-US"/>
               <a:t>Click to edit Master subtitle style</a:t>
             </a:r>
-            <a:endParaRPr lang="en-US"/>
           </a:p>
         </p:txBody>
       </p:sp>
@@ -3832,7 +3933,7 @@
             <a:fld id="{1D8BD707-D9CF-40AE-B4C6-C98DA3205C09}" type="datetimeFigureOut">
               <a:rPr lang="en-US" smtClean="0"/>
               <a:pPr/>
-              <a:t>8/1/2011</a:t>
+              <a:t>10/12/2026</a:t>
             </a:fld>
             <a:endParaRPr lang="en-US"/>
           </a:p>
@@ -3922,10 +4023,9 @@
           <a:lstStyle/>
           <a:p>
             <a:r>
-              <a:rPr lang="en-US" smtClean="0"/>
+              <a:rPr lang="en-US"/>
               <a:t>Click to edit Master title style</a:t>
             </a:r>
-            <a:endParaRPr lang="en-US"/>
           </a:p>
         </p:txBody>
       </p:sp>
@@ -3946,38 +4046,37 @@
           <a:p>
             <a:pPr lvl="0"/>
             <a:r>
-              <a:rPr lang="en-US" smtClean="0"/>
+              <a:rPr lang="en-US"/>
               <a:t>Click to edit Master text styles</a:t>
             </a:r>
           </a:p>
           <a:p>
             <a:pPr lvl="1"/>
             <a:r>
-              <a:rPr lang="en-US" smtClean="0"/>
+              <a:rPr lang="en-US"/>
               <a:t>Second level</a:t>
             </a:r>
           </a:p>
           <a:p>
             <a:pPr lvl="2"/>
             <a:r>
-              <a:rPr lang="en-US" smtClean="0"/>
+              <a:rPr lang="en-US"/>
               <a:t>Third level</a:t>
             </a:r>
           </a:p>
           <a:p>
             <a:pPr lvl="3"/>
             <a:r>
-              <a:rPr lang="en-US" smtClean="0"/>
+              <a:rPr lang="en-US"/>
               <a:t>Fourth level</a:t>
             </a:r>
           </a:p>
           <a:p>
             <a:pPr lvl="4"/>
             <a:r>
-              <a:rPr lang="en-US" smtClean="0"/>
+              <a:rPr lang="en-US"/>
               <a:t>Fifth level</a:t>
             </a:r>
-            <a:endParaRPr lang="en-US"/>
           </a:p>
         </p:txBody>
       </p:sp>
@@ -3999,7 +4098,7 @@
             <a:fld id="{1D8BD707-D9CF-40AE-B4C6-C98DA3205C09}" type="datetimeFigureOut">
               <a:rPr lang="en-US" smtClean="0"/>
               <a:pPr/>
-              <a:t>8/1/2011</a:t>
+              <a:t>10/12/2026</a:t>
             </a:fld>
             <a:endParaRPr lang="en-US"/>
           </a:p>
@@ -4094,10 +4193,9 @@
           <a:lstStyle/>
           <a:p>
             <a:r>
-              <a:rPr lang="en-US" smtClean="0"/>
+              <a:rPr lang="en-US"/>
               <a:t>Click to edit Master title style</a:t>
             </a:r>
-            <a:endParaRPr lang="en-US"/>
           </a:p>
         </p:txBody>
       </p:sp>
@@ -4123,38 +4221,37 @@
           <a:p>
             <a:pPr lvl="0"/>
             <a:r>
-              <a:rPr lang="en-US" smtClean="0"/>
+              <a:rPr lang="en-US"/>
               <a:t>Click to edit Master text styles</a:t>
             </a:r>
           </a:p>
           <a:p>
             <a:pPr lvl="1"/>
             <a:r>
-              <a:rPr lang="en-US" smtClean="0"/>
+              <a:rPr lang="en-US"/>
               <a:t>Second level</a:t>
             </a:r>
           </a:p>
           <a:p>
             <a:pPr lvl="2"/>
             <a:r>
-              <a:rPr lang="en-US" smtClean="0"/>
+              <a:rPr lang="en-US"/>
               <a:t>Third level</a:t>
             </a:r>
           </a:p>
           <a:p>
             <a:pPr lvl="3"/>
             <a:r>
-              <a:rPr lang="en-US" smtClean="0"/>
+              <a:rPr lang="en-US"/>
               <a:t>Fourth level</a:t>
             </a:r>
           </a:p>
           <a:p>
             <a:pPr lvl="4"/>
             <a:r>
-              <a:rPr lang="en-US" smtClean="0"/>
+              <a:rPr lang="en-US"/>
               <a:t>Fifth level</a:t>
             </a:r>
-            <a:endParaRPr lang="en-US"/>
           </a:p>
         </p:txBody>
       </p:sp>
@@ -4176,7 +4273,7 @@
             <a:fld id="{1D8BD707-D9CF-40AE-B4C6-C98DA3205C09}" type="datetimeFigureOut">
               <a:rPr lang="en-US" smtClean="0"/>
               <a:pPr/>
-              <a:t>8/1/2011</a:t>
+              <a:t>10/12/2026</a:t>
             </a:fld>
             <a:endParaRPr lang="en-US"/>
           </a:p>
@@ -4266,10 +4363,9 @@
           <a:lstStyle/>
           <a:p>
             <a:r>
-              <a:rPr lang="en-US" smtClean="0"/>
+              <a:rPr lang="en-US"/>
               <a:t>Click to edit Master title style</a:t>
             </a:r>
-            <a:endParaRPr lang="en-US"/>
           </a:p>
         </p:txBody>
       </p:sp>
@@ -4290,38 +4386,37 @@
           <a:p>
             <a:pPr lvl="0"/>
             <a:r>
-              <a:rPr lang="en-US" smtClean="0"/>
+              <a:rPr lang="en-US"/>
               <a:t>Click to edit Master text styles</a:t>
             </a:r>
           </a:p>
           <a:p>
             <a:pPr lvl="1"/>
             <a:r>
-              <a:rPr lang="en-US" smtClean="0"/>
+              <a:rPr lang="en-US"/>
               <a:t>Second level</a:t>
             </a:r>
           </a:p>
           <a:p>
             <a:pPr lvl="2"/>
             <a:r>
-              <a:rPr lang="en-US" smtClean="0"/>
+              <a:rPr lang="en-US"/>
               <a:t>Third level</a:t>
             </a:r>
           </a:p>
           <a:p>
             <a:pPr lvl="3"/>
             <a:r>
-              <a:rPr lang="en-US" smtClean="0"/>
+              <a:rPr lang="en-US"/>
               <a:t>Fourth level</a:t>
             </a:r>
           </a:p>
           <a:p>
             <a:pPr lvl="4"/>
             <a:r>
-              <a:rPr lang="en-US" smtClean="0"/>
+              <a:rPr lang="en-US"/>
               <a:t>Fifth level</a:t>
             </a:r>
-            <a:endParaRPr lang="en-US"/>
           </a:p>
         </p:txBody>
       </p:sp>
@@ -4343,7 +4438,7 @@
             <a:fld id="{1D8BD707-D9CF-40AE-B4C6-C98DA3205C09}" type="datetimeFigureOut">
               <a:rPr lang="en-US" smtClean="0"/>
               <a:pPr/>
-              <a:t>8/1/2011</a:t>
+              <a:t>10/12/2026</a:t>
             </a:fld>
             <a:endParaRPr lang="en-US"/>
           </a:p>
@@ -4442,10 +4537,9 @@
           </a:lstStyle>
           <a:p>
             <a:r>
-              <a:rPr lang="en-US" smtClean="0"/>
+              <a:rPr lang="en-US"/>
               <a:t>Click to edit Master title style</a:t>
             </a:r>
-            <a:endParaRPr lang="en-US"/>
           </a:p>
         </p:txBody>
       </p:sp>
@@ -4562,7 +4656,7 @@
           <a:p>
             <a:pPr lvl="0"/>
             <a:r>
-              <a:rPr lang="en-US" smtClean="0"/>
+              <a:rPr lang="en-US"/>
               <a:t>Click to edit Master text styles</a:t>
             </a:r>
           </a:p>
@@ -4586,7 +4680,7 @@
             <a:fld id="{1D8BD707-D9CF-40AE-B4C6-C98DA3205C09}" type="datetimeFigureOut">
               <a:rPr lang="en-US" smtClean="0"/>
               <a:pPr/>
-              <a:t>8/1/2011</a:t>
+              <a:t>10/12/2026</a:t>
             </a:fld>
             <a:endParaRPr lang="en-US"/>
           </a:p>
@@ -4676,10 +4770,9 @@
           <a:lstStyle/>
           <a:p>
             <a:r>
-              <a:rPr lang="en-US" smtClean="0"/>
+              <a:rPr lang="en-US"/>
               <a:t>Click to edit Master title style</a:t>
             </a:r>
-            <a:endParaRPr lang="en-US"/>
           </a:p>
         </p:txBody>
       </p:sp>
@@ -4733,38 +4826,37 @@
           <a:p>
             <a:pPr lvl="0"/>
             <a:r>
-              <a:rPr lang="en-US" smtClean="0"/>
+              <a:rPr lang="en-US"/>
               <a:t>Click to edit Master text styles</a:t>
             </a:r>
           </a:p>
           <a:p>
             <a:pPr lvl="1"/>
             <a:r>
-              <a:rPr lang="en-US" smtClean="0"/>
+              <a:rPr lang="en-US"/>
               <a:t>Second level</a:t>
             </a:r>
           </a:p>
           <a:p>
             <a:pPr lvl="2"/>
             <a:r>
-              <a:rPr lang="en-US" smtClean="0"/>
+              <a:rPr lang="en-US"/>
               <a:t>Third level</a:t>
             </a:r>
           </a:p>
           <a:p>
             <a:pPr lvl="3"/>
             <a:r>
-              <a:rPr lang="en-US" smtClean="0"/>
+              <a:rPr lang="en-US"/>
               <a:t>Fourth level</a:t>
             </a:r>
           </a:p>
           <a:p>
             <a:pPr lvl="4"/>
             <a:r>
-              <a:rPr lang="en-US" smtClean="0"/>
+              <a:rPr lang="en-US"/>
               <a:t>Fifth level</a:t>
             </a:r>
-            <a:endParaRPr lang="en-US"/>
           </a:p>
         </p:txBody>
       </p:sp>
@@ -4818,38 +4910,37 @@
           <a:p>
             <a:pPr lvl="0"/>
             <a:r>
-              <a:rPr lang="en-US" smtClean="0"/>
+              <a:rPr lang="en-US"/>
               <a:t>Click to edit Master text styles</a:t>
             </a:r>
           </a:p>
           <a:p>
             <a:pPr lvl="1"/>
             <a:r>
-              <a:rPr lang="en-US" smtClean="0"/>
+              <a:rPr lang="en-US"/>
               <a:t>Second level</a:t>
             </a:r>
           </a:p>
           <a:p>
             <a:pPr lvl="2"/>
             <a:r>
-              <a:rPr lang="en-US" smtClean="0"/>
+              <a:rPr lang="en-US"/>
               <a:t>Third level</a:t>
             </a:r>
           </a:p>
           <a:p>
             <a:pPr lvl="3"/>
             <a:r>
-              <a:rPr lang="en-US" smtClean="0"/>
+              <a:rPr lang="en-US"/>
               <a:t>Fourth level</a:t>
             </a:r>
           </a:p>
           <a:p>
             <a:pPr lvl="4"/>
             <a:r>
-              <a:rPr lang="en-US" smtClean="0"/>
+              <a:rPr lang="en-US"/>
               <a:t>Fifth level</a:t>
             </a:r>
-            <a:endParaRPr lang="en-US"/>
           </a:p>
         </p:txBody>
       </p:sp>
@@ -4871,7 +4962,7 @@
             <a:fld id="{1D8BD707-D9CF-40AE-B4C6-C98DA3205C09}" type="datetimeFigureOut">
               <a:rPr lang="en-US" smtClean="0"/>
               <a:pPr/>
-              <a:t>8/1/2011</a:t>
+              <a:t>10/12/2026</a:t>
             </a:fld>
             <a:endParaRPr lang="en-US"/>
           </a:p>
@@ -4965,10 +5056,9 @@
           </a:lstStyle>
           <a:p>
             <a:r>
-              <a:rPr lang="en-US" smtClean="0"/>
+              <a:rPr lang="en-US"/>
               <a:t>Click to edit Master title style</a:t>
             </a:r>
-            <a:endParaRPr lang="en-US"/>
           </a:p>
         </p:txBody>
       </p:sp>
@@ -5031,7 +5121,7 @@
           <a:p>
             <a:pPr lvl="0"/>
             <a:r>
-              <a:rPr lang="en-US" smtClean="0"/>
+              <a:rPr lang="en-US"/>
               <a:t>Click to edit Master text styles</a:t>
             </a:r>
           </a:p>
@@ -5087,38 +5177,37 @@
           <a:p>
             <a:pPr lvl="0"/>
             <a:r>
-              <a:rPr lang="en-US" smtClean="0"/>
+              <a:rPr lang="en-US"/>
               <a:t>Click to edit Master text styles</a:t>
             </a:r>
           </a:p>
           <a:p>
             <a:pPr lvl="1"/>
             <a:r>
-              <a:rPr lang="en-US" smtClean="0"/>
+              <a:rPr lang="en-US"/>
               <a:t>Second level</a:t>
             </a:r>
           </a:p>
           <a:p>
             <a:pPr lvl="2"/>
             <a:r>
-              <a:rPr lang="en-US" smtClean="0"/>
+              <a:rPr lang="en-US"/>
               <a:t>Third level</a:t>
             </a:r>
           </a:p>
           <a:p>
             <a:pPr lvl="3"/>
             <a:r>
-              <a:rPr lang="en-US" smtClean="0"/>
+              <a:rPr lang="en-US"/>
               <a:t>Fourth level</a:t>
             </a:r>
           </a:p>
           <a:p>
             <a:pPr lvl="4"/>
             <a:r>
-              <a:rPr lang="en-US" smtClean="0"/>
+              <a:rPr lang="en-US"/>
               <a:t>Fifth level</a:t>
             </a:r>
-            <a:endParaRPr lang="en-US"/>
           </a:p>
         </p:txBody>
       </p:sp>
@@ -5181,7 +5270,7 @@
           <a:p>
             <a:pPr lvl="0"/>
             <a:r>
-              <a:rPr lang="en-US" smtClean="0"/>
+              <a:rPr lang="en-US"/>
               <a:t>Click to edit Master text styles</a:t>
             </a:r>
           </a:p>
@@ -5237,38 +5326,37 @@
           <a:p>
             <a:pPr lvl="0"/>
             <a:r>
-              <a:rPr lang="en-US" smtClean="0"/>
+              <a:rPr lang="en-US"/>
               <a:t>Click to edit Master text styles</a:t>
             </a:r>
           </a:p>
           <a:p>
             <a:pPr lvl="1"/>
             <a:r>
-              <a:rPr lang="en-US" smtClean="0"/>
+              <a:rPr lang="en-US"/>
               <a:t>Second level</a:t>
             </a:r>
           </a:p>
           <a:p>
             <a:pPr lvl="2"/>
             <a:r>
-              <a:rPr lang="en-US" smtClean="0"/>
+              <a:rPr lang="en-US"/>
               <a:t>Third level</a:t>
             </a:r>
           </a:p>
           <a:p>
             <a:pPr lvl="3"/>
             <a:r>
-              <a:rPr lang="en-US" smtClean="0"/>
+              <a:rPr lang="en-US"/>
               <a:t>Fourth level</a:t>
             </a:r>
           </a:p>
           <a:p>
             <a:pPr lvl="4"/>
             <a:r>
-              <a:rPr lang="en-US" smtClean="0"/>
+              <a:rPr lang="en-US"/>
               <a:t>Fifth level</a:t>
             </a:r>
-            <a:endParaRPr lang="en-US"/>
           </a:p>
         </p:txBody>
       </p:sp>
@@ -5290,7 +5378,7 @@
             <a:fld id="{1D8BD707-D9CF-40AE-B4C6-C98DA3205C09}" type="datetimeFigureOut">
               <a:rPr lang="en-US" smtClean="0"/>
               <a:pPr/>
-              <a:t>8/1/2011</a:t>
+              <a:t>10/12/2026</a:t>
             </a:fld>
             <a:endParaRPr lang="en-US"/>
           </a:p>
@@ -5380,10 +5468,9 @@
           <a:lstStyle/>
           <a:p>
             <a:r>
-              <a:rPr lang="en-US" smtClean="0"/>
+              <a:rPr lang="en-US"/>
               <a:t>Click to edit Master title style</a:t>
             </a:r>
-            <a:endParaRPr lang="en-US"/>
           </a:p>
         </p:txBody>
       </p:sp>
@@ -5405,7 +5492,7 @@
             <a:fld id="{1D8BD707-D9CF-40AE-B4C6-C98DA3205C09}" type="datetimeFigureOut">
               <a:rPr lang="en-US" smtClean="0"/>
               <a:pPr/>
-              <a:t>8/1/2011</a:t>
+              <a:t>10/12/2026</a:t>
             </a:fld>
             <a:endParaRPr lang="en-US"/>
           </a:p>
@@ -5497,7 +5584,7 @@
             <a:fld id="{1D8BD707-D9CF-40AE-B4C6-C98DA3205C09}" type="datetimeFigureOut">
               <a:rPr lang="en-US" smtClean="0"/>
               <a:pPr/>
-              <a:t>8/1/2011</a:t>
+              <a:t>10/12/2026</a:t>
             </a:fld>
             <a:endParaRPr lang="en-US"/>
           </a:p>
@@ -5596,10 +5683,9 @@
           </a:lstStyle>
           <a:p>
             <a:r>
-              <a:rPr lang="en-US" smtClean="0"/>
+              <a:rPr lang="en-US"/>
               <a:t>Click to edit Master title style</a:t>
             </a:r>
-            <a:endParaRPr lang="en-US"/>
           </a:p>
         </p:txBody>
       </p:sp>
@@ -5653,38 +5739,37 @@
           <a:p>
             <a:pPr lvl="0"/>
             <a:r>
-              <a:rPr lang="en-US" smtClean="0"/>
+              <a:rPr lang="en-US"/>
               <a:t>Click to edit Master text styles</a:t>
             </a:r>
           </a:p>
           <a:p>
             <a:pPr lvl="1"/>
             <a:r>
-              <a:rPr lang="en-US" smtClean="0"/>
+              <a:rPr lang="en-US"/>
               <a:t>Second level</a:t>
             </a:r>
           </a:p>
           <a:p>
             <a:pPr lvl="2"/>
             <a:r>
-              <a:rPr lang="en-US" smtClean="0"/>
+              <a:rPr lang="en-US"/>
               <a:t>Third level</a:t>
             </a:r>
           </a:p>
           <a:p>
             <a:pPr lvl="3"/>
             <a:r>
-              <a:rPr lang="en-US" smtClean="0"/>
+              <a:rPr lang="en-US"/>
               <a:t>Fourth level</a:t>
             </a:r>
           </a:p>
           <a:p>
             <a:pPr lvl="4"/>
             <a:r>
-              <a:rPr lang="en-US" smtClean="0"/>
+              <a:rPr lang="en-US"/>
               <a:t>Fifth level</a:t>
             </a:r>
-            <a:endParaRPr lang="en-US"/>
           </a:p>
         </p:txBody>
       </p:sp>
@@ -5747,7 +5832,7 @@
           <a:p>
             <a:pPr lvl="0"/>
             <a:r>
-              <a:rPr lang="en-US" smtClean="0"/>
+              <a:rPr lang="en-US"/>
               <a:t>Click to edit Master text styles</a:t>
             </a:r>
           </a:p>
@@ -5771,7 +5856,7 @@
             <a:fld id="{1D8BD707-D9CF-40AE-B4C6-C98DA3205C09}" type="datetimeFigureOut">
               <a:rPr lang="en-US" smtClean="0"/>
               <a:pPr/>
-              <a:t>8/1/2011</a:t>
+              <a:t>10/12/2026</a:t>
             </a:fld>
             <a:endParaRPr lang="en-US"/>
           </a:p>
@@ -5870,10 +5955,9 @@
           </a:lstStyle>
           <a:p>
             <a:r>
-              <a:rPr lang="en-US" smtClean="0"/>
+              <a:rPr lang="en-US"/>
               <a:t>Click to edit Master title style</a:t>
             </a:r>
-            <a:endParaRPr lang="en-US"/>
           </a:p>
         </p:txBody>
       </p:sp>
@@ -5997,7 +6081,7 @@
           <a:p>
             <a:pPr lvl="0"/>
             <a:r>
-              <a:rPr lang="en-US" smtClean="0"/>
+              <a:rPr lang="en-US"/>
               <a:t>Click to edit Master text styles</a:t>
             </a:r>
           </a:p>
@@ -6021,7 +6105,7 @@
             <a:fld id="{1D8BD707-D9CF-40AE-B4C6-C98DA3205C09}" type="datetimeFigureOut">
               <a:rPr lang="en-US" smtClean="0"/>
               <a:pPr/>
-              <a:t>8/1/2011</a:t>
+              <a:t>10/12/2026</a:t>
             </a:fld>
             <a:endParaRPr lang="en-US"/>
           </a:p>
@@ -6126,10 +6210,9 @@
           <a:lstStyle/>
           <a:p>
             <a:r>
-              <a:rPr lang="en-US" smtClean="0"/>
+              <a:rPr lang="en-US"/>
               <a:t>Click to edit Master title style</a:t>
             </a:r>
-            <a:endParaRPr lang="en-US"/>
           </a:p>
         </p:txBody>
       </p:sp>
@@ -6160,38 +6243,37 @@
           <a:p>
             <a:pPr lvl="0"/>
             <a:r>
-              <a:rPr lang="en-US" smtClean="0"/>
+              <a:rPr lang="en-US"/>
               <a:t>Click to edit Master text styles</a:t>
             </a:r>
           </a:p>
           <a:p>
             <a:pPr lvl="1"/>
             <a:r>
-              <a:rPr lang="en-US" smtClean="0"/>
+              <a:rPr lang="en-US"/>
               <a:t>Second level</a:t>
             </a:r>
           </a:p>
           <a:p>
             <a:pPr lvl="2"/>
             <a:r>
-              <a:rPr lang="en-US" smtClean="0"/>
+              <a:rPr lang="en-US"/>
               <a:t>Third level</a:t>
             </a:r>
           </a:p>
           <a:p>
             <a:pPr lvl="3"/>
             <a:r>
-              <a:rPr lang="en-US" smtClean="0"/>
+              <a:rPr lang="en-US"/>
               <a:t>Fourth level</a:t>
             </a:r>
           </a:p>
           <a:p>
             <a:pPr lvl="4"/>
             <a:r>
-              <a:rPr lang="en-US" smtClean="0"/>
+              <a:rPr lang="en-US"/>
               <a:t>Fifth level</a:t>
             </a:r>
-            <a:endParaRPr lang="en-US"/>
           </a:p>
         </p:txBody>
       </p:sp>
@@ -6231,7 +6313,7 @@
             <a:fld id="{1D8BD707-D9CF-40AE-B4C6-C98DA3205C09}" type="datetimeFigureOut">
               <a:rPr lang="en-US" smtClean="0"/>
               <a:pPr/>
-              <a:t>8/1/2011</a:t>
+              <a:t>10/12/2026</a:t>
             </a:fld>
             <a:endParaRPr lang="en-US"/>
           </a:p>
@@ -6586,7 +6668,7 @@
 </file>
 
 <file path=ppt/slides/slide1.xml><?xml version="1.0" encoding="utf-8"?>
-<p:sld xmlns:p="http://schemas.openxmlformats.org/presentationml/2006/main" xmlns:a="http://schemas.openxmlformats.org/drawingml/2006/main" xmlns:r="http://schemas.openxmlformats.org/officeDocument/2006/relationships">
+<p:sld xmlns:a="http://schemas.openxmlformats.org/drawingml/2006/main" xmlns:r="http://schemas.openxmlformats.org/officeDocument/2006/relationships" xmlns:p="http://schemas.openxmlformats.org/presentationml/2006/main">
   <p:cSld>
     <p:spTree>
       <p:nvGrpSpPr>
@@ -6604,12 +6686,12 @@
       </p:grpSpPr>
       <p:sp>
         <p:nvSpPr>
-          <p:cNvPr name="Freeform 2" id="2"/>
+          <p:cNvPr id="2" name="Freeform 2"/>
           <p:cNvSpPr/>
           <p:nvPr/>
         </p:nvSpPr>
         <p:spPr>
-          <a:xfrm flipH="false" flipV="false" rot="0">
+          <a:xfrm>
             <a:off x="13799358" y="3773503"/>
             <a:ext cx="5051790" cy="7861360"/>
           </a:xfrm>
@@ -6618,9 +6700,9 @@
             <a:gdLst/>
             <a:ahLst/>
             <a:cxnLst/>
-            <a:rect r="r" b="b" t="t" l="l"/>
+            <a:rect l="l" t="t" r="r" b="b"/>
             <a:pathLst>
-              <a:path h="7861360" w="5051790">
+              <a:path w="5051790" h="7861360">
                 <a:moveTo>
                   <a:pt x="0" y="0"/>
                 </a:moveTo>
@@ -6649,23 +6731,26 @@
               </a:extLst>
             </a:blip>
             <a:stretch>
-              <a:fillRect l="0" t="0" r="0" b="0"/>
+              <a:fillRect/>
             </a:stretch>
           </a:blipFill>
         </p:spPr>
         <p:txBody>
           <a:bodyPr/>
-          <a:p/>
-        </p:txBody>
-      </p:sp>
-      <p:sp>
-        <p:nvSpPr>
-          <p:cNvPr name="Freeform 3" id="3"/>
+          <a:lstStyle/>
+          <a:p>
+            <a:endParaRPr/>
+          </a:p>
+        </p:txBody>
+      </p:sp>
+      <p:sp>
+        <p:nvSpPr>
+          <p:cNvPr id="3" name="Freeform 3"/>
           <p:cNvSpPr/>
           <p:nvPr/>
         </p:nvSpPr>
         <p:spPr>
-          <a:xfrm flipH="true" flipV="true" rot="0">
+          <a:xfrm flipH="1" flipV="1">
             <a:off x="-455035" y="-442015"/>
             <a:ext cx="3869203" cy="6021072"/>
           </a:xfrm>
@@ -6674,9 +6759,9 @@
             <a:gdLst/>
             <a:ahLst/>
             <a:cxnLst/>
-            <a:rect r="r" b="b" t="t" l="l"/>
+            <a:rect l="l" t="t" r="r" b="b"/>
             <a:pathLst>
-              <a:path h="6021072" w="3869203">
+              <a:path w="3869203" h="6021072">
                 <a:moveTo>
                   <a:pt x="3869203" y="6021072"/>
                 </a:moveTo>
@@ -6705,23 +6790,26 @@
               </a:extLst>
             </a:blip>
             <a:stretch>
-              <a:fillRect l="0" t="0" r="0" b="0"/>
+              <a:fillRect/>
             </a:stretch>
           </a:blipFill>
         </p:spPr>
         <p:txBody>
           <a:bodyPr/>
-          <a:p/>
-        </p:txBody>
-      </p:sp>
-      <p:sp>
-        <p:nvSpPr>
-          <p:cNvPr name="Freeform 4" id="4"/>
+          <a:lstStyle/>
+          <a:p>
+            <a:endParaRPr/>
+          </a:p>
+        </p:txBody>
+      </p:sp>
+      <p:sp>
+        <p:nvSpPr>
+          <p:cNvPr id="4" name="Freeform 4"/>
           <p:cNvSpPr/>
           <p:nvPr/>
         </p:nvSpPr>
         <p:spPr>
-          <a:xfrm flipH="false" flipV="false" rot="0">
+          <a:xfrm>
             <a:off x="16525278" y="9130537"/>
             <a:ext cx="2617078" cy="2617078"/>
           </a:xfrm>
@@ -6730,9 +6818,9 @@
             <a:gdLst/>
             <a:ahLst/>
             <a:cxnLst/>
-            <a:rect r="r" b="b" t="t" l="l"/>
+            <a:rect l="l" t="t" r="r" b="b"/>
             <a:pathLst>
-              <a:path h="2617078" w="2617078">
+              <a:path w="2617078" h="2617078">
                 <a:moveTo>
                   <a:pt x="0" y="0"/>
                 </a:moveTo>
@@ -6761,23 +6849,26 @@
               </a:extLst>
             </a:blip>
             <a:stretch>
-              <a:fillRect l="0" t="0" r="0" b="0"/>
+              <a:fillRect/>
             </a:stretch>
           </a:blipFill>
         </p:spPr>
         <p:txBody>
           <a:bodyPr/>
-          <a:p/>
-        </p:txBody>
-      </p:sp>
-      <p:sp>
-        <p:nvSpPr>
-          <p:cNvPr name="Freeform 5" id="5"/>
+          <a:lstStyle/>
+          <a:p>
+            <a:endParaRPr/>
+          </a:p>
+        </p:txBody>
+      </p:sp>
+      <p:sp>
+        <p:nvSpPr>
+          <p:cNvPr id="5" name="Freeform 5"/>
           <p:cNvSpPr/>
           <p:nvPr/>
         </p:nvSpPr>
         <p:spPr>
-          <a:xfrm flipH="false" flipV="false" rot="0">
+          <a:xfrm>
             <a:off x="-947307" y="-1541077"/>
             <a:ext cx="2617078" cy="2617078"/>
           </a:xfrm>
@@ -6786,9 +6877,9 @@
             <a:gdLst/>
             <a:ahLst/>
             <a:cxnLst/>
-            <a:rect r="r" b="b" t="t" l="l"/>
+            <a:rect l="l" t="t" r="r" b="b"/>
             <a:pathLst>
-              <a:path h="2617078" w="2617078">
+              <a:path w="2617078" h="2617078">
                 <a:moveTo>
                   <a:pt x="0" y="0"/>
                 </a:moveTo>
@@ -6817,23 +6908,26 @@
               </a:extLst>
             </a:blip>
             <a:stretch>
-              <a:fillRect l="0" t="0" r="0" b="0"/>
+              <a:fillRect/>
             </a:stretch>
           </a:blipFill>
         </p:spPr>
         <p:txBody>
           <a:bodyPr/>
-          <a:p/>
-        </p:txBody>
-      </p:sp>
-      <p:sp>
-        <p:nvSpPr>
-          <p:cNvPr name="Freeform 6" id="6"/>
+          <a:lstStyle/>
+          <a:p>
+            <a:endParaRPr/>
+          </a:p>
+        </p:txBody>
+      </p:sp>
+      <p:sp>
+        <p:nvSpPr>
+          <p:cNvPr id="6" name="Freeform 6"/>
           <p:cNvSpPr/>
           <p:nvPr/>
         </p:nvSpPr>
         <p:spPr>
-          <a:xfrm flipH="false" flipV="false" rot="-10800000">
+          <a:xfrm rot="-10800000">
             <a:off x="8427926" y="8112446"/>
             <a:ext cx="1432149" cy="473911"/>
           </a:xfrm>
@@ -6842,9 +6936,9 @@
             <a:gdLst/>
             <a:ahLst/>
             <a:cxnLst/>
-            <a:rect r="r" b="b" t="t" l="l"/>
+            <a:rect l="l" t="t" r="r" b="b"/>
             <a:pathLst>
-              <a:path h="473911" w="1432149">
+              <a:path w="1432149" h="473911">
                 <a:moveTo>
                   <a:pt x="0" y="0"/>
                 </a:moveTo>
@@ -6873,23 +6967,26 @@
               </a:extLst>
             </a:blip>
             <a:stretch>
-              <a:fillRect l="0" t="0" r="0" b="0"/>
+              <a:fillRect/>
             </a:stretch>
           </a:blipFill>
         </p:spPr>
         <p:txBody>
           <a:bodyPr/>
-          <a:p/>
+          <a:lstStyle/>
+          <a:p>
+            <a:endParaRPr/>
+          </a:p>
         </p:txBody>
       </p:sp>
       <p:grpSp>
         <p:nvGrpSpPr>
-          <p:cNvPr name="Group 7" id="7"/>
+          <p:cNvPr id="7" name="Group 7"/>
           <p:cNvGrpSpPr/>
           <p:nvPr/>
         </p:nvGrpSpPr>
         <p:grpSpPr>
-          <a:xfrm rot="0">
+          <a:xfrm>
             <a:off x="8357616" y="1371600"/>
             <a:ext cx="6393978" cy="1578597"/>
             <a:chOff x="0" y="0"/>
@@ -6898,12 +6995,12 @@
         </p:grpSpPr>
         <p:sp>
           <p:nvSpPr>
-            <p:cNvPr name="Freeform 8" id="8"/>
+            <p:cNvPr id="8" name="Freeform 8"/>
             <p:cNvSpPr/>
             <p:nvPr/>
           </p:nvSpPr>
           <p:spPr>
-            <a:xfrm flipH="false" flipV="false" rot="0">
+            <a:xfrm>
               <a:off x="0" y="0"/>
               <a:ext cx="2097896" cy="2104797"/>
             </a:xfrm>
@@ -6912,9 +7009,9 @@
               <a:gdLst/>
               <a:ahLst/>
               <a:cxnLst/>
-              <a:rect r="r" b="b" t="t" l="l"/>
+              <a:rect l="l" t="t" r="r" b="b"/>
               <a:pathLst>
-                <a:path h="2104797" w="2097896">
+                <a:path w="2097896" h="2104797">
                   <a:moveTo>
                     <a:pt x="0" y="0"/>
                   </a:moveTo>
@@ -6937,7 +7034,7 @@
             <a:blipFill>
               <a:blip r:embed="rId9"/>
               <a:stretch>
-                <a:fillRect l="0" t="0" r="0" b="0"/>
+                <a:fillRect/>
               </a:stretch>
             </a:blipFill>
           </p:spPr>
@@ -6960,7 +7057,7 @@
           <a:noFill/>
         </p:spPr>
         <p:txBody>
-          <a:bodyPr wrap="square" lIns="36576" rIns="36576" tIns="27432" bIns="27432">
+          <a:bodyPr wrap="square" lIns="36576" tIns="27432" rIns="36576" bIns="27432">
             <a:spAutoFit/>
           </a:bodyPr>
           <a:lstStyle/>
@@ -7021,7 +7118,7 @@
           <a:noFill/>
         </p:spPr>
         <p:txBody>
-          <a:bodyPr wrap="square" lIns="36576" rIns="36576" tIns="27432" bIns="27432">
+          <a:bodyPr wrap="square" lIns="36576" tIns="27432" rIns="36576" bIns="27432">
             <a:spAutoFit/>
           </a:bodyPr>
           <a:lstStyle/>
@@ -7055,7 +7152,7 @@
         <p:spPr>
           <a:xfrm>
             <a:off x="1371600" y="7178040"/>
-            <a:ext cx="15544800" cy="914400"/>
+            <a:ext cx="15544800" cy="365613"/>
           </a:xfrm>
           <a:prstGeom prst="rect">
             <a:avLst/>
@@ -7063,7 +7160,7 @@
           <a:noFill/>
         </p:spPr>
         <p:txBody>
-          <a:bodyPr wrap="square" lIns="36576" rIns="36576" tIns="27432" bIns="27432">
+          <a:bodyPr wrap="square" lIns="36576" tIns="27432" rIns="36576" bIns="27432">
             <a:spAutoFit/>
           </a:bodyPr>
           <a:lstStyle/>
@@ -7077,32 +7174,121 @@
               </a:spcAft>
             </a:pPr>
             <a:r>
-              <a:rPr sz="2200" b="0">
+              <a:rPr b="0" dirty="0" err="1">
                 <a:solidFill>
                   <a:srgbClr val="555555"/>
                 </a:solidFill>
                 <a:latin typeface="League Spartan"/>
               </a:rPr>
-              <a:t>Perawis Buranasing (6688012)</a:t>
-            </a:r>
-          </a:p>
-          <a:p>
-            <a:pPr algn="ctr">
-              <a:lnSpc>
-                <a:spcPct val="112000"/>
-              </a:lnSpc>
-              <a:spcAft>
-                <a:spcPts val="900"/>
-              </a:spcAft>
-            </a:pPr>
-            <a:r>
-              <a:rPr sz="2200" b="0">
+              <a:t>Perawis</a:t>
+            </a:r>
+            <a:r>
+              <a:rPr b="0" dirty="0">
                 <a:solidFill>
                   <a:srgbClr val="555555"/>
                 </a:solidFill>
                 <a:latin typeface="League Spartan"/>
               </a:rPr>
-              <a:t>Supitsara Tanasarnsukstid (6688121)  |  Atichat Kangsamut (6688193)</a:t>
+              <a:t> </a:t>
+            </a:r>
+            <a:r>
+              <a:rPr b="0" dirty="0" err="1">
+                <a:solidFill>
+                  <a:srgbClr val="555555"/>
+                </a:solidFill>
+                <a:latin typeface="League Spartan"/>
+              </a:rPr>
+              <a:t>Buranasing</a:t>
+            </a:r>
+            <a:r>
+              <a:rPr b="0" dirty="0">
+                <a:solidFill>
+                  <a:srgbClr val="555555"/>
+                </a:solidFill>
+                <a:latin typeface="League Spartan"/>
+              </a:rPr>
+              <a:t> (6688012)</a:t>
+            </a:r>
+            <a:r>
+              <a:rPr lang="en-US" b="0" dirty="0">
+                <a:solidFill>
+                  <a:srgbClr val="555555"/>
+                </a:solidFill>
+                <a:latin typeface="League Spartan"/>
+              </a:rPr>
+              <a:t> | </a:t>
+            </a:r>
+            <a:r>
+              <a:rPr b="0" dirty="0" err="1">
+                <a:solidFill>
+                  <a:srgbClr val="555555"/>
+                </a:solidFill>
+                <a:latin typeface="League Spartan"/>
+              </a:rPr>
+              <a:t>Supitsara</a:t>
+            </a:r>
+            <a:r>
+              <a:rPr b="0" dirty="0">
+                <a:solidFill>
+                  <a:srgbClr val="555555"/>
+                </a:solidFill>
+                <a:latin typeface="League Spartan"/>
+              </a:rPr>
+              <a:t> </a:t>
+            </a:r>
+            <a:r>
+              <a:rPr b="0" dirty="0" err="1">
+                <a:solidFill>
+                  <a:srgbClr val="555555"/>
+                </a:solidFill>
+                <a:latin typeface="League Spartan"/>
+              </a:rPr>
+              <a:t>Tanasarnsukstid</a:t>
+            </a:r>
+            <a:r>
+              <a:rPr b="0" dirty="0">
+                <a:solidFill>
+                  <a:srgbClr val="555555"/>
+                </a:solidFill>
+                <a:latin typeface="League Spartan"/>
+              </a:rPr>
+              <a:t> (6688121)  |  </a:t>
+            </a:r>
+            <a:r>
+              <a:rPr b="0" dirty="0" err="1">
+                <a:solidFill>
+                  <a:srgbClr val="555555"/>
+                </a:solidFill>
+                <a:latin typeface="League Spartan"/>
+              </a:rPr>
+              <a:t>Atichat</a:t>
+            </a:r>
+            <a:r>
+              <a:rPr b="0" dirty="0">
+                <a:solidFill>
+                  <a:srgbClr val="555555"/>
+                </a:solidFill>
+                <a:latin typeface="League Spartan"/>
+              </a:rPr>
+              <a:t> </a:t>
+            </a:r>
+            <a:r>
+              <a:rPr b="0" dirty="0" err="1">
+                <a:solidFill>
+                  <a:srgbClr val="555555"/>
+                </a:solidFill>
+                <a:latin typeface="League Spartan"/>
+              </a:rPr>
+              <a:t>Kangsamut</a:t>
+            </a:r>
+            <a:r>
+              <a:rPr b="0" dirty="0">
+                <a:solidFill>
+                  <a:srgbClr val="555555"/>
+                </a:solidFill>
+                <a:latin typeface="League Spartan"/>
+              </a:rPr>
+              <a:t> (6688193)</a:t>
             </a:r>
           </a:p>
         </p:txBody>
@@ -7116,7 +7302,7 @@
 </file>
 
 <file path=ppt/slides/slide10.xml><?xml version="1.0" encoding="utf-8"?>
-<p:sld xmlns:p="http://schemas.openxmlformats.org/presentationml/2006/main" xmlns:a="http://schemas.openxmlformats.org/drawingml/2006/main">
+<p:sld xmlns:a="http://schemas.openxmlformats.org/drawingml/2006/main" xmlns:r="http://schemas.openxmlformats.org/officeDocument/2006/relationships" xmlns:p="http://schemas.openxmlformats.org/presentationml/2006/main">
   <p:cSld>
     <p:spTree>
       <p:nvGrpSpPr>
@@ -7134,12 +7320,12 @@
       </p:grpSpPr>
       <p:grpSp>
         <p:nvGrpSpPr>
-          <p:cNvPr name="Group 2" id="2"/>
+          <p:cNvPr id="2" name="Group 2"/>
           <p:cNvGrpSpPr/>
           <p:nvPr/>
         </p:nvGrpSpPr>
         <p:grpSpPr>
-          <a:xfrm rot="0">
+          <a:xfrm>
             <a:off x="0" y="-268747"/>
             <a:ext cx="30733015" cy="2895405"/>
             <a:chOff x="0" y="0"/>
@@ -7148,12 +7334,12 @@
         </p:grpSpPr>
         <p:sp>
           <p:nvSpPr>
-            <p:cNvPr name="Freeform 3" id="3"/>
+            <p:cNvPr id="3" name="Freeform 3"/>
             <p:cNvSpPr/>
             <p:nvPr/>
           </p:nvSpPr>
           <p:spPr>
-            <a:xfrm flipH="false" flipV="false" rot="0">
+            <a:xfrm>
               <a:off x="0" y="0"/>
               <a:ext cx="8094292" cy="762576"/>
             </a:xfrm>
@@ -7162,9 +7348,9 @@
               <a:gdLst/>
               <a:ahLst/>
               <a:cxnLst/>
-              <a:rect r="r" b="b" t="t" l="l"/>
+              <a:rect l="l" t="t" r="r" b="b"/>
               <a:pathLst>
-                <a:path h="762576" w="8094292">
+                <a:path w="8094292" h="762576">
                   <a:moveTo>
                     <a:pt x="0" y="0"/>
                   </a:moveTo>
@@ -7181,7 +7367,7 @@
                 </a:path>
               </a:pathLst>
             </a:custGeom>
-            <a:gradFill rotWithShape="true">
+            <a:gradFill rotWithShape="1">
               <a:gsLst>
                 <a:gs pos="0">
                   <a:srgbClr val="030F7D">
@@ -7200,8 +7386,8 @@
         </p:sp>
         <p:sp>
           <p:nvSpPr>
-            <p:cNvPr name="TextBox 4" id="4"/>
-            <p:cNvSpPr txBox="true"/>
+            <p:cNvPr id="4" name="TextBox 4"/>
+            <p:cNvSpPr txBox="1"/>
             <p:nvPr/>
           </p:nvSpPr>
           <p:spPr>
@@ -7214,7 +7400,7 @@
             </a:prstGeom>
           </p:spPr>
           <p:txBody>
-            <a:bodyPr anchor="ctr" rtlCol="false" tIns="50800" lIns="50800" bIns="50800" rIns="50800"/>
+            <a:bodyPr lIns="50800" tIns="50800" rIns="50800" bIns="50800" rtlCol="0" anchor="ctr"/>
             <a:lstStyle/>
             <a:p>
               <a:pPr algn="ctr">
@@ -7225,18 +7411,19 @@
                   <a:spcPct val="0"/>
                 </a:spcBef>
               </a:pPr>
+              <a:endParaRPr/>
             </a:p>
           </p:txBody>
         </p:sp>
       </p:grpSp>
       <p:sp>
         <p:nvSpPr>
-          <p:cNvPr name="TextBox 7" id="7"/>
-          <p:cNvSpPr txBox="true"/>
-          <p:nvPr/>
-        </p:nvSpPr>
-        <p:spPr>
-          <a:xfrm rot="0">
+          <p:cNvPr id="7" name="TextBox 7"/>
+          <p:cNvSpPr txBox="1"/>
+          <p:nvPr/>
+        </p:nvSpPr>
+        <p:spPr>
+          <a:xfrm>
             <a:off x="1028700" y="643336"/>
             <a:ext cx="16093440" cy="1828800"/>
           </a:xfrm>
@@ -7245,7 +7432,7 @@
           </a:prstGeom>
         </p:spPr>
         <p:txBody>
-          <a:bodyPr anchor="t" rtlCol="false" tIns="0" lIns="0" bIns="0" rIns="0">
+          <a:bodyPr lIns="0" tIns="0" rIns="0" bIns="0" rtlCol="0" anchor="t">
             <a:spAutoFit/>
           </a:bodyPr>
           <a:lstStyle/>
@@ -7312,7 +7499,7 @@
           <a:noFill/>
         </p:spPr>
         <p:txBody>
-          <a:bodyPr wrap="square" lIns="36576" rIns="36576" tIns="27432" bIns="27432">
+          <a:bodyPr wrap="square" lIns="36576" tIns="27432" rIns="36576" bIns="27432">
             <a:spAutoFit/>
           </a:bodyPr>
           <a:lstStyle/>
@@ -7354,7 +7541,7 @@
           <a:noFill/>
         </p:spPr>
         <p:txBody>
-          <a:bodyPr wrap="square" lIns="36576" rIns="36576" tIns="27432" bIns="27432">
+          <a:bodyPr wrap="square" lIns="36576" tIns="27432" rIns="36576" bIns="27432">
             <a:spAutoFit/>
           </a:bodyPr>
           <a:lstStyle/>
@@ -7396,7 +7583,7 @@
           <a:noFill/>
         </p:spPr>
         <p:txBody>
-          <a:bodyPr wrap="square" lIns="36576" rIns="36576" tIns="27432" bIns="27432">
+          <a:bodyPr wrap="square" lIns="36576" tIns="27432" rIns="36576" bIns="27432">
             <a:spAutoFit/>
           </a:bodyPr>
           <a:lstStyle/>
@@ -7463,6 +7650,7 @@
           <a:lstStyle/>
           <a:p>
             <a:pPr algn="ctr"/>
+            <a:endParaRPr/>
           </a:p>
         </p:txBody>
       </p:sp>
@@ -7483,7 +7671,7 @@
           <a:noFill/>
         </p:spPr>
         <p:txBody>
-          <a:bodyPr wrap="square" lIns="36576" rIns="36576" tIns="27432" bIns="27432">
+          <a:bodyPr wrap="square" lIns="36576" tIns="27432" rIns="36576" bIns="27432">
             <a:spAutoFit/>
           </a:bodyPr>
           <a:lstStyle/>
@@ -7525,7 +7713,7 @@
           <a:noFill/>
         </p:spPr>
         <p:txBody>
-          <a:bodyPr wrap="square" lIns="36576" rIns="36576" tIns="27432" bIns="27432">
+          <a:bodyPr wrap="square" lIns="36576" tIns="27432" rIns="36576" bIns="27432">
             <a:spAutoFit/>
           </a:bodyPr>
           <a:lstStyle/>
@@ -7609,6 +7797,7 @@
           <a:lstStyle/>
           <a:p>
             <a:pPr algn="ctr"/>
+            <a:endParaRPr/>
           </a:p>
         </p:txBody>
       </p:sp>
@@ -7654,6 +7843,7 @@
           <a:lstStyle/>
           <a:p>
             <a:pPr algn="ctr"/>
+            <a:endParaRPr/>
           </a:p>
         </p:txBody>
       </p:sp>
@@ -7674,7 +7864,7 @@
           <a:noFill/>
         </p:spPr>
         <p:txBody>
-          <a:bodyPr wrap="square" lIns="36576" rIns="36576" tIns="27432" bIns="27432">
+          <a:bodyPr wrap="square" lIns="36576" tIns="27432" rIns="36576" bIns="27432">
             <a:spAutoFit/>
           </a:bodyPr>
           <a:lstStyle/>
@@ -7716,7 +7906,7 @@
           <a:noFill/>
         </p:spPr>
         <p:txBody>
-          <a:bodyPr wrap="square" lIns="36576" rIns="36576" tIns="27432" bIns="27432">
+          <a:bodyPr wrap="square" lIns="36576" tIns="27432" rIns="36576" bIns="27432">
             <a:spAutoFit/>
           </a:bodyPr>
           <a:lstStyle/>
@@ -7800,6 +7990,7 @@
           <a:lstStyle/>
           <a:p>
             <a:pPr algn="ctr"/>
+            <a:endParaRPr/>
           </a:p>
         </p:txBody>
       </p:sp>
@@ -7845,6 +8036,7 @@
           <a:lstStyle/>
           <a:p>
             <a:pPr algn="ctr"/>
+            <a:endParaRPr/>
           </a:p>
         </p:txBody>
       </p:sp>
@@ -7865,7 +8057,7 @@
           <a:noFill/>
         </p:spPr>
         <p:txBody>
-          <a:bodyPr wrap="square" lIns="36576" rIns="36576" tIns="27432" bIns="27432">
+          <a:bodyPr wrap="square" lIns="36576" tIns="27432" rIns="36576" bIns="27432">
             <a:spAutoFit/>
           </a:bodyPr>
           <a:lstStyle/>
@@ -7907,7 +8099,7 @@
           <a:noFill/>
         </p:spPr>
         <p:txBody>
-          <a:bodyPr wrap="square" lIns="36576" rIns="36576" tIns="27432" bIns="27432">
+          <a:bodyPr wrap="square" lIns="36576" tIns="27432" rIns="36576" bIns="27432">
             <a:spAutoFit/>
           </a:bodyPr>
           <a:lstStyle/>
@@ -7991,6 +8183,7 @@
           <a:lstStyle/>
           <a:p>
             <a:pPr algn="ctr"/>
+            <a:endParaRPr/>
           </a:p>
         </p:txBody>
       </p:sp>
@@ -8036,6 +8229,7 @@
           <a:lstStyle/>
           <a:p>
             <a:pPr algn="ctr"/>
+            <a:endParaRPr/>
           </a:p>
         </p:txBody>
       </p:sp>
@@ -8056,7 +8250,7 @@
           <a:noFill/>
         </p:spPr>
         <p:txBody>
-          <a:bodyPr wrap="square" lIns="36576" rIns="36576" tIns="27432" bIns="27432">
+          <a:bodyPr wrap="square" lIns="36576" tIns="27432" rIns="36576" bIns="27432">
             <a:spAutoFit/>
           </a:bodyPr>
           <a:lstStyle/>
@@ -8098,7 +8292,7 @@
           <a:noFill/>
         </p:spPr>
         <p:txBody>
-          <a:bodyPr wrap="square" lIns="36576" rIns="36576" tIns="27432" bIns="27432">
+          <a:bodyPr wrap="square" lIns="36576" tIns="27432" rIns="36576" bIns="27432">
             <a:spAutoFit/>
           </a:bodyPr>
           <a:lstStyle/>
@@ -8159,7 +8353,7 @@
           <a:noFill/>
         </p:spPr>
         <p:txBody>
-          <a:bodyPr wrap="square" lIns="36576" rIns="36576" tIns="27432" bIns="27432">
+          <a:bodyPr wrap="square" lIns="36576" tIns="27432" rIns="36576" bIns="27432">
             <a:spAutoFit/>
           </a:bodyPr>
           <a:lstStyle/>
@@ -8201,7 +8395,7 @@
           <a:noFill/>
         </p:spPr>
         <p:txBody>
-          <a:bodyPr wrap="square" lIns="36576" rIns="36576" tIns="27432" bIns="27432">
+          <a:bodyPr wrap="square" lIns="36576" tIns="27432" rIns="36576" bIns="27432">
             <a:spAutoFit/>
           </a:bodyPr>
           <a:lstStyle/>
@@ -8254,7 +8448,7 @@
 </file>
 
 <file path=ppt/slides/slide11.xml><?xml version="1.0" encoding="utf-8"?>
-<p:sld xmlns:p="http://schemas.openxmlformats.org/presentationml/2006/main" xmlns:a="http://schemas.openxmlformats.org/drawingml/2006/main" xmlns:r="http://schemas.openxmlformats.org/officeDocument/2006/relationships">
+<p:sld xmlns:a="http://schemas.openxmlformats.org/drawingml/2006/main" xmlns:r="http://schemas.openxmlformats.org/officeDocument/2006/relationships" xmlns:p="http://schemas.openxmlformats.org/presentationml/2006/main">
   <p:cSld>
     <p:spTree>
       <p:nvGrpSpPr>
@@ -8272,12 +8466,12 @@
       </p:grpSpPr>
       <p:grpSp>
         <p:nvGrpSpPr>
-          <p:cNvPr name="Group 2" id="2"/>
+          <p:cNvPr id="2" name="Group 2"/>
           <p:cNvGrpSpPr/>
           <p:nvPr/>
         </p:nvGrpSpPr>
         <p:grpSpPr>
-          <a:xfrm rot="0">
+          <a:xfrm>
             <a:off x="0" y="-268747"/>
             <a:ext cx="30733015" cy="2895405"/>
             <a:chOff x="0" y="0"/>
@@ -8286,12 +8480,12 @@
         </p:grpSpPr>
         <p:sp>
           <p:nvSpPr>
-            <p:cNvPr name="Freeform 3" id="3"/>
+            <p:cNvPr id="3" name="Freeform 3"/>
             <p:cNvSpPr/>
             <p:nvPr/>
           </p:nvSpPr>
           <p:spPr>
-            <a:xfrm flipH="false" flipV="false" rot="0">
+            <a:xfrm>
               <a:off x="0" y="0"/>
               <a:ext cx="8094292" cy="762576"/>
             </a:xfrm>
@@ -8300,9 +8494,9 @@
               <a:gdLst/>
               <a:ahLst/>
               <a:cxnLst/>
-              <a:rect r="r" b="b" t="t" l="l"/>
+              <a:rect l="l" t="t" r="r" b="b"/>
               <a:pathLst>
-                <a:path h="762576" w="8094292">
+                <a:path w="8094292" h="762576">
                   <a:moveTo>
                     <a:pt x="0" y="0"/>
                   </a:moveTo>
@@ -8319,7 +8513,7 @@
                 </a:path>
               </a:pathLst>
             </a:custGeom>
-            <a:gradFill rotWithShape="true">
+            <a:gradFill rotWithShape="1">
               <a:gsLst>
                 <a:gs pos="0">
                   <a:srgbClr val="030F7D">
@@ -8338,8 +8532,8 @@
         </p:sp>
         <p:sp>
           <p:nvSpPr>
-            <p:cNvPr name="TextBox 4" id="4"/>
-            <p:cNvSpPr txBox="true"/>
+            <p:cNvPr id="4" name="TextBox 4"/>
+            <p:cNvSpPr txBox="1"/>
             <p:nvPr/>
           </p:nvSpPr>
           <p:spPr>
@@ -8352,7 +8546,7 @@
             </a:prstGeom>
           </p:spPr>
           <p:txBody>
-            <a:bodyPr anchor="ctr" rtlCol="false" tIns="50800" lIns="50800" bIns="50800" rIns="50800"/>
+            <a:bodyPr lIns="50800" tIns="50800" rIns="50800" bIns="50800" rtlCol="0" anchor="ctr"/>
             <a:lstStyle/>
             <a:p>
               <a:pPr algn="ctr">
@@ -8363,18 +8557,19 @@
                   <a:spcPct val="0"/>
                 </a:spcBef>
               </a:pPr>
+              <a:endParaRPr/>
             </a:p>
           </p:txBody>
         </p:sp>
       </p:grpSp>
       <p:sp>
         <p:nvSpPr>
-          <p:cNvPr name="TextBox 9" id="9"/>
-          <p:cNvSpPr txBox="true"/>
-          <p:nvPr/>
-        </p:nvSpPr>
-        <p:spPr>
-          <a:xfrm rot="0">
+          <p:cNvPr id="9" name="TextBox 9"/>
+          <p:cNvSpPr txBox="1"/>
+          <p:nvPr/>
+        </p:nvSpPr>
+        <p:spPr>
+          <a:xfrm>
             <a:off x="1028700" y="643336"/>
             <a:ext cx="16093440" cy="1828800"/>
           </a:xfrm>
@@ -8383,7 +8578,7 @@
           </a:prstGeom>
         </p:spPr>
         <p:txBody>
-          <a:bodyPr anchor="t" rtlCol="false" tIns="0" lIns="0" bIns="0" rIns="0">
+          <a:bodyPr lIns="0" tIns="0" rIns="0" bIns="0" rtlCol="0" anchor="t">
             <a:spAutoFit/>
           </a:bodyPr>
           <a:lstStyle/>
@@ -8397,7 +8592,7 @@
               </a:spcAft>
             </a:pPr>
             <a:r>
-              <a:rPr lang="en-US" sz="5000" b="true">
+              <a:rPr lang="en-US" sz="5000" b="1">
                 <a:solidFill>
                   <a:srgbClr val="FFDC51"/>
                 </a:solidFill>
@@ -8419,7 +8614,7 @@
               </a:spcAft>
             </a:pPr>
             <a:r>
-              <a:rPr lang="en-US" sz="5000" b="true">
+              <a:rPr lang="en-US" sz="5000" b="1">
                 <a:solidFill>
                   <a:srgbClr val="FFDC51"/>
                 </a:solidFill>
@@ -8450,7 +8645,7 @@
           <a:noFill/>
         </p:spPr>
         <p:txBody>
-          <a:bodyPr wrap="square" lIns="36576" rIns="36576" tIns="27432" bIns="27432">
+          <a:bodyPr wrap="square" lIns="36576" tIns="27432" rIns="36576" bIns="27432">
             <a:spAutoFit/>
           </a:bodyPr>
           <a:lstStyle/>
@@ -8492,7 +8687,7 @@
           <a:noFill/>
         </p:spPr>
         <p:txBody>
-          <a:bodyPr wrap="square" lIns="36576" rIns="36576" tIns="27432" bIns="27432">
+          <a:bodyPr wrap="square" lIns="36576" tIns="27432" rIns="36576" bIns="27432">
             <a:spAutoFit/>
           </a:bodyPr>
           <a:lstStyle/>
@@ -8526,7 +8721,7 @@
           <p:nvPr/>
         </p:nvPicPr>
         <p:blipFill>
-          <a:blip r:embed="rId6"/>
+          <a:blip r:embed="rId3"/>
           <a:stretch>
             <a:fillRect/>
           </a:stretch>
@@ -8583,6 +8778,7 @@
           <a:lstStyle/>
           <a:p>
             <a:pPr algn="ctr"/>
+            <a:endParaRPr/>
           </a:p>
         </p:txBody>
       </p:sp>
@@ -8603,7 +8799,7 @@
           <a:noFill/>
         </p:spPr>
         <p:txBody>
-          <a:bodyPr wrap="square" lIns="36576" rIns="36576" tIns="27432" bIns="27432">
+          <a:bodyPr wrap="square" lIns="36576" tIns="27432" rIns="36576" bIns="27432">
             <a:spAutoFit/>
           </a:bodyPr>
           <a:lstStyle/>
@@ -8645,7 +8841,7 @@
           <a:noFill/>
         </p:spPr>
         <p:txBody>
-          <a:bodyPr wrap="square" lIns="36576" rIns="36576" tIns="27432" bIns="27432">
+          <a:bodyPr wrap="square" lIns="36576" tIns="27432" rIns="36576" bIns="27432">
             <a:spAutoFit/>
           </a:bodyPr>
           <a:lstStyle/>
@@ -8725,7 +8921,7 @@
           <a:noFill/>
         </p:spPr>
         <p:txBody>
-          <a:bodyPr wrap="square" lIns="36576" rIns="36576" tIns="27432" bIns="27432">
+          <a:bodyPr wrap="square" lIns="36576" tIns="27432" rIns="36576" bIns="27432">
             <a:spAutoFit/>
           </a:bodyPr>
           <a:lstStyle/>
@@ -8776,15 +8972,12 @@
                 <a:spcPts val="900"/>
               </a:spcAft>
             </a:pPr>
-            <a:r>
-              <a:rPr sz="2200" b="0">
-                <a:solidFill>
-                  <a:srgbClr val="202329"/>
-                </a:solidFill>
-                <a:latin typeface="Poppins"/>
-              </a:rPr>
-              <a:t/>
-            </a:r>
+            <a:endParaRPr sz="2200" b="0">
+              <a:solidFill>
+                <a:srgbClr val="202329"/>
+              </a:solidFill>
+              <a:latin typeface="Poppins"/>
+            </a:endParaRPr>
           </a:p>
           <a:p>
             <a:pPr algn="l">
@@ -8835,7 +9028,7 @@
 </file>
 
 <file path=ppt/slides/slide12.xml><?xml version="1.0" encoding="utf-8"?>
-<p:sld xmlns:p="http://schemas.openxmlformats.org/presentationml/2006/main" xmlns:a="http://schemas.openxmlformats.org/drawingml/2006/main">
+<p:sld xmlns:a="http://schemas.openxmlformats.org/drawingml/2006/main" xmlns:r="http://schemas.openxmlformats.org/officeDocument/2006/relationships" xmlns:p="http://schemas.openxmlformats.org/presentationml/2006/main">
   <p:cSld>
     <p:spTree>
       <p:nvGrpSpPr>
@@ -8853,12 +9046,12 @@
       </p:grpSpPr>
       <p:grpSp>
         <p:nvGrpSpPr>
-          <p:cNvPr name="Group 2" id="2"/>
+          <p:cNvPr id="2" name="Group 2"/>
           <p:cNvGrpSpPr/>
           <p:nvPr/>
         </p:nvGrpSpPr>
         <p:grpSpPr>
-          <a:xfrm rot="0">
+          <a:xfrm>
             <a:off x="0" y="-268747"/>
             <a:ext cx="30733015" cy="2895405"/>
             <a:chOff x="0" y="0"/>
@@ -8867,12 +9060,12 @@
         </p:grpSpPr>
         <p:sp>
           <p:nvSpPr>
-            <p:cNvPr name="Freeform 3" id="3"/>
+            <p:cNvPr id="3" name="Freeform 3"/>
             <p:cNvSpPr/>
             <p:nvPr/>
           </p:nvSpPr>
           <p:spPr>
-            <a:xfrm flipH="false" flipV="false" rot="0">
+            <a:xfrm>
               <a:off x="0" y="0"/>
               <a:ext cx="8094292" cy="762576"/>
             </a:xfrm>
@@ -8881,9 +9074,9 @@
               <a:gdLst/>
               <a:ahLst/>
               <a:cxnLst/>
-              <a:rect r="r" b="b" t="t" l="l"/>
+              <a:rect l="l" t="t" r="r" b="b"/>
               <a:pathLst>
-                <a:path h="762576" w="8094292">
+                <a:path w="8094292" h="762576">
                   <a:moveTo>
                     <a:pt x="0" y="0"/>
                   </a:moveTo>
@@ -8900,7 +9093,7 @@
                 </a:path>
               </a:pathLst>
             </a:custGeom>
-            <a:gradFill rotWithShape="true">
+            <a:gradFill rotWithShape="1">
               <a:gsLst>
                 <a:gs pos="0">
                   <a:srgbClr val="030F7D">
@@ -8919,8 +9112,8 @@
         </p:sp>
         <p:sp>
           <p:nvSpPr>
-            <p:cNvPr name="TextBox 4" id="4"/>
-            <p:cNvSpPr txBox="true"/>
+            <p:cNvPr id="4" name="TextBox 4"/>
+            <p:cNvSpPr txBox="1"/>
             <p:nvPr/>
           </p:nvSpPr>
           <p:spPr>
@@ -8933,7 +9126,7 @@
             </a:prstGeom>
           </p:spPr>
           <p:txBody>
-            <a:bodyPr anchor="ctr" rtlCol="false" tIns="50800" lIns="50800" bIns="50800" rIns="50800"/>
+            <a:bodyPr lIns="50800" tIns="50800" rIns="50800" bIns="50800" rtlCol="0" anchor="ctr"/>
             <a:lstStyle/>
             <a:p>
               <a:pPr algn="ctr">
@@ -8944,18 +9137,19 @@
                   <a:spcPct val="0"/>
                 </a:spcBef>
               </a:pPr>
+              <a:endParaRPr/>
             </a:p>
           </p:txBody>
         </p:sp>
       </p:grpSp>
       <p:sp>
         <p:nvSpPr>
-          <p:cNvPr name="TextBox 7" id="7"/>
-          <p:cNvSpPr txBox="true"/>
-          <p:nvPr/>
-        </p:nvSpPr>
-        <p:spPr>
-          <a:xfrm rot="0">
+          <p:cNvPr id="7" name="TextBox 7"/>
+          <p:cNvSpPr txBox="1"/>
+          <p:nvPr/>
+        </p:nvSpPr>
+        <p:spPr>
+          <a:xfrm>
             <a:off x="1028700" y="643336"/>
             <a:ext cx="16093440" cy="1828800"/>
           </a:xfrm>
@@ -8964,7 +9158,7 @@
           </a:prstGeom>
         </p:spPr>
         <p:txBody>
-          <a:bodyPr anchor="t" rtlCol="false" tIns="0" lIns="0" bIns="0" rIns="0">
+          <a:bodyPr lIns="0" tIns="0" rIns="0" bIns="0" rtlCol="0" anchor="t">
             <a:spAutoFit/>
           </a:bodyPr>
           <a:lstStyle/>
@@ -8978,7 +9172,7 @@
               </a:spcAft>
             </a:pPr>
             <a:r>
-              <a:rPr lang="en-US" sz="5000" b="true">
+              <a:rPr lang="en-US" sz="5000" b="1">
                 <a:solidFill>
                   <a:srgbClr val="FFDC51"/>
                 </a:solidFill>
@@ -9000,7 +9194,7 @@
               </a:spcAft>
             </a:pPr>
             <a:r>
-              <a:rPr lang="en-US" sz="5000" b="true">
+              <a:rPr lang="en-US" sz="5000" b="1">
                 <a:solidFill>
                   <a:srgbClr val="FFDC51"/>
                 </a:solidFill>
@@ -9031,7 +9225,7 @@
           <a:noFill/>
         </p:spPr>
         <p:txBody>
-          <a:bodyPr wrap="square" lIns="36576" rIns="36576" tIns="27432" bIns="27432">
+          <a:bodyPr wrap="square" lIns="36576" tIns="27432" rIns="36576" bIns="27432">
             <a:spAutoFit/>
           </a:bodyPr>
           <a:lstStyle/>
@@ -9073,7 +9267,7 @@
           <a:noFill/>
         </p:spPr>
         <p:txBody>
-          <a:bodyPr wrap="square" lIns="36576" rIns="36576" tIns="27432" bIns="27432">
+          <a:bodyPr wrap="square" lIns="36576" tIns="27432" rIns="36576" bIns="27432">
             <a:spAutoFit/>
           </a:bodyPr>
           <a:lstStyle/>
@@ -9098,7 +9292,7 @@
           </a:p>
         </p:txBody>
       </p:sp>
-      <p:pic xmlns:r="http://schemas.openxmlformats.org/officeDocument/2006/relationships">
+      <p:pic>
         <p:nvPicPr>
           <p:cNvPr id="10" name="Picture 9" descr="planned-cost.png"/>
           <p:cNvPicPr>
@@ -9164,6 +9358,7 @@
           <a:lstStyle/>
           <a:p>
             <a:pPr algn="ctr"/>
+            <a:endParaRPr/>
           </a:p>
         </p:txBody>
       </p:sp>
@@ -9184,7 +9379,7 @@
           <a:noFill/>
         </p:spPr>
         <p:txBody>
-          <a:bodyPr wrap="square" lIns="36576" rIns="36576" tIns="27432" bIns="27432">
+          <a:bodyPr wrap="square" lIns="36576" tIns="27432" rIns="36576" bIns="27432">
             <a:spAutoFit/>
           </a:bodyPr>
           <a:lstStyle/>
@@ -9226,7 +9421,7 @@
           <a:noFill/>
         </p:spPr>
         <p:txBody>
-          <a:bodyPr wrap="square" lIns="36576" rIns="36576" tIns="27432" bIns="27432">
+          <a:bodyPr wrap="square" lIns="36576" tIns="27432" rIns="36576" bIns="27432">
             <a:spAutoFit/>
           </a:bodyPr>
           <a:lstStyle/>
@@ -9331,6 +9526,7 @@
           <a:lstStyle/>
           <a:p>
             <a:pPr algn="ctr"/>
+            <a:endParaRPr/>
           </a:p>
         </p:txBody>
       </p:sp>
@@ -9351,7 +9547,7 @@
           <a:noFill/>
         </p:spPr>
         <p:txBody>
-          <a:bodyPr wrap="square" lIns="36576" rIns="36576" tIns="27432" bIns="27432">
+          <a:bodyPr wrap="square" lIns="36576" tIns="27432" rIns="36576" bIns="27432">
             <a:spAutoFit/>
           </a:bodyPr>
           <a:lstStyle/>
@@ -9393,7 +9589,7 @@
           <a:noFill/>
         </p:spPr>
         <p:txBody>
-          <a:bodyPr wrap="square" lIns="36576" rIns="36576" tIns="27432" bIns="27432">
+          <a:bodyPr wrap="square" lIns="36576" tIns="27432" rIns="36576" bIns="27432">
             <a:spAutoFit/>
           </a:bodyPr>
           <a:lstStyle/>
@@ -9473,7 +9669,7 @@
           <a:noFill/>
         </p:spPr>
         <p:txBody>
-          <a:bodyPr wrap="square" lIns="36576" rIns="36576" tIns="27432" bIns="27432">
+          <a:bodyPr wrap="square" lIns="36576" tIns="27432" rIns="36576" bIns="27432">
             <a:spAutoFit/>
           </a:bodyPr>
           <a:lstStyle/>
@@ -9507,7 +9703,7 @@
 </file>
 
 <file path=ppt/slides/slide13.xml><?xml version="1.0" encoding="utf-8"?>
-<p:sld xmlns:p="http://schemas.openxmlformats.org/presentationml/2006/main" xmlns:a="http://schemas.openxmlformats.org/drawingml/2006/main" xmlns:r="http://schemas.openxmlformats.org/officeDocument/2006/relationships">
+<p:sld xmlns:a="http://schemas.openxmlformats.org/drawingml/2006/main" xmlns:r="http://schemas.openxmlformats.org/officeDocument/2006/relationships" xmlns:p="http://schemas.openxmlformats.org/presentationml/2006/main">
   <p:cSld>
     <p:spTree>
       <p:nvGrpSpPr>
@@ -9525,12 +9721,12 @@
       </p:grpSpPr>
       <p:grpSp>
         <p:nvGrpSpPr>
-          <p:cNvPr name="Group 2" id="2"/>
+          <p:cNvPr id="2" name="Group 2"/>
           <p:cNvGrpSpPr/>
           <p:nvPr/>
         </p:nvGrpSpPr>
         <p:grpSpPr>
-          <a:xfrm rot="0">
+          <a:xfrm>
             <a:off x="0" y="-268747"/>
             <a:ext cx="30733015" cy="2895405"/>
             <a:chOff x="0" y="0"/>
@@ -9539,12 +9735,12 @@
         </p:grpSpPr>
         <p:sp>
           <p:nvSpPr>
-            <p:cNvPr name="Freeform 3" id="3"/>
+            <p:cNvPr id="3" name="Freeform 3"/>
             <p:cNvSpPr/>
             <p:nvPr/>
           </p:nvSpPr>
           <p:spPr>
-            <a:xfrm flipH="false" flipV="false" rot="0">
+            <a:xfrm>
               <a:off x="0" y="0"/>
               <a:ext cx="8094292" cy="762576"/>
             </a:xfrm>
@@ -9553,9 +9749,9 @@
               <a:gdLst/>
               <a:ahLst/>
               <a:cxnLst/>
-              <a:rect r="r" b="b" t="t" l="l"/>
+              <a:rect l="l" t="t" r="r" b="b"/>
               <a:pathLst>
-                <a:path h="762576" w="8094292">
+                <a:path w="8094292" h="762576">
                   <a:moveTo>
                     <a:pt x="0" y="0"/>
                   </a:moveTo>
@@ -9572,7 +9768,7 @@
                 </a:path>
               </a:pathLst>
             </a:custGeom>
-            <a:gradFill rotWithShape="true">
+            <a:gradFill rotWithShape="1">
               <a:gsLst>
                 <a:gs pos="0">
                   <a:srgbClr val="030F7D">
@@ -9591,8 +9787,8 @@
         </p:sp>
         <p:sp>
           <p:nvSpPr>
-            <p:cNvPr name="TextBox 4" id="4"/>
-            <p:cNvSpPr txBox="true"/>
+            <p:cNvPr id="4" name="TextBox 4"/>
+            <p:cNvSpPr txBox="1"/>
             <p:nvPr/>
           </p:nvSpPr>
           <p:spPr>
@@ -9605,7 +9801,7 @@
             </a:prstGeom>
           </p:spPr>
           <p:txBody>
-            <a:bodyPr anchor="ctr" rtlCol="false" tIns="50800" lIns="50800" bIns="50800" rIns="50800"/>
+            <a:bodyPr lIns="50800" tIns="50800" rIns="50800" bIns="50800" rtlCol="0" anchor="ctr"/>
             <a:lstStyle/>
             <a:p>
               <a:pPr algn="ctr">
@@ -9616,18 +9812,19 @@
                   <a:spcPct val="0"/>
                 </a:spcBef>
               </a:pPr>
+              <a:endParaRPr/>
             </a:p>
           </p:txBody>
         </p:sp>
       </p:grpSp>
       <p:sp>
         <p:nvSpPr>
-          <p:cNvPr name="TextBox 8" id="8"/>
-          <p:cNvSpPr txBox="true"/>
-          <p:nvPr/>
-        </p:nvSpPr>
-        <p:spPr>
-          <a:xfrm rot="0">
+          <p:cNvPr id="8" name="TextBox 8"/>
+          <p:cNvSpPr txBox="1"/>
+          <p:nvPr/>
+        </p:nvSpPr>
+        <p:spPr>
+          <a:xfrm>
             <a:off x="1028700" y="643336"/>
             <a:ext cx="16093440" cy="1828800"/>
           </a:xfrm>
@@ -9636,7 +9833,7 @@
           </a:prstGeom>
         </p:spPr>
         <p:txBody>
-          <a:bodyPr anchor="t" rtlCol="false" tIns="0" lIns="0" bIns="0" rIns="0">
+          <a:bodyPr lIns="0" tIns="0" rIns="0" bIns="0" rtlCol="0" anchor="t">
             <a:spAutoFit/>
           </a:bodyPr>
           <a:lstStyle/>
@@ -9650,7 +9847,7 @@
               </a:spcAft>
             </a:pPr>
             <a:r>
-              <a:rPr lang="en-US" sz="5000" b="true">
+              <a:rPr lang="en-US" sz="5000" b="1">
                 <a:solidFill>
                   <a:srgbClr val="FFDC51"/>
                 </a:solidFill>
@@ -9672,7 +9869,7 @@
               </a:spcAft>
             </a:pPr>
             <a:r>
-              <a:rPr lang="en-US" sz="5000" b="true">
+              <a:rPr lang="en-US" sz="5000" b="1">
                 <a:solidFill>
                   <a:srgbClr val="FFDC51"/>
                 </a:solidFill>
@@ -9703,7 +9900,7 @@
           <a:noFill/>
         </p:spPr>
         <p:txBody>
-          <a:bodyPr wrap="square" lIns="36576" rIns="36576" tIns="27432" bIns="27432">
+          <a:bodyPr wrap="square" lIns="36576" tIns="27432" rIns="36576" bIns="27432">
             <a:spAutoFit/>
           </a:bodyPr>
           <a:lstStyle/>
@@ -9745,7 +9942,7 @@
           <a:noFill/>
         </p:spPr>
         <p:txBody>
-          <a:bodyPr wrap="square" lIns="36576" rIns="36576" tIns="27432" bIns="27432">
+          <a:bodyPr wrap="square" lIns="36576" tIns="27432" rIns="36576" bIns="27432">
             <a:spAutoFit/>
           </a:bodyPr>
           <a:lstStyle/>
@@ -9789,8 +9986,20 @@
                 <a:tableStyleId>{5C22544A-7EE6-4342-B048-85BDC9FD1C3A}</a:tableStyleId>
               </a:tblPr>
               <a:tblGrid>
-                <a:gridCol w="4663440"/>
-                <a:gridCol w="11338560"/>
+                <a:gridCol w="4663440">
+                  <a:extLst>
+                    <a:ext uri="{9D8B030D-6E8A-4147-A177-3AD203B41FA5}">
+                      <a16:colId xmlns:a16="http://schemas.microsoft.com/office/drawing/2014/main" val="20000"/>
+                    </a:ext>
+                  </a:extLst>
+                </a:gridCol>
+                <a:gridCol w="11338560">
+                  <a:extLst>
+                    <a:ext uri="{9D8B030D-6E8A-4147-A177-3AD203B41FA5}">
+                      <a16:colId xmlns:a16="http://schemas.microsoft.com/office/drawing/2014/main" val="20001"/>
+                    </a:ext>
+                  </a:extLst>
+                </a:gridCol>
               </a:tblGrid>
               <a:tr h="658367">
                 <a:tc>
@@ -9837,6 +10046,11 @@
                     </a:solidFill>
                   </a:tcPr>
                 </a:tc>
+                <a:extLst>
+                  <a:ext uri="{0D108BD9-81ED-4DB2-BD59-A6C34878D82A}">
+                    <a16:rowId xmlns:a16="http://schemas.microsoft.com/office/drawing/2014/main" val="10000"/>
+                  </a:ext>
+                </a:extLst>
               </a:tr>
               <a:tr h="658367">
                 <a:tc>
@@ -9883,6 +10097,11 @@
                     </a:solidFill>
                   </a:tcPr>
                 </a:tc>
+                <a:extLst>
+                  <a:ext uri="{0D108BD9-81ED-4DB2-BD59-A6C34878D82A}">
+                    <a16:rowId xmlns:a16="http://schemas.microsoft.com/office/drawing/2014/main" val="10001"/>
+                  </a:ext>
+                </a:extLst>
               </a:tr>
               <a:tr h="658367">
                 <a:tc>
@@ -9929,6 +10148,11 @@
                     </a:solidFill>
                   </a:tcPr>
                 </a:tc>
+                <a:extLst>
+                  <a:ext uri="{0D108BD9-81ED-4DB2-BD59-A6C34878D82A}">
+                    <a16:rowId xmlns:a16="http://schemas.microsoft.com/office/drawing/2014/main" val="10002"/>
+                  </a:ext>
+                </a:extLst>
               </a:tr>
               <a:tr h="658367">
                 <a:tc>
@@ -9975,6 +10199,11 @@
                     </a:solidFill>
                   </a:tcPr>
                 </a:tc>
+                <a:extLst>
+                  <a:ext uri="{0D108BD9-81ED-4DB2-BD59-A6C34878D82A}">
+                    <a16:rowId xmlns:a16="http://schemas.microsoft.com/office/drawing/2014/main" val="10003"/>
+                  </a:ext>
+                </a:extLst>
               </a:tr>
               <a:tr h="658371">
                 <a:tc>
@@ -10021,6 +10250,11 @@
                     </a:solidFill>
                   </a:tcPr>
                 </a:tc>
+                <a:extLst>
+                  <a:ext uri="{0D108BD9-81ED-4DB2-BD59-A6C34878D82A}">
+                    <a16:rowId xmlns:a16="http://schemas.microsoft.com/office/drawing/2014/main" val="10004"/>
+                  </a:ext>
+                </a:extLst>
               </a:tr>
             </a:tbl>
           </a:graphicData>
@@ -10043,7 +10277,7 @@
           <a:noFill/>
         </p:spPr>
         <p:txBody>
-          <a:bodyPr wrap="square" lIns="36576" rIns="36576" tIns="27432" bIns="27432">
+          <a:bodyPr wrap="square" lIns="36576" tIns="27432" rIns="36576" bIns="27432">
             <a:spAutoFit/>
           </a:bodyPr>
           <a:lstStyle/>
@@ -10085,7 +10319,7 @@
           <a:noFill/>
         </p:spPr>
         <p:txBody>
-          <a:bodyPr wrap="square" lIns="36576" rIns="36576" tIns="27432" bIns="27432">
+          <a:bodyPr wrap="square" lIns="36576" tIns="27432" rIns="36576" bIns="27432">
             <a:spAutoFit/>
           </a:bodyPr>
           <a:lstStyle/>
@@ -10119,7 +10353,7 @@
 </file>
 
 <file path=ppt/slides/slide14.xml><?xml version="1.0" encoding="utf-8"?>
-<p:sld xmlns:p="http://schemas.openxmlformats.org/presentationml/2006/main" xmlns:a="http://schemas.openxmlformats.org/drawingml/2006/main" xmlns:r="http://schemas.openxmlformats.org/officeDocument/2006/relationships">
+<p:sld xmlns:a="http://schemas.openxmlformats.org/drawingml/2006/main" xmlns:r="http://schemas.openxmlformats.org/officeDocument/2006/relationships" xmlns:p="http://schemas.openxmlformats.org/presentationml/2006/main">
   <p:cSld>
     <p:spTree>
       <p:nvGrpSpPr>
@@ -10137,12 +10371,12 @@
       </p:grpSpPr>
       <p:grpSp>
         <p:nvGrpSpPr>
-          <p:cNvPr name="Group 2" id="2"/>
+          <p:cNvPr id="2" name="Group 2"/>
           <p:cNvGrpSpPr/>
           <p:nvPr/>
         </p:nvGrpSpPr>
         <p:grpSpPr>
-          <a:xfrm rot="0">
+          <a:xfrm>
             <a:off x="0" y="-268747"/>
             <a:ext cx="30733015" cy="2895405"/>
             <a:chOff x="0" y="0"/>
@@ -10151,12 +10385,12 @@
         </p:grpSpPr>
         <p:sp>
           <p:nvSpPr>
-            <p:cNvPr name="Freeform 3" id="3"/>
+            <p:cNvPr id="3" name="Freeform 3"/>
             <p:cNvSpPr/>
             <p:nvPr/>
           </p:nvSpPr>
           <p:spPr>
-            <a:xfrm flipH="false" flipV="false" rot="0">
+            <a:xfrm>
               <a:off x="0" y="0"/>
               <a:ext cx="8094292" cy="762576"/>
             </a:xfrm>
@@ -10165,9 +10399,9 @@
               <a:gdLst/>
               <a:ahLst/>
               <a:cxnLst/>
-              <a:rect r="r" b="b" t="t" l="l"/>
+              <a:rect l="l" t="t" r="r" b="b"/>
               <a:pathLst>
-                <a:path h="762576" w="8094292">
+                <a:path w="8094292" h="762576">
                   <a:moveTo>
                     <a:pt x="0" y="0"/>
                   </a:moveTo>
@@ -10184,7 +10418,7 @@
                 </a:path>
               </a:pathLst>
             </a:custGeom>
-            <a:gradFill rotWithShape="true">
+            <a:gradFill rotWithShape="1">
               <a:gsLst>
                 <a:gs pos="0">
                   <a:srgbClr val="030F7D">
@@ -10203,8 +10437,8 @@
         </p:sp>
         <p:sp>
           <p:nvSpPr>
-            <p:cNvPr name="TextBox 4" id="4"/>
-            <p:cNvSpPr txBox="true"/>
+            <p:cNvPr id="4" name="TextBox 4"/>
+            <p:cNvSpPr txBox="1"/>
             <p:nvPr/>
           </p:nvSpPr>
           <p:spPr>
@@ -10217,7 +10451,7 @@
             </a:prstGeom>
           </p:spPr>
           <p:txBody>
-            <a:bodyPr anchor="ctr" rtlCol="false" tIns="50800" lIns="50800" bIns="50800" rIns="50800"/>
+            <a:bodyPr lIns="50800" tIns="50800" rIns="50800" bIns="50800" rtlCol="0" anchor="ctr"/>
             <a:lstStyle/>
             <a:p>
               <a:pPr algn="ctr">
@@ -10228,18 +10462,19 @@
                   <a:spcPct val="0"/>
                 </a:spcBef>
               </a:pPr>
+              <a:endParaRPr/>
             </a:p>
           </p:txBody>
         </p:sp>
       </p:grpSp>
       <p:sp>
         <p:nvSpPr>
-          <p:cNvPr name="TextBox 7" id="7"/>
-          <p:cNvSpPr txBox="true"/>
-          <p:nvPr/>
-        </p:nvSpPr>
-        <p:spPr>
-          <a:xfrm rot="0">
+          <p:cNvPr id="7" name="TextBox 7"/>
+          <p:cNvSpPr txBox="1"/>
+          <p:nvPr/>
+        </p:nvSpPr>
+        <p:spPr>
+          <a:xfrm>
             <a:off x="1028700" y="1025061"/>
             <a:ext cx="16093440" cy="914400"/>
           </a:xfrm>
@@ -10248,7 +10483,7 @@
           </a:prstGeom>
         </p:spPr>
         <p:txBody>
-          <a:bodyPr anchor="t" rtlCol="false" tIns="0" lIns="0" bIns="0" rIns="0">
+          <a:bodyPr lIns="0" tIns="0" rIns="0" bIns="0" rtlCol="0" anchor="t">
             <a:spAutoFit/>
           </a:bodyPr>
           <a:lstStyle/>
@@ -10293,7 +10528,7 @@
           <a:noFill/>
         </p:spPr>
         <p:txBody>
-          <a:bodyPr wrap="square" lIns="36576" rIns="36576" tIns="27432" bIns="27432">
+          <a:bodyPr wrap="square" lIns="36576" tIns="27432" rIns="36576" bIns="27432">
             <a:spAutoFit/>
           </a:bodyPr>
           <a:lstStyle/>
@@ -10335,7 +10570,7 @@
           <a:noFill/>
         </p:spPr>
         <p:txBody>
-          <a:bodyPr wrap="square" lIns="36576" rIns="36576" tIns="27432" bIns="27432">
+          <a:bodyPr wrap="square" lIns="36576" tIns="27432" rIns="36576" bIns="27432">
             <a:spAutoFit/>
           </a:bodyPr>
           <a:lstStyle/>
@@ -10377,7 +10612,7 @@
           <a:noFill/>
         </p:spPr>
         <p:txBody>
-          <a:bodyPr wrap="square" lIns="36576" rIns="36576" tIns="27432" bIns="27432">
+          <a:bodyPr wrap="square" lIns="36576" tIns="27432" rIns="36576" bIns="27432">
             <a:spAutoFit/>
           </a:bodyPr>
           <a:lstStyle/>
@@ -10428,6 +10663,22 @@
                 <a:spcPts val="900"/>
               </a:spcAft>
             </a:pPr>
+            <a:endParaRPr sz="2400" b="0">
+              <a:solidFill>
+                <a:srgbClr val="202329"/>
+              </a:solidFill>
+              <a:latin typeface="Poppins"/>
+            </a:endParaRPr>
+          </a:p>
+          <a:p>
+            <a:pPr algn="l">
+              <a:lnSpc>
+                <a:spcPct val="112000"/>
+              </a:lnSpc>
+              <a:spcAft>
+                <a:spcPts val="900"/>
+              </a:spcAft>
+            </a:pPr>
             <a:r>
               <a:rPr sz="2400" b="0">
                 <a:solidFill>
@@ -10435,7 +10686,7 @@
                 </a:solidFill>
                 <a:latin typeface="Poppins"/>
               </a:rPr>
-              <a:t/>
+              <a:t>[2] ITCS355, "Capstone Project Brief," course/project/project-brief.md.</a:t>
             </a:r>
           </a:p>
           <a:p>
@@ -10454,7 +10705,7 @@
                 </a:solidFill>
                 <a:latin typeface="Poppins"/>
               </a:rPr>
-              <a:t>[2] ITCS355, "Capstone Project Brief," course/project/project-brief.md.</a:t>
+              <a:t>Presentation: 8 minutes + 5 minutes of questions.</a:t>
             </a:r>
           </a:p>
           <a:p>
@@ -10466,34 +10717,12 @@
                 <a:spcPts val="900"/>
               </a:spcAft>
             </a:pPr>
-            <a:r>
-              <a:rPr sz="2400" b="0">
-                <a:solidFill>
-                  <a:srgbClr val="202329"/>
-                </a:solidFill>
-                <a:latin typeface="Poppins"/>
-              </a:rPr>
-              <a:t>Presentation: 8 minutes + 5 minutes of questions.</a:t>
-            </a:r>
-          </a:p>
-          <a:p>
-            <a:pPr algn="l">
-              <a:lnSpc>
-                <a:spcPct val="112000"/>
-              </a:lnSpc>
-              <a:spcAft>
-                <a:spcPts val="900"/>
-              </a:spcAft>
-            </a:pPr>
-            <a:r>
-              <a:rPr sz="2400" b="0">
-                <a:solidFill>
-                  <a:srgbClr val="202329"/>
-                </a:solidFill>
-                <a:latin typeface="Poppins"/>
-              </a:rPr>
-              <a:t/>
-            </a:r>
+            <a:endParaRPr sz="2400" b="0">
+              <a:solidFill>
+                <a:srgbClr val="202329"/>
+              </a:solidFill>
+              <a:latin typeface="Poppins"/>
+            </a:endParaRPr>
           </a:p>
           <a:p>
             <a:pPr algn="l">
@@ -10552,7 +10781,7 @@
           <a:noFill/>
         </p:spPr>
         <p:txBody>
-          <a:bodyPr wrap="square" lIns="36576" rIns="36576" tIns="27432" bIns="27432">
+          <a:bodyPr wrap="square" lIns="36576" tIns="27432" rIns="36576" bIns="27432">
             <a:spAutoFit/>
           </a:bodyPr>
           <a:lstStyle/>
@@ -10571,7 +10800,7 @@
                   <a:srgbClr val="030F7D"/>
                 </a:solidFill>
                 <a:latin typeface="Poppins"/>
-                <a:hlinkClick r:id="rId6"/>
+                <a:hlinkClick r:id="rId3"/>
               </a:rPr>
               <a:t>Dataset: https://doi.org/10.24432/C5C31Q</a:t>
             </a:r>
@@ -10595,7 +10824,7 @@
           <a:noFill/>
         </p:spPr>
         <p:txBody>
-          <a:bodyPr wrap="square" lIns="36576" rIns="36576" tIns="27432" bIns="27432">
+          <a:bodyPr wrap="square" lIns="36576" tIns="27432" rIns="36576" bIns="27432">
             <a:spAutoFit/>
           </a:bodyPr>
           <a:lstStyle/>
@@ -10614,7 +10843,7 @@
                   <a:srgbClr val="030F7D"/>
                 </a:solidFill>
                 <a:latin typeface="Poppins"/>
-                <a:hlinkClick r:id="rId7"/>
+                <a:hlinkClick r:id="rId4"/>
               </a:rPr>
               <a:t>Repository: https://github.com/DewPerawis/MLOP-PJ (access required)</a:t>
             </a:r>
@@ -10630,7 +10859,7 @@
 </file>
 
 <file path=ppt/slides/slide15.xml><?xml version="1.0" encoding="utf-8"?>
-<p:sld xmlns:p="http://schemas.openxmlformats.org/presentationml/2006/main" xmlns:a="http://schemas.openxmlformats.org/drawingml/2006/main" xmlns:r="http://schemas.openxmlformats.org/officeDocument/2006/relationships">
+<p:sld xmlns:a="http://schemas.openxmlformats.org/drawingml/2006/main" xmlns:r="http://schemas.openxmlformats.org/officeDocument/2006/relationships" xmlns:p="http://schemas.openxmlformats.org/presentationml/2006/main">
   <p:cSld>
     <p:spTree>
       <p:nvGrpSpPr>
@@ -10648,12 +10877,12 @@
       </p:grpSpPr>
       <p:sp>
         <p:nvSpPr>
-          <p:cNvPr name="TextBox 2" id="2"/>
-          <p:cNvSpPr txBox="true"/>
-          <p:nvPr/>
-        </p:nvSpPr>
-        <p:spPr>
-          <a:xfrm rot="0">
+          <p:cNvPr id="2" name="TextBox 2"/>
+          <p:cNvSpPr txBox="1"/>
+          <p:nvPr/>
+        </p:nvSpPr>
+        <p:spPr>
+          <a:xfrm>
             <a:off x="2547076" y="2457430"/>
             <a:ext cx="13193847" cy="5921553"/>
           </a:xfrm>
@@ -10662,7 +10891,7 @@
           </a:prstGeom>
         </p:spPr>
         <p:txBody>
-          <a:bodyPr anchor="t" rtlCol="false" tIns="0" lIns="0" bIns="0" rIns="0">
+          <a:bodyPr lIns="0" tIns="0" rIns="0" bIns="0" rtlCol="0" anchor="t">
             <a:spAutoFit/>
           </a:bodyPr>
           <a:lstStyle/>
@@ -10713,12 +10942,12 @@
       </p:sp>
       <p:sp>
         <p:nvSpPr>
-          <p:cNvPr name="Freeform 3" id="3"/>
+          <p:cNvPr id="3" name="Freeform 3"/>
           <p:cNvSpPr/>
           <p:nvPr/>
         </p:nvSpPr>
         <p:spPr>
-          <a:xfrm flipH="false" flipV="false" rot="0">
+          <a:xfrm>
             <a:off x="8209901" y="8378984"/>
             <a:ext cx="1868198" cy="618204"/>
           </a:xfrm>
@@ -10727,9 +10956,9 @@
             <a:gdLst/>
             <a:ahLst/>
             <a:cxnLst/>
-            <a:rect r="r" b="b" t="t" l="l"/>
+            <a:rect l="l" t="t" r="r" b="b"/>
             <a:pathLst>
-              <a:path h="618204" w="1868198">
+              <a:path w="1868198" h="618204">
                 <a:moveTo>
                   <a:pt x="0" y="0"/>
                 </a:moveTo>
@@ -10750,27 +10979,27 @@
             </a:pathLst>
           </a:custGeom>
           <a:blipFill>
-            <a:blip r:embed="rId2">
+            <a:blip r:embed="rId3">
               <a:extLst>
                 <a:ext uri="{96DAC541-7B7A-43D3-8B79-37D633B846F1}">
-                  <asvg:svgBlip xmlns:asvg="http://schemas.microsoft.com/office/drawing/2016/SVG/main" r:embed="rId3"/>
+                  <asvg:svgBlip xmlns:asvg="http://schemas.microsoft.com/office/drawing/2016/SVG/main" r:embed="rId4"/>
                 </a:ext>
               </a:extLst>
             </a:blip>
             <a:stretch>
-              <a:fillRect l="0" t="0" r="0" b="0"/>
+              <a:fillRect/>
             </a:stretch>
           </a:blipFill>
         </p:spPr>
       </p:sp>
       <p:sp>
         <p:nvSpPr>
-          <p:cNvPr name="Freeform 4" id="4"/>
+          <p:cNvPr id="4" name="Freeform 4"/>
           <p:cNvSpPr/>
           <p:nvPr/>
         </p:nvSpPr>
         <p:spPr>
-          <a:xfrm flipH="false" flipV="false" rot="0">
+          <a:xfrm>
             <a:off x="13799358" y="3773503"/>
             <a:ext cx="5051790" cy="7861360"/>
           </a:xfrm>
@@ -10779,9 +11008,9 @@
             <a:gdLst/>
             <a:ahLst/>
             <a:cxnLst/>
-            <a:rect r="r" b="b" t="t" l="l"/>
+            <a:rect l="l" t="t" r="r" b="b"/>
             <a:pathLst>
-              <a:path h="7861360" w="5051790">
+              <a:path w="5051790" h="7861360">
                 <a:moveTo>
                   <a:pt x="0" y="0"/>
                 </a:moveTo>
@@ -10802,27 +11031,27 @@
             </a:pathLst>
           </a:custGeom>
           <a:blipFill>
-            <a:blip r:embed="rId4">
+            <a:blip r:embed="rId5">
               <a:extLst>
                 <a:ext uri="{96DAC541-7B7A-43D3-8B79-37D633B846F1}">
-                  <asvg:svgBlip xmlns:asvg="http://schemas.microsoft.com/office/drawing/2016/SVG/main" r:embed="rId5"/>
+                  <asvg:svgBlip xmlns:asvg="http://schemas.microsoft.com/office/drawing/2016/SVG/main" r:embed="rId6"/>
                 </a:ext>
               </a:extLst>
             </a:blip>
             <a:stretch>
-              <a:fillRect l="0" t="0" r="0" b="0"/>
+              <a:fillRect/>
             </a:stretch>
           </a:blipFill>
         </p:spPr>
       </p:sp>
       <p:sp>
         <p:nvSpPr>
-          <p:cNvPr name="Freeform 5" id="5"/>
+          <p:cNvPr id="5" name="Freeform 5"/>
           <p:cNvSpPr/>
           <p:nvPr/>
         </p:nvSpPr>
         <p:spPr>
-          <a:xfrm flipH="true" flipV="true" rot="0">
+          <a:xfrm flipH="1" flipV="1">
             <a:off x="-455035" y="-442015"/>
             <a:ext cx="3869203" cy="6021072"/>
           </a:xfrm>
@@ -10831,9 +11060,9 @@
             <a:gdLst/>
             <a:ahLst/>
             <a:cxnLst/>
-            <a:rect r="r" b="b" t="t" l="l"/>
+            <a:rect l="l" t="t" r="r" b="b"/>
             <a:pathLst>
-              <a:path h="6021072" w="3869203">
+              <a:path w="3869203" h="6021072">
                 <a:moveTo>
                   <a:pt x="3869203" y="6021072"/>
                 </a:moveTo>
@@ -10854,27 +11083,27 @@
             </a:pathLst>
           </a:custGeom>
           <a:blipFill>
-            <a:blip r:embed="rId4">
+            <a:blip r:embed="rId5">
               <a:extLst>
                 <a:ext uri="{96DAC541-7B7A-43D3-8B79-37D633B846F1}">
-                  <asvg:svgBlip xmlns:asvg="http://schemas.microsoft.com/office/drawing/2016/SVG/main" r:embed="rId5"/>
+                  <asvg:svgBlip xmlns:asvg="http://schemas.microsoft.com/office/drawing/2016/SVG/main" r:embed="rId6"/>
                 </a:ext>
               </a:extLst>
             </a:blip>
             <a:stretch>
-              <a:fillRect l="0" t="0" r="0" b="0"/>
+              <a:fillRect/>
             </a:stretch>
           </a:blipFill>
         </p:spPr>
       </p:sp>
       <p:sp>
         <p:nvSpPr>
-          <p:cNvPr name="Freeform 6" id="6"/>
+          <p:cNvPr id="6" name="Freeform 6"/>
           <p:cNvSpPr/>
           <p:nvPr/>
         </p:nvSpPr>
         <p:spPr>
-          <a:xfrm flipH="false" flipV="false" rot="0">
+          <a:xfrm>
             <a:off x="16525278" y="9130537"/>
             <a:ext cx="2617078" cy="2617078"/>
           </a:xfrm>
@@ -10883,9 +11112,9 @@
             <a:gdLst/>
             <a:ahLst/>
             <a:cxnLst/>
-            <a:rect r="r" b="b" t="t" l="l"/>
+            <a:rect l="l" t="t" r="r" b="b"/>
             <a:pathLst>
-              <a:path h="2617078" w="2617078">
+              <a:path w="2617078" h="2617078">
                 <a:moveTo>
                   <a:pt x="0" y="0"/>
                 </a:moveTo>
@@ -10906,27 +11135,27 @@
             </a:pathLst>
           </a:custGeom>
           <a:blipFill>
-            <a:blip r:embed="rId6">
+            <a:blip r:embed="rId7">
               <a:extLst>
                 <a:ext uri="{96DAC541-7B7A-43D3-8B79-37D633B846F1}">
-                  <asvg:svgBlip xmlns:asvg="http://schemas.microsoft.com/office/drawing/2016/SVG/main" r:embed="rId7"/>
+                  <asvg:svgBlip xmlns:asvg="http://schemas.microsoft.com/office/drawing/2016/SVG/main" r:embed="rId8"/>
                 </a:ext>
               </a:extLst>
             </a:blip>
             <a:stretch>
-              <a:fillRect l="0" t="0" r="0" b="0"/>
+              <a:fillRect/>
             </a:stretch>
           </a:blipFill>
         </p:spPr>
       </p:sp>
       <p:sp>
         <p:nvSpPr>
-          <p:cNvPr name="Freeform 7" id="7"/>
+          <p:cNvPr id="7" name="Freeform 7"/>
           <p:cNvSpPr/>
           <p:nvPr/>
         </p:nvSpPr>
         <p:spPr>
-          <a:xfrm flipH="false" flipV="false" rot="0">
+          <a:xfrm>
             <a:off x="-947307" y="-1541077"/>
             <a:ext cx="2617078" cy="2617078"/>
           </a:xfrm>
@@ -10935,9 +11164,9 @@
             <a:gdLst/>
             <a:ahLst/>
             <a:cxnLst/>
-            <a:rect r="r" b="b" t="t" l="l"/>
+            <a:rect l="l" t="t" r="r" b="b"/>
             <a:pathLst>
-              <a:path h="2617078" w="2617078">
+              <a:path w="2617078" h="2617078">
                 <a:moveTo>
                   <a:pt x="0" y="0"/>
                 </a:moveTo>
@@ -10958,15 +11187,15 @@
             </a:pathLst>
           </a:custGeom>
           <a:blipFill>
-            <a:blip r:embed="rId6">
+            <a:blip r:embed="rId7">
               <a:extLst>
                 <a:ext uri="{96DAC541-7B7A-43D3-8B79-37D633B846F1}">
-                  <asvg:svgBlip xmlns:asvg="http://schemas.microsoft.com/office/drawing/2016/SVG/main" r:embed="rId7"/>
+                  <asvg:svgBlip xmlns:asvg="http://schemas.microsoft.com/office/drawing/2016/SVG/main" r:embed="rId8"/>
                 </a:ext>
               </a:extLst>
             </a:blip>
             <a:stretch>
-              <a:fillRect l="0" t="0" r="0" b="0"/>
+              <a:fillRect/>
             </a:stretch>
           </a:blipFill>
         </p:spPr>
@@ -10980,7 +11209,7 @@
 </file>
 
 <file path=ppt/slides/slide2.xml><?xml version="1.0" encoding="utf-8"?>
-<p:sld xmlns:p="http://schemas.openxmlformats.org/presentationml/2006/main" xmlns:a="http://schemas.openxmlformats.org/drawingml/2006/main">
+<p:sld xmlns:a="http://schemas.openxmlformats.org/drawingml/2006/main" xmlns:r="http://schemas.openxmlformats.org/officeDocument/2006/relationships" xmlns:p="http://schemas.openxmlformats.org/presentationml/2006/main">
   <p:cSld>
     <p:spTree>
       <p:nvGrpSpPr>
@@ -10998,12 +11227,12 @@
       </p:grpSpPr>
       <p:grpSp>
         <p:nvGrpSpPr>
-          <p:cNvPr name="Group 2" id="2"/>
+          <p:cNvPr id="2" name="Group 2"/>
           <p:cNvGrpSpPr/>
           <p:nvPr/>
         </p:nvGrpSpPr>
         <p:grpSpPr>
-          <a:xfrm rot="0">
+          <a:xfrm>
             <a:off x="0" y="-268747"/>
             <a:ext cx="30733015" cy="2895405"/>
             <a:chOff x="0" y="0"/>
@@ -11012,12 +11241,12 @@
         </p:grpSpPr>
         <p:sp>
           <p:nvSpPr>
-            <p:cNvPr name="Freeform 3" id="3"/>
+            <p:cNvPr id="3" name="Freeform 3"/>
             <p:cNvSpPr/>
             <p:nvPr/>
           </p:nvSpPr>
           <p:spPr>
-            <a:xfrm flipH="false" flipV="false" rot="0">
+            <a:xfrm>
               <a:off x="0" y="0"/>
               <a:ext cx="8094292" cy="762576"/>
             </a:xfrm>
@@ -11026,9 +11255,9 @@
               <a:gdLst/>
               <a:ahLst/>
               <a:cxnLst/>
-              <a:rect r="r" b="b" t="t" l="l"/>
+              <a:rect l="l" t="t" r="r" b="b"/>
               <a:pathLst>
-                <a:path h="762576" w="8094292">
+                <a:path w="8094292" h="762576">
                   <a:moveTo>
                     <a:pt x="0" y="0"/>
                   </a:moveTo>
@@ -11045,7 +11274,7 @@
                 </a:path>
               </a:pathLst>
             </a:custGeom>
-            <a:gradFill rotWithShape="true">
+            <a:gradFill rotWithShape="1">
               <a:gsLst>
                 <a:gs pos="0">
                   <a:srgbClr val="030F7D">
@@ -11064,8 +11293,8 @@
         </p:sp>
         <p:sp>
           <p:nvSpPr>
-            <p:cNvPr name="TextBox 4" id="4"/>
-            <p:cNvSpPr txBox="true"/>
+            <p:cNvPr id="4" name="TextBox 4"/>
+            <p:cNvSpPr txBox="1"/>
             <p:nvPr/>
           </p:nvSpPr>
           <p:spPr>
@@ -11078,7 +11307,7 @@
             </a:prstGeom>
           </p:spPr>
           <p:txBody>
-            <a:bodyPr anchor="ctr" rtlCol="false" tIns="50800" lIns="50800" bIns="50800" rIns="50800"/>
+            <a:bodyPr lIns="50800" tIns="50800" rIns="50800" bIns="50800" rtlCol="0" anchor="ctr"/>
             <a:lstStyle/>
             <a:p>
               <a:pPr algn="ctr">
@@ -11089,18 +11318,19 @@
                   <a:spcPct val="0"/>
                 </a:spcBef>
               </a:pPr>
+              <a:endParaRPr/>
             </a:p>
           </p:txBody>
         </p:sp>
       </p:grpSp>
       <p:sp>
         <p:nvSpPr>
-          <p:cNvPr name="TextBox 7" id="7"/>
-          <p:cNvSpPr txBox="true"/>
-          <p:nvPr/>
-        </p:nvSpPr>
-        <p:spPr>
-          <a:xfrm rot="0">
+          <p:cNvPr id="7" name="TextBox 7"/>
+          <p:cNvSpPr txBox="1"/>
+          <p:nvPr/>
+        </p:nvSpPr>
+        <p:spPr>
+          <a:xfrm>
             <a:off x="1028700" y="643336"/>
             <a:ext cx="16093440" cy="1828800"/>
           </a:xfrm>
@@ -11109,7 +11339,7 @@
           </a:prstGeom>
         </p:spPr>
         <p:txBody>
-          <a:bodyPr anchor="t" rtlCol="false" tIns="0" lIns="0" bIns="0" rIns="0">
+          <a:bodyPr lIns="0" tIns="0" rIns="0" bIns="0" rtlCol="0" anchor="t">
             <a:spAutoFit/>
           </a:bodyPr>
           <a:lstStyle/>
@@ -11123,7 +11353,7 @@
               </a:spcAft>
             </a:pPr>
             <a:r>
-              <a:rPr lang="en-US" sz="5000" b="true">
+              <a:rPr lang="en-US" sz="5000" b="1">
                 <a:solidFill>
                   <a:srgbClr val="FFDC51"/>
                 </a:solidFill>
@@ -11145,7 +11375,7 @@
               </a:spcAft>
             </a:pPr>
             <a:r>
-              <a:rPr lang="en-US" sz="5000" b="true">
+              <a:rPr lang="en-US" sz="5000" b="1">
                 <a:solidFill>
                   <a:srgbClr val="FFDC51"/>
                 </a:solidFill>
@@ -11176,7 +11406,7 @@
           <a:noFill/>
         </p:spPr>
         <p:txBody>
-          <a:bodyPr wrap="square" lIns="36576" rIns="36576" tIns="27432" bIns="27432">
+          <a:bodyPr wrap="square" lIns="36576" tIns="27432" rIns="36576" bIns="27432">
             <a:spAutoFit/>
           </a:bodyPr>
           <a:lstStyle/>
@@ -11218,7 +11448,7 @@
           <a:noFill/>
         </p:spPr>
         <p:txBody>
-          <a:bodyPr wrap="square" lIns="36576" rIns="36576" tIns="27432" bIns="27432">
+          <a:bodyPr wrap="square" lIns="36576" tIns="27432" rIns="36576" bIns="27432">
             <a:spAutoFit/>
           </a:bodyPr>
           <a:lstStyle/>
@@ -11260,7 +11490,7 @@
           <a:noFill/>
         </p:spPr>
         <p:txBody>
-          <a:bodyPr wrap="square" lIns="36576" rIns="36576" tIns="27432" bIns="27432">
+          <a:bodyPr wrap="square" lIns="36576" tIns="27432" rIns="36576" bIns="27432">
             <a:spAutoFit/>
           </a:bodyPr>
           <a:lstStyle/>
@@ -11327,6 +11557,7 @@
           <a:lstStyle/>
           <a:p>
             <a:pPr algn="ctr"/>
+            <a:endParaRPr/>
           </a:p>
         </p:txBody>
       </p:sp>
@@ -11347,7 +11578,7 @@
           <a:noFill/>
         </p:spPr>
         <p:txBody>
-          <a:bodyPr wrap="square" lIns="36576" rIns="36576" tIns="27432" bIns="27432">
+          <a:bodyPr wrap="square" lIns="36576" tIns="27432" rIns="36576" bIns="27432">
             <a:spAutoFit/>
           </a:bodyPr>
           <a:lstStyle/>
@@ -11389,7 +11620,7 @@
           <a:noFill/>
         </p:spPr>
         <p:txBody>
-          <a:bodyPr wrap="square" lIns="36576" rIns="36576" tIns="27432" bIns="27432">
+          <a:bodyPr wrap="square" lIns="36576" tIns="27432" rIns="36576" bIns="27432">
             <a:spAutoFit/>
           </a:bodyPr>
           <a:lstStyle/>
@@ -11473,6 +11704,7 @@
           <a:lstStyle/>
           <a:p>
             <a:pPr algn="ctr"/>
+            <a:endParaRPr/>
           </a:p>
         </p:txBody>
       </p:sp>
@@ -11518,6 +11750,7 @@
           <a:lstStyle/>
           <a:p>
             <a:pPr algn="ctr"/>
+            <a:endParaRPr/>
           </a:p>
         </p:txBody>
       </p:sp>
@@ -11538,7 +11771,7 @@
           <a:noFill/>
         </p:spPr>
         <p:txBody>
-          <a:bodyPr wrap="square" lIns="36576" rIns="36576" tIns="27432" bIns="27432">
+          <a:bodyPr wrap="square" lIns="36576" tIns="27432" rIns="36576" bIns="27432">
             <a:spAutoFit/>
           </a:bodyPr>
           <a:lstStyle/>
@@ -11580,7 +11813,7 @@
           <a:noFill/>
         </p:spPr>
         <p:txBody>
-          <a:bodyPr wrap="square" lIns="36576" rIns="36576" tIns="27432" bIns="27432">
+          <a:bodyPr wrap="square" lIns="36576" tIns="27432" rIns="36576" bIns="27432">
             <a:spAutoFit/>
           </a:bodyPr>
           <a:lstStyle/>
@@ -11664,6 +11897,7 @@
           <a:lstStyle/>
           <a:p>
             <a:pPr algn="ctr"/>
+            <a:endParaRPr/>
           </a:p>
         </p:txBody>
       </p:sp>
@@ -11709,6 +11943,7 @@
           <a:lstStyle/>
           <a:p>
             <a:pPr algn="ctr"/>
+            <a:endParaRPr/>
           </a:p>
         </p:txBody>
       </p:sp>
@@ -11729,7 +11964,7 @@
           <a:noFill/>
         </p:spPr>
         <p:txBody>
-          <a:bodyPr wrap="square" lIns="36576" rIns="36576" tIns="27432" bIns="27432">
+          <a:bodyPr wrap="square" lIns="36576" tIns="27432" rIns="36576" bIns="27432">
             <a:spAutoFit/>
           </a:bodyPr>
           <a:lstStyle/>
@@ -11771,7 +12006,7 @@
           <a:noFill/>
         </p:spPr>
         <p:txBody>
-          <a:bodyPr wrap="square" lIns="36576" rIns="36576" tIns="27432" bIns="27432">
+          <a:bodyPr wrap="square" lIns="36576" tIns="27432" rIns="36576" bIns="27432">
             <a:spAutoFit/>
           </a:bodyPr>
           <a:lstStyle/>
@@ -11832,7 +12067,7 @@
           <a:noFill/>
         </p:spPr>
         <p:txBody>
-          <a:bodyPr wrap="square" lIns="36576" rIns="36576" tIns="27432" bIns="27432">
+          <a:bodyPr wrap="square" lIns="36576" tIns="27432" rIns="36576" bIns="27432">
             <a:spAutoFit/>
           </a:bodyPr>
           <a:lstStyle/>
@@ -11866,7 +12101,7 @@
 </file>
 
 <file path=ppt/slides/slide3.xml><?xml version="1.0" encoding="utf-8"?>
-<p:sld xmlns:p="http://schemas.openxmlformats.org/presentationml/2006/main" xmlns:a="http://schemas.openxmlformats.org/drawingml/2006/main" xmlns:r="http://schemas.openxmlformats.org/officeDocument/2006/relationships">
+<p:sld xmlns:a="http://schemas.openxmlformats.org/drawingml/2006/main" xmlns:r="http://schemas.openxmlformats.org/officeDocument/2006/relationships" xmlns:p="http://schemas.openxmlformats.org/presentationml/2006/main">
   <p:cSld>
     <p:spTree>
       <p:nvGrpSpPr>
@@ -11884,12 +12119,12 @@
       </p:grpSpPr>
       <p:grpSp>
         <p:nvGrpSpPr>
-          <p:cNvPr name="Group 2" id="2"/>
+          <p:cNvPr id="2" name="Group 2"/>
           <p:cNvGrpSpPr/>
           <p:nvPr/>
         </p:nvGrpSpPr>
         <p:grpSpPr>
-          <a:xfrm rot="0">
+          <a:xfrm>
             <a:off x="0" y="-283021"/>
             <a:ext cx="30733015" cy="2895405"/>
             <a:chOff x="0" y="0"/>
@@ -11898,12 +12133,12 @@
         </p:grpSpPr>
         <p:sp>
           <p:nvSpPr>
-            <p:cNvPr name="Freeform 3" id="3"/>
+            <p:cNvPr id="3" name="Freeform 3"/>
             <p:cNvSpPr/>
             <p:nvPr/>
           </p:nvSpPr>
           <p:spPr>
-            <a:xfrm flipH="false" flipV="false" rot="0">
+            <a:xfrm>
               <a:off x="0" y="0"/>
               <a:ext cx="8094292" cy="762576"/>
             </a:xfrm>
@@ -11912,9 +12147,9 @@
               <a:gdLst/>
               <a:ahLst/>
               <a:cxnLst/>
-              <a:rect r="r" b="b" t="t" l="l"/>
+              <a:rect l="l" t="t" r="r" b="b"/>
               <a:pathLst>
-                <a:path h="762576" w="8094292">
+                <a:path w="8094292" h="762576">
                   <a:moveTo>
                     <a:pt x="0" y="0"/>
                   </a:moveTo>
@@ -11931,7 +12166,7 @@
                 </a:path>
               </a:pathLst>
             </a:custGeom>
-            <a:gradFill rotWithShape="true">
+            <a:gradFill rotWithShape="1">
               <a:gsLst>
                 <a:gs pos="0">
                   <a:srgbClr val="030F7D">
@@ -11950,8 +12185,8 @@
         </p:sp>
         <p:sp>
           <p:nvSpPr>
-            <p:cNvPr name="TextBox 4" id="4"/>
-            <p:cNvSpPr txBox="true"/>
+            <p:cNvPr id="4" name="TextBox 4"/>
+            <p:cNvSpPr txBox="1"/>
             <p:nvPr/>
           </p:nvSpPr>
           <p:spPr>
@@ -11964,7 +12199,7 @@
             </a:prstGeom>
           </p:spPr>
           <p:txBody>
-            <a:bodyPr anchor="ctr" rtlCol="false" tIns="50800" lIns="50800" bIns="50800" rIns="50800"/>
+            <a:bodyPr lIns="50800" tIns="50800" rIns="50800" bIns="50800" rtlCol="0" anchor="ctr"/>
             <a:lstStyle/>
             <a:p>
               <a:pPr algn="ctr">
@@ -11975,18 +12210,19 @@
                   <a:spcPct val="0"/>
                 </a:spcBef>
               </a:pPr>
+              <a:endParaRPr/>
             </a:p>
           </p:txBody>
         </p:sp>
       </p:grpSp>
       <p:sp>
         <p:nvSpPr>
-          <p:cNvPr name="TextBox 10" id="10"/>
-          <p:cNvSpPr txBox="true"/>
-          <p:nvPr/>
-        </p:nvSpPr>
-        <p:spPr>
-          <a:xfrm rot="0">
+          <p:cNvPr id="10" name="TextBox 10"/>
+          <p:cNvSpPr txBox="1"/>
+          <p:nvPr/>
+        </p:nvSpPr>
+        <p:spPr>
+          <a:xfrm>
             <a:off x="1028700" y="643336"/>
             <a:ext cx="16093440" cy="1828800"/>
           </a:xfrm>
@@ -11995,7 +12231,7 @@
           </a:prstGeom>
         </p:spPr>
         <p:txBody>
-          <a:bodyPr anchor="t" rtlCol="false" tIns="0" lIns="0" bIns="0" rIns="0">
+          <a:bodyPr lIns="0" tIns="0" rIns="0" bIns="0" rtlCol="0" anchor="t">
             <a:spAutoFit/>
           </a:bodyPr>
           <a:lstStyle/>
@@ -12009,7 +12245,7 @@
               </a:spcAft>
             </a:pPr>
             <a:r>
-              <a:rPr lang="en-US" sz="5000" b="true">
+              <a:rPr lang="en-US" sz="5000" b="1">
                 <a:solidFill>
                   <a:srgbClr val="FFDC51"/>
                 </a:solidFill>
@@ -12031,7 +12267,7 @@
               </a:spcAft>
             </a:pPr>
             <a:r>
-              <a:rPr lang="en-US" sz="5000" b="true">
+              <a:rPr lang="en-US" sz="5000" b="1">
                 <a:solidFill>
                   <a:srgbClr val="FFDC51"/>
                 </a:solidFill>
@@ -12062,7 +12298,7 @@
           <a:noFill/>
         </p:spPr>
         <p:txBody>
-          <a:bodyPr wrap="square" lIns="36576" rIns="36576" tIns="27432" bIns="27432">
+          <a:bodyPr wrap="square" lIns="36576" tIns="27432" rIns="36576" bIns="27432">
             <a:spAutoFit/>
           </a:bodyPr>
           <a:lstStyle/>
@@ -12104,7 +12340,7 @@
           <a:noFill/>
         </p:spPr>
         <p:txBody>
-          <a:bodyPr wrap="square" lIns="36576" rIns="36576" tIns="27432" bIns="27432">
+          <a:bodyPr wrap="square" lIns="36576" tIns="27432" rIns="36576" bIns="27432">
             <a:spAutoFit/>
           </a:bodyPr>
           <a:lstStyle/>
@@ -12171,6 +12407,7 @@
           <a:lstStyle/>
           <a:p>
             <a:pPr algn="ctr"/>
+            <a:endParaRPr/>
           </a:p>
         </p:txBody>
       </p:sp>
@@ -12191,7 +12428,7 @@
           <a:noFill/>
         </p:spPr>
         <p:txBody>
-          <a:bodyPr wrap="square" lIns="36576" rIns="36576" tIns="27432" bIns="27432">
+          <a:bodyPr wrap="square" lIns="36576" tIns="27432" rIns="36576" bIns="27432">
             <a:spAutoFit/>
           </a:bodyPr>
           <a:lstStyle/>
@@ -12233,7 +12470,7 @@
           <a:noFill/>
         </p:spPr>
         <p:txBody>
-          <a:bodyPr wrap="square" lIns="36576" rIns="36576" tIns="27432" bIns="27432">
+          <a:bodyPr wrap="square" lIns="36576" tIns="27432" rIns="36576" bIns="27432">
             <a:spAutoFit/>
           </a:bodyPr>
           <a:lstStyle/>
@@ -12317,6 +12554,7 @@
           <a:lstStyle/>
           <a:p>
             <a:pPr algn="ctr"/>
+            <a:endParaRPr/>
           </a:p>
         </p:txBody>
       </p:sp>
@@ -12362,6 +12600,7 @@
           <a:lstStyle/>
           <a:p>
             <a:pPr algn="ctr"/>
+            <a:endParaRPr/>
           </a:p>
         </p:txBody>
       </p:sp>
@@ -12382,7 +12621,7 @@
           <a:noFill/>
         </p:spPr>
         <p:txBody>
-          <a:bodyPr wrap="square" lIns="36576" rIns="36576" tIns="27432" bIns="27432">
+          <a:bodyPr wrap="square" lIns="36576" tIns="27432" rIns="36576" bIns="27432">
             <a:spAutoFit/>
           </a:bodyPr>
           <a:lstStyle/>
@@ -12424,7 +12663,7 @@
           <a:noFill/>
         </p:spPr>
         <p:txBody>
-          <a:bodyPr wrap="square" lIns="36576" rIns="36576" tIns="27432" bIns="27432">
+          <a:bodyPr wrap="square" lIns="36576" tIns="27432" rIns="36576" bIns="27432">
             <a:spAutoFit/>
           </a:bodyPr>
           <a:lstStyle/>
@@ -12508,6 +12747,7 @@
           <a:lstStyle/>
           <a:p>
             <a:pPr algn="ctr"/>
+            <a:endParaRPr/>
           </a:p>
         </p:txBody>
       </p:sp>
@@ -12553,6 +12793,7 @@
           <a:lstStyle/>
           <a:p>
             <a:pPr algn="ctr"/>
+            <a:endParaRPr/>
           </a:p>
         </p:txBody>
       </p:sp>
@@ -12573,7 +12814,7 @@
           <a:noFill/>
         </p:spPr>
         <p:txBody>
-          <a:bodyPr wrap="square" lIns="36576" rIns="36576" tIns="27432" bIns="27432">
+          <a:bodyPr wrap="square" lIns="36576" tIns="27432" rIns="36576" bIns="27432">
             <a:spAutoFit/>
           </a:bodyPr>
           <a:lstStyle/>
@@ -12615,7 +12856,7 @@
           <a:noFill/>
         </p:spPr>
         <p:txBody>
-          <a:bodyPr wrap="square" lIns="36576" rIns="36576" tIns="27432" bIns="27432">
+          <a:bodyPr wrap="square" lIns="36576" tIns="27432" rIns="36576" bIns="27432">
             <a:spAutoFit/>
           </a:bodyPr>
           <a:lstStyle/>
@@ -12699,6 +12940,7 @@
           <a:lstStyle/>
           <a:p>
             <a:pPr algn="ctr"/>
+            <a:endParaRPr/>
           </a:p>
         </p:txBody>
       </p:sp>
@@ -12744,6 +12986,7 @@
           <a:lstStyle/>
           <a:p>
             <a:pPr algn="ctr"/>
+            <a:endParaRPr/>
           </a:p>
         </p:txBody>
       </p:sp>
@@ -12764,7 +13007,7 @@
           <a:noFill/>
         </p:spPr>
         <p:txBody>
-          <a:bodyPr wrap="square" lIns="36576" rIns="36576" tIns="27432" bIns="27432">
+          <a:bodyPr wrap="square" lIns="36576" tIns="27432" rIns="36576" bIns="27432">
             <a:spAutoFit/>
           </a:bodyPr>
           <a:lstStyle/>
@@ -12806,7 +13049,7 @@
           <a:noFill/>
         </p:spPr>
         <p:txBody>
-          <a:bodyPr wrap="square" lIns="36576" rIns="36576" tIns="27432" bIns="27432">
+          <a:bodyPr wrap="square" lIns="36576" tIns="27432" rIns="36576" bIns="27432">
             <a:spAutoFit/>
           </a:bodyPr>
           <a:lstStyle/>
@@ -12890,6 +13133,7 @@
           <a:lstStyle/>
           <a:p>
             <a:pPr algn="ctr"/>
+            <a:endParaRPr/>
           </a:p>
         </p:txBody>
       </p:sp>
@@ -12935,6 +13179,7 @@
           <a:lstStyle/>
           <a:p>
             <a:pPr algn="ctr"/>
+            <a:endParaRPr/>
           </a:p>
         </p:txBody>
       </p:sp>
@@ -12955,7 +13200,7 @@
           <a:noFill/>
         </p:spPr>
         <p:txBody>
-          <a:bodyPr wrap="square" lIns="36576" rIns="36576" tIns="27432" bIns="27432">
+          <a:bodyPr wrap="square" lIns="36576" tIns="27432" rIns="36576" bIns="27432">
             <a:spAutoFit/>
           </a:bodyPr>
           <a:lstStyle/>
@@ -12997,7 +13242,7 @@
           <a:noFill/>
         </p:spPr>
         <p:txBody>
-          <a:bodyPr wrap="square" lIns="36576" rIns="36576" tIns="27432" bIns="27432">
+          <a:bodyPr wrap="square" lIns="36576" tIns="27432" rIns="36576" bIns="27432">
             <a:spAutoFit/>
           </a:bodyPr>
           <a:lstStyle/>
@@ -13083,6 +13328,7 @@
           <a:lstStyle/>
           <a:p>
             <a:pPr algn="ctr"/>
+            <a:endParaRPr/>
           </a:p>
         </p:txBody>
       </p:sp>
@@ -13103,7 +13349,7 @@
           <a:noFill/>
         </p:spPr>
         <p:txBody>
-          <a:bodyPr wrap="square" lIns="36576" rIns="36576" tIns="27432" bIns="27432">
+          <a:bodyPr wrap="square" lIns="36576" tIns="27432" rIns="36576" bIns="27432">
             <a:spAutoFit/>
           </a:bodyPr>
           <a:lstStyle/>
@@ -13145,7 +13391,7 @@
           <a:noFill/>
         </p:spPr>
         <p:txBody>
-          <a:bodyPr wrap="square" lIns="36576" rIns="36576" tIns="27432" bIns="27432">
+          <a:bodyPr wrap="square" lIns="36576" tIns="27432" rIns="36576" bIns="27432">
             <a:spAutoFit/>
           </a:bodyPr>
           <a:lstStyle/>
@@ -13229,6 +13475,7 @@
           <a:lstStyle/>
           <a:p>
             <a:pPr algn="ctr"/>
+            <a:endParaRPr/>
           </a:p>
         </p:txBody>
       </p:sp>
@@ -13249,7 +13496,7 @@
           <a:noFill/>
         </p:spPr>
         <p:txBody>
-          <a:bodyPr wrap="square" lIns="36576" rIns="36576" tIns="27432" bIns="27432">
+          <a:bodyPr wrap="square" lIns="36576" tIns="27432" rIns="36576" bIns="27432">
             <a:spAutoFit/>
           </a:bodyPr>
           <a:lstStyle/>
@@ -13310,7 +13557,7 @@
           <a:noFill/>
         </p:spPr>
         <p:txBody>
-          <a:bodyPr wrap="square" lIns="36576" rIns="36576" tIns="27432" bIns="27432">
+          <a:bodyPr wrap="square" lIns="36576" tIns="27432" rIns="36576" bIns="27432">
             <a:spAutoFit/>
           </a:bodyPr>
           <a:lstStyle/>
@@ -13344,7 +13591,7 @@
 </file>
 
 <file path=ppt/slides/slide4.xml><?xml version="1.0" encoding="utf-8"?>
-<p:sld xmlns:p="http://schemas.openxmlformats.org/presentationml/2006/main" xmlns:a="http://schemas.openxmlformats.org/drawingml/2006/main" xmlns:r="http://schemas.openxmlformats.org/officeDocument/2006/relationships">
+<p:sld xmlns:a="http://schemas.openxmlformats.org/drawingml/2006/main" xmlns:r="http://schemas.openxmlformats.org/officeDocument/2006/relationships" xmlns:p="http://schemas.openxmlformats.org/presentationml/2006/main">
   <p:cSld>
     <p:spTree>
       <p:nvGrpSpPr>
@@ -13362,12 +13609,12 @@
       </p:grpSpPr>
       <p:grpSp>
         <p:nvGrpSpPr>
-          <p:cNvPr name="Group 2" id="2"/>
+          <p:cNvPr id="2" name="Group 2"/>
           <p:cNvGrpSpPr/>
           <p:nvPr/>
         </p:nvGrpSpPr>
         <p:grpSpPr>
-          <a:xfrm rot="0">
+          <a:xfrm>
             <a:off x="0" y="-268747"/>
             <a:ext cx="30733015" cy="2895405"/>
             <a:chOff x="0" y="0"/>
@@ -13376,12 +13623,12 @@
         </p:grpSpPr>
         <p:sp>
           <p:nvSpPr>
-            <p:cNvPr name="Freeform 3" id="3"/>
+            <p:cNvPr id="3" name="Freeform 3"/>
             <p:cNvSpPr/>
             <p:nvPr/>
           </p:nvSpPr>
           <p:spPr>
-            <a:xfrm flipH="false" flipV="false" rot="0">
+            <a:xfrm>
               <a:off x="0" y="0"/>
               <a:ext cx="8094292" cy="762576"/>
             </a:xfrm>
@@ -13390,9 +13637,9 @@
               <a:gdLst/>
               <a:ahLst/>
               <a:cxnLst/>
-              <a:rect r="r" b="b" t="t" l="l"/>
+              <a:rect l="l" t="t" r="r" b="b"/>
               <a:pathLst>
-                <a:path h="762576" w="8094292">
+                <a:path w="8094292" h="762576">
                   <a:moveTo>
                     <a:pt x="0" y="0"/>
                   </a:moveTo>
@@ -13409,7 +13656,7 @@
                 </a:path>
               </a:pathLst>
             </a:custGeom>
-            <a:gradFill rotWithShape="true">
+            <a:gradFill rotWithShape="1">
               <a:gsLst>
                 <a:gs pos="0">
                   <a:srgbClr val="030F7D">
@@ -13428,8 +13675,8 @@
         </p:sp>
         <p:sp>
           <p:nvSpPr>
-            <p:cNvPr name="TextBox 4" id="4"/>
-            <p:cNvSpPr txBox="true"/>
+            <p:cNvPr id="4" name="TextBox 4"/>
+            <p:cNvSpPr txBox="1"/>
             <p:nvPr/>
           </p:nvSpPr>
           <p:spPr>
@@ -13442,7 +13689,7 @@
             </a:prstGeom>
           </p:spPr>
           <p:txBody>
-            <a:bodyPr anchor="ctr" rtlCol="false" tIns="50800" lIns="50800" bIns="50800" rIns="50800"/>
+            <a:bodyPr lIns="50800" tIns="50800" rIns="50800" bIns="50800" rtlCol="0" anchor="ctr"/>
             <a:lstStyle/>
             <a:p>
               <a:pPr algn="ctr">
@@ -13450,6 +13697,7 @@
                   <a:spcPts val="2659"/>
                 </a:lnSpc>
               </a:pPr>
+              <a:endParaRPr/>
             </a:p>
             <a:p>
               <a:pPr algn="ctr">
@@ -13460,18 +13708,19 @@
                   <a:spcPct val="0"/>
                 </a:spcBef>
               </a:pPr>
+              <a:endParaRPr/>
             </a:p>
           </p:txBody>
         </p:sp>
       </p:grpSp>
       <p:sp>
         <p:nvSpPr>
-          <p:cNvPr name="TextBox 9" id="9"/>
-          <p:cNvSpPr txBox="true"/>
-          <p:nvPr/>
-        </p:nvSpPr>
-        <p:spPr>
-          <a:xfrm rot="0">
+          <p:cNvPr id="9" name="TextBox 9"/>
+          <p:cNvSpPr txBox="1"/>
+          <p:nvPr/>
+        </p:nvSpPr>
+        <p:spPr>
+          <a:xfrm>
             <a:off x="1028700" y="643336"/>
             <a:ext cx="16093440" cy="1828800"/>
           </a:xfrm>
@@ -13480,7 +13729,7 @@
           </a:prstGeom>
         </p:spPr>
         <p:txBody>
-          <a:bodyPr anchor="t" rtlCol="false" tIns="0" lIns="0" bIns="0" rIns="0">
+          <a:bodyPr lIns="0" tIns="0" rIns="0" bIns="0" rtlCol="0" anchor="t">
             <a:spAutoFit/>
           </a:bodyPr>
           <a:lstStyle/>
@@ -13547,7 +13796,7 @@
           <a:noFill/>
         </p:spPr>
         <p:txBody>
-          <a:bodyPr wrap="square" lIns="36576" rIns="36576" tIns="27432" bIns="27432">
+          <a:bodyPr wrap="square" lIns="36576" tIns="27432" rIns="36576" bIns="27432">
             <a:spAutoFit/>
           </a:bodyPr>
           <a:lstStyle/>
@@ -13589,7 +13838,7 @@
           <a:noFill/>
         </p:spPr>
         <p:txBody>
-          <a:bodyPr wrap="square" lIns="36576" rIns="36576" tIns="27432" bIns="27432">
+          <a:bodyPr wrap="square" lIns="36576" tIns="27432" rIns="36576" bIns="27432">
             <a:spAutoFit/>
           </a:bodyPr>
           <a:lstStyle/>
@@ -13631,7 +13880,7 @@
           <a:noFill/>
         </p:spPr>
         <p:txBody>
-          <a:bodyPr wrap="square" lIns="36576" rIns="36576" tIns="27432" bIns="27432">
+          <a:bodyPr wrap="square" lIns="36576" tIns="27432" rIns="36576" bIns="27432">
             <a:spAutoFit/>
           </a:bodyPr>
           <a:lstStyle/>
@@ -13673,7 +13922,7 @@
           <a:noFill/>
         </p:spPr>
         <p:txBody>
-          <a:bodyPr wrap="square" lIns="36576" rIns="36576" tIns="27432" bIns="27432">
+          <a:bodyPr wrap="square" lIns="36576" tIns="27432" rIns="36576" bIns="27432">
             <a:spAutoFit/>
           </a:bodyPr>
           <a:lstStyle/>
@@ -13715,7 +13964,7 @@
           <a:noFill/>
         </p:spPr>
         <p:txBody>
-          <a:bodyPr wrap="square" lIns="36576" rIns="36576" tIns="27432" bIns="27432">
+          <a:bodyPr wrap="square" lIns="36576" tIns="27432" rIns="36576" bIns="27432">
             <a:spAutoFit/>
           </a:bodyPr>
           <a:lstStyle/>
@@ -13757,7 +14006,7 @@
           <a:noFill/>
         </p:spPr>
         <p:txBody>
-          <a:bodyPr wrap="square" lIns="36576" rIns="36576" tIns="27432" bIns="27432">
+          <a:bodyPr wrap="square" lIns="36576" tIns="27432" rIns="36576" bIns="27432">
             <a:spAutoFit/>
           </a:bodyPr>
           <a:lstStyle/>
@@ -13799,7 +14048,7 @@
           <a:noFill/>
         </p:spPr>
         <p:txBody>
-          <a:bodyPr wrap="square" lIns="36576" rIns="36576" tIns="27432" bIns="27432">
+          <a:bodyPr wrap="square" lIns="36576" tIns="27432" rIns="36576" bIns="27432">
             <a:spAutoFit/>
           </a:bodyPr>
           <a:lstStyle/>
@@ -13841,7 +14090,7 @@
           <a:noFill/>
         </p:spPr>
         <p:txBody>
-          <a:bodyPr wrap="square" lIns="36576" rIns="36576" tIns="27432" bIns="27432">
+          <a:bodyPr wrap="square" lIns="36576" tIns="27432" rIns="36576" bIns="27432">
             <a:spAutoFit/>
           </a:bodyPr>
           <a:lstStyle/>
@@ -13875,7 +14124,7 @@
           <p:nvPr/>
         </p:nvPicPr>
         <p:blipFill>
-          <a:blip r:embed="rId7"/>
+          <a:blip r:embed="rId3"/>
           <a:stretch>
             <a:fillRect/>
           </a:stretch>
@@ -13907,7 +14156,7 @@
           <a:noFill/>
         </p:spPr>
         <p:txBody>
-          <a:bodyPr wrap="square" lIns="36576" rIns="36576" tIns="27432" bIns="27432">
+          <a:bodyPr wrap="square" lIns="36576" tIns="27432" rIns="36576" bIns="27432">
             <a:spAutoFit/>
           </a:bodyPr>
           <a:lstStyle/>
@@ -13920,15 +14169,6 @@
                 <a:spcPts val="900"/>
               </a:spcAft>
             </a:pPr>
-            <a:r>
-              <a:rPr sz="2300" b="0">
-                <a:solidFill>
-                  <a:srgbClr val="202329"/>
-                </a:solidFill>
-                <a:latin typeface="Poppins"/>
-              </a:rPr>
-              <a:t/>
-            </a:r>
             <a:r>
               <a:rPr sz="2300" b="1">
                 <a:solidFill>
@@ -13978,7 +14218,7 @@
 </file>
 
 <file path=ppt/slides/slide5.xml><?xml version="1.0" encoding="utf-8"?>
-<p:sld xmlns:p="http://schemas.openxmlformats.org/presentationml/2006/main" xmlns:a="http://schemas.openxmlformats.org/drawingml/2006/main">
+<p:sld xmlns:a="http://schemas.openxmlformats.org/drawingml/2006/main" xmlns:r="http://schemas.openxmlformats.org/officeDocument/2006/relationships" xmlns:p="http://schemas.openxmlformats.org/presentationml/2006/main">
   <p:cSld>
     <p:spTree>
       <p:nvGrpSpPr>
@@ -13996,12 +14236,12 @@
       </p:grpSpPr>
       <p:grpSp>
         <p:nvGrpSpPr>
-          <p:cNvPr name="Group 2" id="2"/>
+          <p:cNvPr id="2" name="Group 2"/>
           <p:cNvGrpSpPr/>
           <p:nvPr/>
         </p:nvGrpSpPr>
         <p:grpSpPr>
-          <a:xfrm rot="0">
+          <a:xfrm>
             <a:off x="0" y="-268747"/>
             <a:ext cx="30733015" cy="2895405"/>
             <a:chOff x="0" y="0"/>
@@ -14010,12 +14250,12 @@
         </p:grpSpPr>
         <p:sp>
           <p:nvSpPr>
-            <p:cNvPr name="Freeform 3" id="3"/>
+            <p:cNvPr id="3" name="Freeform 3"/>
             <p:cNvSpPr/>
             <p:nvPr/>
           </p:nvSpPr>
           <p:spPr>
-            <a:xfrm flipH="false" flipV="false" rot="0">
+            <a:xfrm>
               <a:off x="0" y="0"/>
               <a:ext cx="8094292" cy="762576"/>
             </a:xfrm>
@@ -14024,9 +14264,9 @@
               <a:gdLst/>
               <a:ahLst/>
               <a:cxnLst/>
-              <a:rect r="r" b="b" t="t" l="l"/>
+              <a:rect l="l" t="t" r="r" b="b"/>
               <a:pathLst>
-                <a:path h="762576" w="8094292">
+                <a:path w="8094292" h="762576">
                   <a:moveTo>
                     <a:pt x="0" y="0"/>
                   </a:moveTo>
@@ -14043,7 +14283,7 @@
                 </a:path>
               </a:pathLst>
             </a:custGeom>
-            <a:gradFill rotWithShape="true">
+            <a:gradFill rotWithShape="1">
               <a:gsLst>
                 <a:gs pos="0">
                   <a:srgbClr val="030F7D">
@@ -14062,8 +14302,8 @@
         </p:sp>
         <p:sp>
           <p:nvSpPr>
-            <p:cNvPr name="TextBox 4" id="4"/>
-            <p:cNvSpPr txBox="true"/>
+            <p:cNvPr id="4" name="TextBox 4"/>
+            <p:cNvSpPr txBox="1"/>
             <p:nvPr/>
           </p:nvSpPr>
           <p:spPr>
@@ -14076,7 +14316,7 @@
             </a:prstGeom>
           </p:spPr>
           <p:txBody>
-            <a:bodyPr anchor="ctr" rtlCol="false" tIns="50800" lIns="50800" bIns="50800" rIns="50800"/>
+            <a:bodyPr lIns="50800" tIns="50800" rIns="50800" bIns="50800" rtlCol="0" anchor="ctr"/>
             <a:lstStyle/>
             <a:p>
               <a:pPr algn="ctr">
@@ -14087,18 +14327,19 @@
                   <a:spcPct val="0"/>
                 </a:spcBef>
               </a:pPr>
+              <a:endParaRPr/>
             </a:p>
           </p:txBody>
         </p:sp>
       </p:grpSp>
       <p:sp>
         <p:nvSpPr>
-          <p:cNvPr name="TextBox 7" id="7"/>
-          <p:cNvSpPr txBox="true"/>
-          <p:nvPr/>
-        </p:nvSpPr>
-        <p:spPr>
-          <a:xfrm rot="0">
+          <p:cNvPr id="7" name="TextBox 7"/>
+          <p:cNvSpPr txBox="1"/>
+          <p:nvPr/>
+        </p:nvSpPr>
+        <p:spPr>
+          <a:xfrm>
             <a:off x="1028700" y="643336"/>
             <a:ext cx="16093440" cy="1828800"/>
           </a:xfrm>
@@ -14107,7 +14348,7 @@
           </a:prstGeom>
         </p:spPr>
         <p:txBody>
-          <a:bodyPr anchor="t" rtlCol="false" tIns="0" lIns="0" bIns="0" rIns="0">
+          <a:bodyPr lIns="0" tIns="0" rIns="0" bIns="0" rtlCol="0" anchor="t">
             <a:spAutoFit/>
           </a:bodyPr>
           <a:lstStyle/>
@@ -14174,7 +14415,7 @@
           <a:noFill/>
         </p:spPr>
         <p:txBody>
-          <a:bodyPr wrap="square" lIns="36576" rIns="36576" tIns="27432" bIns="27432">
+          <a:bodyPr wrap="square" lIns="36576" tIns="27432" rIns="36576" bIns="27432">
             <a:spAutoFit/>
           </a:bodyPr>
           <a:lstStyle/>
@@ -14216,7 +14457,7 @@
           <a:noFill/>
         </p:spPr>
         <p:txBody>
-          <a:bodyPr wrap="square" lIns="36576" rIns="36576" tIns="27432" bIns="27432">
+          <a:bodyPr wrap="square" lIns="36576" tIns="27432" rIns="36576" bIns="27432">
             <a:spAutoFit/>
           </a:bodyPr>
           <a:lstStyle/>
@@ -14283,6 +14524,7 @@
           <a:lstStyle/>
           <a:p>
             <a:pPr algn="ctr"/>
+            <a:endParaRPr/>
           </a:p>
         </p:txBody>
       </p:sp>
@@ -14303,7 +14545,7 @@
           <a:noFill/>
         </p:spPr>
         <p:txBody>
-          <a:bodyPr wrap="square" lIns="36576" rIns="36576" tIns="27432" bIns="27432">
+          <a:bodyPr wrap="square" lIns="36576" tIns="27432" rIns="36576" bIns="27432">
             <a:spAutoFit/>
           </a:bodyPr>
           <a:lstStyle/>
@@ -14345,7 +14587,7 @@
           <a:noFill/>
         </p:spPr>
         <p:txBody>
-          <a:bodyPr wrap="square" lIns="36576" rIns="36576" tIns="27432" bIns="27432">
+          <a:bodyPr wrap="square" lIns="36576" tIns="27432" rIns="36576" bIns="27432">
             <a:spAutoFit/>
           </a:bodyPr>
           <a:lstStyle/>
@@ -14450,6 +14692,7 @@
           <a:lstStyle/>
           <a:p>
             <a:pPr algn="ctr"/>
+            <a:endParaRPr/>
           </a:p>
         </p:txBody>
       </p:sp>
@@ -14470,7 +14713,7 @@
           <a:noFill/>
         </p:spPr>
         <p:txBody>
-          <a:bodyPr wrap="square" lIns="36576" rIns="36576" tIns="27432" bIns="27432">
+          <a:bodyPr wrap="square" lIns="36576" tIns="27432" rIns="36576" bIns="27432">
             <a:spAutoFit/>
           </a:bodyPr>
           <a:lstStyle/>
@@ -14512,7 +14755,7 @@
           <a:noFill/>
         </p:spPr>
         <p:txBody>
-          <a:bodyPr wrap="square" lIns="36576" rIns="36576" tIns="27432" bIns="27432">
+          <a:bodyPr wrap="square" lIns="36576" tIns="27432" rIns="36576" bIns="27432">
             <a:spAutoFit/>
           </a:bodyPr>
           <a:lstStyle/>
@@ -14617,6 +14860,7 @@
           <a:lstStyle/>
           <a:p>
             <a:pPr algn="ctr"/>
+            <a:endParaRPr/>
           </a:p>
         </p:txBody>
       </p:sp>
@@ -14637,7 +14881,7 @@
           <a:noFill/>
         </p:spPr>
         <p:txBody>
-          <a:bodyPr wrap="square" lIns="36576" rIns="36576" tIns="27432" bIns="27432">
+          <a:bodyPr wrap="square" lIns="36576" tIns="27432" rIns="36576" bIns="27432">
             <a:spAutoFit/>
           </a:bodyPr>
           <a:lstStyle/>
@@ -14679,7 +14923,7 @@
           <a:noFill/>
         </p:spPr>
         <p:txBody>
-          <a:bodyPr wrap="square" lIns="36576" rIns="36576" tIns="27432" bIns="27432">
+          <a:bodyPr wrap="square" lIns="36576" tIns="27432" rIns="36576" bIns="27432">
             <a:spAutoFit/>
           </a:bodyPr>
           <a:lstStyle/>
@@ -14740,7 +14984,7 @@
           <a:noFill/>
         </p:spPr>
         <p:txBody>
-          <a:bodyPr wrap="square" lIns="36576" rIns="36576" tIns="27432" bIns="27432">
+          <a:bodyPr wrap="square" lIns="36576" tIns="27432" rIns="36576" bIns="27432">
             <a:spAutoFit/>
           </a:bodyPr>
           <a:lstStyle/>
@@ -14774,7 +15018,7 @@
 </file>
 
 <file path=ppt/slides/slide6.xml><?xml version="1.0" encoding="utf-8"?>
-<p:sld xmlns:p="http://schemas.openxmlformats.org/presentationml/2006/main" xmlns:a="http://schemas.openxmlformats.org/drawingml/2006/main" xmlns:r="http://schemas.openxmlformats.org/officeDocument/2006/relationships">
+<p:sld xmlns:a="http://schemas.openxmlformats.org/drawingml/2006/main" xmlns:r="http://schemas.openxmlformats.org/officeDocument/2006/relationships" xmlns:p="http://schemas.openxmlformats.org/presentationml/2006/main">
   <p:cSld>
     <p:spTree>
       <p:nvGrpSpPr>
@@ -14792,12 +15036,12 @@
       </p:grpSpPr>
       <p:grpSp>
         <p:nvGrpSpPr>
-          <p:cNvPr name="Group 2" id="2"/>
+          <p:cNvPr id="2" name="Group 2"/>
           <p:cNvGrpSpPr/>
           <p:nvPr/>
         </p:nvGrpSpPr>
         <p:grpSpPr>
-          <a:xfrm rot="0">
+          <a:xfrm>
             <a:off x="0" y="-268747"/>
             <a:ext cx="30733015" cy="2895405"/>
             <a:chOff x="0" y="0"/>
@@ -14806,12 +15050,12 @@
         </p:grpSpPr>
         <p:sp>
           <p:nvSpPr>
-            <p:cNvPr name="Freeform 3" id="3"/>
+            <p:cNvPr id="3" name="Freeform 3"/>
             <p:cNvSpPr/>
             <p:nvPr/>
           </p:nvSpPr>
           <p:spPr>
-            <a:xfrm flipH="false" flipV="false" rot="0">
+            <a:xfrm>
               <a:off x="0" y="0"/>
               <a:ext cx="8094292" cy="762576"/>
             </a:xfrm>
@@ -14820,9 +15064,9 @@
               <a:gdLst/>
               <a:ahLst/>
               <a:cxnLst/>
-              <a:rect r="r" b="b" t="t" l="l"/>
+              <a:rect l="l" t="t" r="r" b="b"/>
               <a:pathLst>
-                <a:path h="762576" w="8094292">
+                <a:path w="8094292" h="762576">
                   <a:moveTo>
                     <a:pt x="0" y="0"/>
                   </a:moveTo>
@@ -14839,7 +15083,7 @@
                 </a:path>
               </a:pathLst>
             </a:custGeom>
-            <a:gradFill rotWithShape="true">
+            <a:gradFill rotWithShape="1">
               <a:gsLst>
                 <a:gs pos="0">
                   <a:srgbClr val="030F7D">
@@ -14858,8 +15102,8 @@
         </p:sp>
         <p:sp>
           <p:nvSpPr>
-            <p:cNvPr name="TextBox 4" id="4"/>
-            <p:cNvSpPr txBox="true"/>
+            <p:cNvPr id="4" name="TextBox 4"/>
+            <p:cNvSpPr txBox="1"/>
             <p:nvPr/>
           </p:nvSpPr>
           <p:spPr>
@@ -14872,7 +15116,7 @@
             </a:prstGeom>
           </p:spPr>
           <p:txBody>
-            <a:bodyPr anchor="ctr" rtlCol="false" tIns="50800" lIns="50800" bIns="50800" rIns="50800"/>
+            <a:bodyPr lIns="50800" tIns="50800" rIns="50800" bIns="50800" rtlCol="0" anchor="ctr"/>
             <a:lstStyle/>
             <a:p>
               <a:pPr algn="ctr">
@@ -14883,18 +15127,19 @@
                   <a:spcPct val="0"/>
                 </a:spcBef>
               </a:pPr>
+              <a:endParaRPr/>
             </a:p>
           </p:txBody>
         </p:sp>
       </p:grpSp>
       <p:sp>
         <p:nvSpPr>
-          <p:cNvPr name="TextBox 8" id="8"/>
-          <p:cNvSpPr txBox="true"/>
-          <p:nvPr/>
-        </p:nvSpPr>
-        <p:spPr>
-          <a:xfrm rot="0">
+          <p:cNvPr id="8" name="TextBox 8"/>
+          <p:cNvSpPr txBox="1"/>
+          <p:nvPr/>
+        </p:nvSpPr>
+        <p:spPr>
+          <a:xfrm>
             <a:off x="1028700" y="643336"/>
             <a:ext cx="16093440" cy="1828800"/>
           </a:xfrm>
@@ -14903,7 +15148,7 @@
           </a:prstGeom>
         </p:spPr>
         <p:txBody>
-          <a:bodyPr anchor="t" rtlCol="false" tIns="0" lIns="0" bIns="0" rIns="0">
+          <a:bodyPr lIns="0" tIns="0" rIns="0" bIns="0" rtlCol="0" anchor="t">
             <a:spAutoFit/>
           </a:bodyPr>
           <a:lstStyle/>
@@ -14970,7 +15215,7 @@
           <a:noFill/>
         </p:spPr>
         <p:txBody>
-          <a:bodyPr wrap="square" lIns="36576" rIns="36576" tIns="27432" bIns="27432">
+          <a:bodyPr wrap="square" lIns="36576" tIns="27432" rIns="36576" bIns="27432">
             <a:spAutoFit/>
           </a:bodyPr>
           <a:lstStyle/>
@@ -15012,7 +15257,7 @@
           <a:noFill/>
         </p:spPr>
         <p:txBody>
-          <a:bodyPr wrap="square" lIns="36576" rIns="36576" tIns="27432" bIns="27432">
+          <a:bodyPr wrap="square" lIns="36576" tIns="27432" rIns="36576" bIns="27432">
             <a:spAutoFit/>
           </a:bodyPr>
           <a:lstStyle/>
@@ -15056,8 +15301,20 @@
                 <a:tableStyleId>{5C22544A-7EE6-4342-B048-85BDC9FD1C3A}</a:tableStyleId>
               </a:tblPr>
               <a:tblGrid>
-                <a:gridCol w="4846320"/>
-                <a:gridCol w="3931920"/>
+                <a:gridCol w="4846320">
+                  <a:extLst>
+                    <a:ext uri="{9D8B030D-6E8A-4147-A177-3AD203B41FA5}">
+                      <a16:colId xmlns:a16="http://schemas.microsoft.com/office/drawing/2014/main" val="20000"/>
+                    </a:ext>
+                  </a:extLst>
+                </a:gridCol>
+                <a:gridCol w="3931920">
+                  <a:extLst>
+                    <a:ext uri="{9D8B030D-6E8A-4147-A177-3AD203B41FA5}">
+                      <a16:colId xmlns:a16="http://schemas.microsoft.com/office/drawing/2014/main" val="20001"/>
+                    </a:ext>
+                  </a:extLst>
+                </a:gridCol>
               </a:tblGrid>
               <a:tr h="658367">
                 <a:tc>
@@ -15104,6 +15361,11 @@
                     </a:solidFill>
                   </a:tcPr>
                 </a:tc>
+                <a:extLst>
+                  <a:ext uri="{0D108BD9-81ED-4DB2-BD59-A6C34878D82A}">
+                    <a16:rowId xmlns:a16="http://schemas.microsoft.com/office/drawing/2014/main" val="10000"/>
+                  </a:ext>
+                </a:extLst>
               </a:tr>
               <a:tr h="658367">
                 <a:tc>
@@ -15150,6 +15412,11 @@
                     </a:solidFill>
                   </a:tcPr>
                 </a:tc>
+                <a:extLst>
+                  <a:ext uri="{0D108BD9-81ED-4DB2-BD59-A6C34878D82A}">
+                    <a16:rowId xmlns:a16="http://schemas.microsoft.com/office/drawing/2014/main" val="10001"/>
+                  </a:ext>
+                </a:extLst>
               </a:tr>
               <a:tr h="658367">
                 <a:tc>
@@ -15196,6 +15463,11 @@
                     </a:solidFill>
                   </a:tcPr>
                 </a:tc>
+                <a:extLst>
+                  <a:ext uri="{0D108BD9-81ED-4DB2-BD59-A6C34878D82A}">
+                    <a16:rowId xmlns:a16="http://schemas.microsoft.com/office/drawing/2014/main" val="10002"/>
+                  </a:ext>
+                </a:extLst>
               </a:tr>
               <a:tr h="658367">
                 <a:tc>
@@ -15242,6 +15514,11 @@
                     </a:solidFill>
                   </a:tcPr>
                 </a:tc>
+                <a:extLst>
+                  <a:ext uri="{0D108BD9-81ED-4DB2-BD59-A6C34878D82A}">
+                    <a16:rowId xmlns:a16="http://schemas.microsoft.com/office/drawing/2014/main" val="10003"/>
+                  </a:ext>
+                </a:extLst>
               </a:tr>
               <a:tr h="658371">
                 <a:tc>
@@ -15288,6 +15565,11 @@
                     </a:solidFill>
                   </a:tcPr>
                 </a:tc>
+                <a:extLst>
+                  <a:ext uri="{0D108BD9-81ED-4DB2-BD59-A6C34878D82A}">
+                    <a16:rowId xmlns:a16="http://schemas.microsoft.com/office/drawing/2014/main" val="10004"/>
+                  </a:ext>
+                </a:extLst>
               </a:tr>
             </a:tbl>
           </a:graphicData>
@@ -15335,6 +15617,7 @@
           <a:lstStyle/>
           <a:p>
             <a:pPr algn="ctr"/>
+            <a:endParaRPr/>
           </a:p>
         </p:txBody>
       </p:sp>
@@ -15355,7 +15638,7 @@
           <a:noFill/>
         </p:spPr>
         <p:txBody>
-          <a:bodyPr wrap="square" lIns="36576" rIns="36576" tIns="27432" bIns="27432">
+          <a:bodyPr wrap="square" lIns="36576" tIns="27432" rIns="36576" bIns="27432">
             <a:spAutoFit/>
           </a:bodyPr>
           <a:lstStyle/>
@@ -15397,7 +15680,7 @@
           <a:noFill/>
         </p:spPr>
         <p:txBody>
-          <a:bodyPr wrap="square" lIns="36576" rIns="36576" tIns="27432" bIns="27432">
+          <a:bodyPr wrap="square" lIns="36576" tIns="27432" rIns="36576" bIns="27432">
             <a:spAutoFit/>
           </a:bodyPr>
           <a:lstStyle/>
@@ -15553,7 +15836,7 @@
           <a:noFill/>
         </p:spPr>
         <p:txBody>
-          <a:bodyPr wrap="square" lIns="36576" rIns="36576" tIns="27432" bIns="27432">
+          <a:bodyPr wrap="square" lIns="36576" tIns="27432" rIns="36576" bIns="27432">
             <a:spAutoFit/>
           </a:bodyPr>
           <a:lstStyle/>
@@ -15587,7 +15870,7 @@
 </file>
 
 <file path=ppt/slides/slide7.xml><?xml version="1.0" encoding="utf-8"?>
-<p:sld xmlns:p="http://schemas.openxmlformats.org/presentationml/2006/main" xmlns:a="http://schemas.openxmlformats.org/drawingml/2006/main" xmlns:r="http://schemas.openxmlformats.org/officeDocument/2006/relationships">
+<p:sld xmlns:a="http://schemas.openxmlformats.org/drawingml/2006/main" xmlns:r="http://schemas.openxmlformats.org/officeDocument/2006/relationships" xmlns:p="http://schemas.openxmlformats.org/presentationml/2006/main">
   <p:cSld>
     <p:spTree>
       <p:nvGrpSpPr>
@@ -15605,12 +15888,12 @@
       </p:grpSpPr>
       <p:grpSp>
         <p:nvGrpSpPr>
-          <p:cNvPr name="Group 2" id="2"/>
+          <p:cNvPr id="2" name="Group 2"/>
           <p:cNvGrpSpPr/>
           <p:nvPr/>
         </p:nvGrpSpPr>
         <p:grpSpPr>
-          <a:xfrm rot="0">
+          <a:xfrm>
             <a:off x="0" y="-268747"/>
             <a:ext cx="30733015" cy="2895405"/>
             <a:chOff x="0" y="0"/>
@@ -15619,12 +15902,12 @@
         </p:grpSpPr>
         <p:sp>
           <p:nvSpPr>
-            <p:cNvPr name="Freeform 3" id="3"/>
+            <p:cNvPr id="3" name="Freeform 3"/>
             <p:cNvSpPr/>
             <p:nvPr/>
           </p:nvSpPr>
           <p:spPr>
-            <a:xfrm flipH="false" flipV="false" rot="0">
+            <a:xfrm>
               <a:off x="0" y="0"/>
               <a:ext cx="8094292" cy="762576"/>
             </a:xfrm>
@@ -15633,9 +15916,9 @@
               <a:gdLst/>
               <a:ahLst/>
               <a:cxnLst/>
-              <a:rect r="r" b="b" t="t" l="l"/>
+              <a:rect l="l" t="t" r="r" b="b"/>
               <a:pathLst>
-                <a:path h="762576" w="8094292">
+                <a:path w="8094292" h="762576">
                   <a:moveTo>
                     <a:pt x="0" y="0"/>
                   </a:moveTo>
@@ -15652,7 +15935,7 @@
                 </a:path>
               </a:pathLst>
             </a:custGeom>
-            <a:gradFill rotWithShape="true">
+            <a:gradFill rotWithShape="1">
               <a:gsLst>
                 <a:gs pos="0">
                   <a:srgbClr val="030F7D">
@@ -15671,8 +15954,8 @@
         </p:sp>
         <p:sp>
           <p:nvSpPr>
-            <p:cNvPr name="TextBox 4" id="4"/>
-            <p:cNvSpPr txBox="true"/>
+            <p:cNvPr id="4" name="TextBox 4"/>
+            <p:cNvSpPr txBox="1"/>
             <p:nvPr/>
           </p:nvSpPr>
           <p:spPr>
@@ -15685,7 +15968,7 @@
             </a:prstGeom>
           </p:spPr>
           <p:txBody>
-            <a:bodyPr anchor="ctr" rtlCol="false" tIns="50800" lIns="50800" bIns="50800" rIns="50800"/>
+            <a:bodyPr lIns="50800" tIns="50800" rIns="50800" bIns="50800" rtlCol="0" anchor="ctr"/>
             <a:lstStyle/>
             <a:p>
               <a:pPr algn="ctr">
@@ -15696,18 +15979,19 @@
                   <a:spcPct val="0"/>
                 </a:spcBef>
               </a:pPr>
+              <a:endParaRPr/>
             </a:p>
           </p:txBody>
         </p:sp>
       </p:grpSp>
       <p:sp>
         <p:nvSpPr>
-          <p:cNvPr name="TextBox 8" id="8"/>
-          <p:cNvSpPr txBox="true"/>
-          <p:nvPr/>
-        </p:nvSpPr>
-        <p:spPr>
-          <a:xfrm rot="0">
+          <p:cNvPr id="8" name="TextBox 8"/>
+          <p:cNvSpPr txBox="1"/>
+          <p:nvPr/>
+        </p:nvSpPr>
+        <p:spPr>
+          <a:xfrm>
             <a:off x="1028700" y="643336"/>
             <a:ext cx="16093440" cy="1828800"/>
           </a:xfrm>
@@ -15716,7 +16000,7 @@
           </a:prstGeom>
         </p:spPr>
         <p:txBody>
-          <a:bodyPr anchor="t" rtlCol="false" tIns="0" lIns="0" bIns="0" rIns="0">
+          <a:bodyPr lIns="0" tIns="0" rIns="0" bIns="0" rtlCol="0" anchor="t">
             <a:spAutoFit/>
           </a:bodyPr>
           <a:lstStyle/>
@@ -15783,7 +16067,7 @@
           <a:noFill/>
         </p:spPr>
         <p:txBody>
-          <a:bodyPr wrap="square" lIns="36576" rIns="36576" tIns="27432" bIns="27432">
+          <a:bodyPr wrap="square" lIns="36576" tIns="27432" rIns="36576" bIns="27432">
             <a:spAutoFit/>
           </a:bodyPr>
           <a:lstStyle/>
@@ -15825,7 +16109,7 @@
           <a:noFill/>
         </p:spPr>
         <p:txBody>
-          <a:bodyPr wrap="square" lIns="36576" rIns="36576" tIns="27432" bIns="27432">
+          <a:bodyPr wrap="square" lIns="36576" tIns="27432" rIns="36576" bIns="27432">
             <a:spAutoFit/>
           </a:bodyPr>
           <a:lstStyle/>
@@ -15892,6 +16176,7 @@
           <a:lstStyle/>
           <a:p>
             <a:pPr algn="ctr"/>
+            <a:endParaRPr/>
           </a:p>
         </p:txBody>
       </p:sp>
@@ -15912,7 +16197,7 @@
           <a:noFill/>
         </p:spPr>
         <p:txBody>
-          <a:bodyPr wrap="square" lIns="36576" rIns="36576" tIns="27432" bIns="27432">
+          <a:bodyPr wrap="square" lIns="36576" tIns="27432" rIns="36576" bIns="27432">
             <a:spAutoFit/>
           </a:bodyPr>
           <a:lstStyle/>
@@ -15954,7 +16239,7 @@
           <a:noFill/>
         </p:spPr>
         <p:txBody>
-          <a:bodyPr wrap="square" lIns="36576" rIns="36576" tIns="27432" bIns="27432">
+          <a:bodyPr wrap="square" lIns="36576" tIns="27432" rIns="36576" bIns="27432">
             <a:spAutoFit/>
           </a:bodyPr>
           <a:lstStyle/>
@@ -16059,6 +16344,7 @@
           <a:lstStyle/>
           <a:p>
             <a:pPr algn="ctr"/>
+            <a:endParaRPr/>
           </a:p>
         </p:txBody>
       </p:sp>
@@ -16079,7 +16365,7 @@
           <a:noFill/>
         </p:spPr>
         <p:txBody>
-          <a:bodyPr wrap="square" lIns="36576" rIns="36576" tIns="27432" bIns="27432">
+          <a:bodyPr wrap="square" lIns="36576" tIns="27432" rIns="36576" bIns="27432">
             <a:spAutoFit/>
           </a:bodyPr>
           <a:lstStyle/>
@@ -16121,7 +16407,7 @@
           <a:noFill/>
         </p:spPr>
         <p:txBody>
-          <a:bodyPr wrap="square" lIns="36576" rIns="36576" tIns="27432" bIns="27432">
+          <a:bodyPr wrap="square" lIns="36576" tIns="27432" rIns="36576" bIns="27432">
             <a:spAutoFit/>
           </a:bodyPr>
           <a:lstStyle/>
@@ -16201,7 +16487,7 @@
           <a:noFill/>
         </p:spPr>
         <p:txBody>
-          <a:bodyPr wrap="square" lIns="36576" rIns="36576" tIns="27432" bIns="27432">
+          <a:bodyPr wrap="square" lIns="36576" tIns="27432" rIns="36576" bIns="27432">
             <a:spAutoFit/>
           </a:bodyPr>
           <a:lstStyle/>
@@ -16220,7 +16506,7 @@
                   <a:srgbClr val="030F7D"/>
                 </a:solidFill>
                 <a:latin typeface="Poppins"/>
-                <a:hlinkClick r:id="rId5"/>
+                <a:hlinkClick r:id="rId3"/>
               </a:rPr>
               <a:t>Open GitHub Actions run 38173375457</a:t>
             </a:r>
@@ -16244,7 +16530,7 @@
           <a:noFill/>
         </p:spPr>
         <p:txBody>
-          <a:bodyPr wrap="square" lIns="36576" rIns="36576" tIns="27432" bIns="27432">
+          <a:bodyPr wrap="square" lIns="36576" tIns="27432" rIns="36576" bIns="27432">
             <a:spAutoFit/>
           </a:bodyPr>
           <a:lstStyle/>
@@ -16263,7 +16549,7 @@
                   <a:srgbClr val="030F7D"/>
                 </a:solidFill>
                 <a:latin typeface="Poppins"/>
-                <a:hlinkClick r:id="rId6"/>
+                <a:hlinkClick r:id="rId4"/>
               </a:rPr>
               <a:t>Open GitHub Actions run 38173380800</a:t>
             </a:r>
@@ -16287,7 +16573,7 @@
           <a:noFill/>
         </p:spPr>
         <p:txBody>
-          <a:bodyPr wrap="square" lIns="36576" rIns="36576" tIns="27432" bIns="27432">
+          <a:bodyPr wrap="square" lIns="36576" tIns="27432" rIns="36576" bIns="27432">
             <a:spAutoFit/>
           </a:bodyPr>
           <a:lstStyle/>
@@ -16321,7 +16607,7 @@
 </file>
 
 <file path=ppt/slides/slide8.xml><?xml version="1.0" encoding="utf-8"?>
-<p:sld xmlns:p="http://schemas.openxmlformats.org/presentationml/2006/main" xmlns:a="http://schemas.openxmlformats.org/drawingml/2006/main" xmlns:r="http://schemas.openxmlformats.org/officeDocument/2006/relationships">
+<p:sld xmlns:a="http://schemas.openxmlformats.org/drawingml/2006/main" xmlns:r="http://schemas.openxmlformats.org/officeDocument/2006/relationships" xmlns:p="http://schemas.openxmlformats.org/presentationml/2006/main">
   <p:cSld>
     <p:spTree>
       <p:nvGrpSpPr>
@@ -16339,12 +16625,12 @@
       </p:grpSpPr>
       <p:grpSp>
         <p:nvGrpSpPr>
-          <p:cNvPr name="Group 2" id="2"/>
+          <p:cNvPr id="2" name="Group 2"/>
           <p:cNvGrpSpPr/>
           <p:nvPr/>
         </p:nvGrpSpPr>
         <p:grpSpPr>
-          <a:xfrm rot="0">
+          <a:xfrm>
             <a:off x="0" y="-268747"/>
             <a:ext cx="30733015" cy="2895405"/>
             <a:chOff x="0" y="0"/>
@@ -16353,12 +16639,12 @@
         </p:grpSpPr>
         <p:sp>
           <p:nvSpPr>
-            <p:cNvPr name="Freeform 3" id="3"/>
+            <p:cNvPr id="3" name="Freeform 3"/>
             <p:cNvSpPr/>
             <p:nvPr/>
           </p:nvSpPr>
           <p:spPr>
-            <a:xfrm flipH="false" flipV="false" rot="0">
+            <a:xfrm>
               <a:off x="0" y="0"/>
               <a:ext cx="8094292" cy="762576"/>
             </a:xfrm>
@@ -16367,9 +16653,9 @@
               <a:gdLst/>
               <a:ahLst/>
               <a:cxnLst/>
-              <a:rect r="r" b="b" t="t" l="l"/>
+              <a:rect l="l" t="t" r="r" b="b"/>
               <a:pathLst>
-                <a:path h="762576" w="8094292">
+                <a:path w="8094292" h="762576">
                   <a:moveTo>
                     <a:pt x="0" y="0"/>
                   </a:moveTo>
@@ -16386,7 +16672,7 @@
                 </a:path>
               </a:pathLst>
             </a:custGeom>
-            <a:gradFill rotWithShape="true">
+            <a:gradFill rotWithShape="1">
               <a:gsLst>
                 <a:gs pos="0">
                   <a:srgbClr val="030F7D">
@@ -16405,8 +16691,8 @@
         </p:sp>
         <p:sp>
           <p:nvSpPr>
-            <p:cNvPr name="TextBox 4" id="4"/>
-            <p:cNvSpPr txBox="true"/>
+            <p:cNvPr id="4" name="TextBox 4"/>
+            <p:cNvSpPr txBox="1"/>
             <p:nvPr/>
           </p:nvSpPr>
           <p:spPr>
@@ -16419,7 +16705,7 @@
             </a:prstGeom>
           </p:spPr>
           <p:txBody>
-            <a:bodyPr anchor="ctr" rtlCol="false" tIns="50800" lIns="50800" bIns="50800" rIns="50800"/>
+            <a:bodyPr lIns="50800" tIns="50800" rIns="50800" bIns="50800" rtlCol="0" anchor="ctr"/>
             <a:lstStyle/>
             <a:p>
               <a:pPr algn="ctr">
@@ -16430,18 +16716,19 @@
                   <a:spcPct val="0"/>
                 </a:spcBef>
               </a:pPr>
+              <a:endParaRPr/>
             </a:p>
           </p:txBody>
         </p:sp>
       </p:grpSp>
       <p:sp>
         <p:nvSpPr>
-          <p:cNvPr name="TextBox 9" id="9"/>
-          <p:cNvSpPr txBox="true"/>
-          <p:nvPr/>
-        </p:nvSpPr>
-        <p:spPr>
-          <a:xfrm rot="0">
+          <p:cNvPr id="9" name="TextBox 9"/>
+          <p:cNvSpPr txBox="1"/>
+          <p:nvPr/>
+        </p:nvSpPr>
+        <p:spPr>
+          <a:xfrm>
             <a:off x="1028700" y="643336"/>
             <a:ext cx="16093440" cy="1828800"/>
           </a:xfrm>
@@ -16450,7 +16737,7 @@
           </a:prstGeom>
         </p:spPr>
         <p:txBody>
-          <a:bodyPr anchor="t" rtlCol="false" tIns="0" lIns="0" bIns="0" rIns="0">
+          <a:bodyPr lIns="0" tIns="0" rIns="0" bIns="0" rtlCol="0" anchor="t">
             <a:spAutoFit/>
           </a:bodyPr>
           <a:lstStyle/>
@@ -16517,7 +16804,7 @@
           <a:noFill/>
         </p:spPr>
         <p:txBody>
-          <a:bodyPr wrap="square" lIns="36576" rIns="36576" tIns="27432" bIns="27432">
+          <a:bodyPr wrap="square" lIns="36576" tIns="27432" rIns="36576" bIns="27432">
             <a:spAutoFit/>
           </a:bodyPr>
           <a:lstStyle/>
@@ -16559,7 +16846,7 @@
           <a:noFill/>
         </p:spPr>
         <p:txBody>
-          <a:bodyPr wrap="square" lIns="36576" rIns="36576" tIns="27432" bIns="27432">
+          <a:bodyPr wrap="square" lIns="36576" tIns="27432" rIns="36576" bIns="27432">
             <a:spAutoFit/>
           </a:bodyPr>
           <a:lstStyle/>
@@ -16593,7 +16880,7 @@
           <p:nvPr/>
         </p:nvPicPr>
         <p:blipFill>
-          <a:blip r:embed="rId7"/>
+          <a:blip r:embed="rId3"/>
           <a:stretch>
             <a:fillRect/>
           </a:stretch>
@@ -16650,6 +16937,7 @@
           <a:lstStyle/>
           <a:p>
             <a:pPr algn="ctr"/>
+            <a:endParaRPr/>
           </a:p>
         </p:txBody>
       </p:sp>
@@ -16670,7 +16958,7 @@
           <a:noFill/>
         </p:spPr>
         <p:txBody>
-          <a:bodyPr wrap="square" lIns="36576" rIns="36576" tIns="27432" bIns="27432">
+          <a:bodyPr wrap="square" lIns="36576" tIns="27432" rIns="36576" bIns="27432">
             <a:spAutoFit/>
           </a:bodyPr>
           <a:lstStyle/>
@@ -16712,7 +17000,7 @@
           <a:noFill/>
         </p:spPr>
         <p:txBody>
-          <a:bodyPr wrap="square" lIns="36576" rIns="36576" tIns="27432" bIns="27432">
+          <a:bodyPr wrap="square" lIns="36576" tIns="27432" rIns="36576" bIns="27432">
             <a:spAutoFit/>
           </a:bodyPr>
           <a:lstStyle/>
@@ -16817,6 +17105,7 @@
           <a:lstStyle/>
           <a:p>
             <a:pPr algn="ctr"/>
+            <a:endParaRPr/>
           </a:p>
         </p:txBody>
       </p:sp>
@@ -16837,7 +17126,7 @@
           <a:noFill/>
         </p:spPr>
         <p:txBody>
-          <a:bodyPr wrap="square" lIns="36576" rIns="36576" tIns="27432" bIns="27432">
+          <a:bodyPr wrap="square" lIns="36576" tIns="27432" rIns="36576" bIns="27432">
             <a:spAutoFit/>
           </a:bodyPr>
           <a:lstStyle/>
@@ -16879,7 +17168,7 @@
           <a:noFill/>
         </p:spPr>
         <p:txBody>
-          <a:bodyPr wrap="square" lIns="36576" rIns="36576" tIns="27432" bIns="27432">
+          <a:bodyPr wrap="square" lIns="36576" tIns="27432" rIns="36576" bIns="27432">
             <a:spAutoFit/>
           </a:bodyPr>
           <a:lstStyle/>
@@ -16951,7 +17240,7 @@
 </file>
 
 <file path=ppt/slides/slide9.xml><?xml version="1.0" encoding="utf-8"?>
-<p:sld xmlns:p="http://schemas.openxmlformats.org/presentationml/2006/main" xmlns:a="http://schemas.openxmlformats.org/drawingml/2006/main" xmlns:r="http://schemas.openxmlformats.org/officeDocument/2006/relationships">
+<p:sld xmlns:a="http://schemas.openxmlformats.org/drawingml/2006/main" xmlns:r="http://schemas.openxmlformats.org/officeDocument/2006/relationships" xmlns:p="http://schemas.openxmlformats.org/presentationml/2006/main">
   <p:cSld>
     <p:spTree>
       <p:nvGrpSpPr>
@@ -16969,12 +17258,12 @@
       </p:grpSpPr>
       <p:grpSp>
         <p:nvGrpSpPr>
-          <p:cNvPr name="Group 2" id="2"/>
+          <p:cNvPr id="2" name="Group 2"/>
           <p:cNvGrpSpPr/>
           <p:nvPr/>
         </p:nvGrpSpPr>
         <p:grpSpPr>
-          <a:xfrm rot="0">
+          <a:xfrm>
             <a:off x="0" y="-268747"/>
             <a:ext cx="30733015" cy="2895405"/>
             <a:chOff x="0" y="0"/>
@@ -16983,12 +17272,12 @@
         </p:grpSpPr>
         <p:sp>
           <p:nvSpPr>
-            <p:cNvPr name="Freeform 3" id="3"/>
+            <p:cNvPr id="3" name="Freeform 3"/>
             <p:cNvSpPr/>
             <p:nvPr/>
           </p:nvSpPr>
           <p:spPr>
-            <a:xfrm flipH="false" flipV="false" rot="0">
+            <a:xfrm>
               <a:off x="0" y="0"/>
               <a:ext cx="8094292" cy="762576"/>
             </a:xfrm>
@@ -16997,9 +17286,9 @@
               <a:gdLst/>
               <a:ahLst/>
               <a:cxnLst/>
-              <a:rect r="r" b="b" t="t" l="l"/>
+              <a:rect l="l" t="t" r="r" b="b"/>
               <a:pathLst>
-                <a:path h="762576" w="8094292">
+                <a:path w="8094292" h="762576">
                   <a:moveTo>
                     <a:pt x="0" y="0"/>
                   </a:moveTo>
@@ -17016,7 +17305,7 @@
                 </a:path>
               </a:pathLst>
             </a:custGeom>
-            <a:gradFill rotWithShape="true">
+            <a:gradFill rotWithShape="1">
               <a:gsLst>
                 <a:gs pos="0">
                   <a:srgbClr val="030F7D">
@@ -17035,8 +17324,8 @@
         </p:sp>
         <p:sp>
           <p:nvSpPr>
-            <p:cNvPr name="TextBox 4" id="4"/>
-            <p:cNvSpPr txBox="true"/>
+            <p:cNvPr id="4" name="TextBox 4"/>
+            <p:cNvSpPr txBox="1"/>
             <p:nvPr/>
           </p:nvSpPr>
           <p:spPr>
@@ -17049,7 +17338,7 @@
             </a:prstGeom>
           </p:spPr>
           <p:txBody>
-            <a:bodyPr anchor="ctr" rtlCol="false" tIns="50800" lIns="50800" bIns="50800" rIns="50800"/>
+            <a:bodyPr lIns="50800" tIns="50800" rIns="50800" bIns="50800" rtlCol="0" anchor="ctr"/>
             <a:lstStyle/>
             <a:p>
               <a:pPr algn="ctr">
@@ -17060,18 +17349,19 @@
                   <a:spcPct val="0"/>
                 </a:spcBef>
               </a:pPr>
+              <a:endParaRPr/>
             </a:p>
           </p:txBody>
         </p:sp>
       </p:grpSp>
       <p:sp>
         <p:nvSpPr>
-          <p:cNvPr name="TextBox 8" id="8"/>
-          <p:cNvSpPr txBox="true"/>
-          <p:nvPr/>
-        </p:nvSpPr>
-        <p:spPr>
-          <a:xfrm rot="0">
+          <p:cNvPr id="8" name="TextBox 8"/>
+          <p:cNvSpPr txBox="1"/>
+          <p:nvPr/>
+        </p:nvSpPr>
+        <p:spPr>
+          <a:xfrm>
             <a:off x="1028700" y="643336"/>
             <a:ext cx="16093440" cy="1828800"/>
           </a:xfrm>
@@ -17080,7 +17370,7 @@
           </a:prstGeom>
         </p:spPr>
         <p:txBody>
-          <a:bodyPr anchor="t" rtlCol="false" tIns="0" lIns="0" bIns="0" rIns="0">
+          <a:bodyPr lIns="0" tIns="0" rIns="0" bIns="0" rtlCol="0" anchor="t">
             <a:spAutoFit/>
           </a:bodyPr>
           <a:lstStyle/>
@@ -17147,7 +17437,7 @@
           <a:noFill/>
         </p:spPr>
         <p:txBody>
-          <a:bodyPr wrap="square" lIns="36576" rIns="36576" tIns="27432" bIns="27432">
+          <a:bodyPr wrap="square" lIns="36576" tIns="27432" rIns="36576" bIns="27432">
             <a:spAutoFit/>
           </a:bodyPr>
           <a:lstStyle/>
@@ -17189,7 +17479,7 @@
           <a:noFill/>
         </p:spPr>
         <p:txBody>
-          <a:bodyPr wrap="square" lIns="36576" rIns="36576" tIns="27432" bIns="27432">
+          <a:bodyPr wrap="square" lIns="36576" tIns="27432" rIns="36576" bIns="27432">
             <a:spAutoFit/>
           </a:bodyPr>
           <a:lstStyle/>
@@ -17223,7 +17513,7 @@
           <p:nvPr/>
         </p:nvPicPr>
         <p:blipFill>
-          <a:blip r:embed="rId5"/>
+          <a:blip r:embed="rId3"/>
           <a:stretch>
             <a:fillRect/>
           </a:stretch>
@@ -17280,6 +17570,7 @@
           <a:lstStyle/>
           <a:p>
             <a:pPr algn="ctr"/>
+            <a:endParaRPr/>
           </a:p>
         </p:txBody>
       </p:sp>
@@ -17300,7 +17591,7 @@
           <a:noFill/>
         </p:spPr>
         <p:txBody>
-          <a:bodyPr wrap="square" lIns="36576" rIns="36576" tIns="27432" bIns="27432">
+          <a:bodyPr wrap="square" lIns="36576" tIns="27432" rIns="36576" bIns="27432">
             <a:spAutoFit/>
           </a:bodyPr>
           <a:lstStyle/>
@@ -17342,7 +17633,7 @@
           <a:noFill/>
         </p:spPr>
         <p:txBody>
-          <a:bodyPr wrap="square" lIns="36576" rIns="36576" tIns="27432" bIns="27432">
+          <a:bodyPr wrap="square" lIns="36576" tIns="27432" rIns="36576" bIns="27432">
             <a:spAutoFit/>
           </a:bodyPr>
           <a:lstStyle/>
@@ -17447,6 +17738,7 @@
           <a:lstStyle/>
           <a:p>
             <a:pPr algn="ctr"/>
+            <a:endParaRPr/>
           </a:p>
         </p:txBody>
       </p:sp>
@@ -17467,7 +17759,7 @@
           <a:noFill/>
         </p:spPr>
         <p:txBody>
-          <a:bodyPr wrap="square" lIns="36576" rIns="36576" tIns="27432" bIns="27432">
+          <a:bodyPr wrap="square" lIns="36576" tIns="27432" rIns="36576" bIns="27432">
             <a:spAutoFit/>
           </a:bodyPr>
           <a:lstStyle/>
@@ -17509,7 +17801,7 @@
           <a:noFill/>
         </p:spPr>
         <p:txBody>
-          <a:bodyPr wrap="square" lIns="36576" rIns="36576" tIns="27432" bIns="27432">
+          <a:bodyPr wrap="square" lIns="36576" tIns="27432" rIns="36576" bIns="27432">
             <a:spAutoFit/>
           </a:bodyPr>
           <a:lstStyle/>
@@ -17589,7 +17881,7 @@
           <a:noFill/>
         </p:spPr>
         <p:txBody>
-          <a:bodyPr wrap="square" lIns="36576" rIns="36576" tIns="27432" bIns="27432">
+          <a:bodyPr wrap="square" lIns="36576" tIns="27432" rIns="36576" bIns="27432">
             <a:spAutoFit/>
           </a:bodyPr>
           <a:lstStyle/>
